--- a/Presentacion.pptx
+++ b/Presentacion.pptx
@@ -7,11 +7,13 @@
   <p:sldIdLst>
     <p:sldId id="256" r:id="rId2"/>
     <p:sldId id="257" r:id="rId3"/>
+    <p:sldId id="264" r:id="rId14"/>
     <p:sldId id="258" r:id="rId4"/>
-    <p:sldId id="259" r:id="rId5"/>
-    <p:sldId id="260" r:id="rId6"/>
     <p:sldId id="261" r:id="rId7"/>
     <p:sldId id="262" r:id="rId8"/>
+    <p:sldId id="260" r:id="rId6"/>
+    <p:sldId id="259" r:id="rId5"/>
+    <p:sldId id="265" r:id="rId15"/>
     <p:sldId id="263" r:id="rId9"/>
   </p:sldIdLst>
   <p:sldSz cx="12192000" cy="6858000"/>
@@ -309,7 +311,7 @@
           <a:p>
             <a:fld id="{5BCAD085-E8A6-8845-BD4E-CB4CCA059FC4}" type="datetimeFigureOut">
               <a:rPr lang="en-US" smtClean="0"/>
-              <a:t>7/6/2026</a:t>
+              <a:t>7/7/2026</a:t>
             </a:fld>
             <a:endParaRPr lang="en-US"/>
           </a:p>
@@ -477,7 +479,7 @@
           <a:p>
             <a:fld id="{5BCAD085-E8A6-8845-BD4E-CB4CCA059FC4}" type="datetimeFigureOut">
               <a:rPr lang="en-US" smtClean="0"/>
-              <a:t>7/6/2026</a:t>
+              <a:t>7/7/2026</a:t>
             </a:fld>
             <a:endParaRPr lang="en-US"/>
           </a:p>
@@ -655,7 +657,7 @@
           <a:p>
             <a:fld id="{5BCAD085-E8A6-8845-BD4E-CB4CCA059FC4}" type="datetimeFigureOut">
               <a:rPr lang="en-US" smtClean="0"/>
-              <a:t>7/6/2026</a:t>
+              <a:t>7/7/2026</a:t>
             </a:fld>
             <a:endParaRPr lang="en-US"/>
           </a:p>
@@ -823,7 +825,7 @@
           <a:p>
             <a:fld id="{5BCAD085-E8A6-8845-BD4E-CB4CCA059FC4}" type="datetimeFigureOut">
               <a:rPr lang="en-US" smtClean="0"/>
-              <a:t>7/6/2026</a:t>
+              <a:t>7/7/2026</a:t>
             </a:fld>
             <a:endParaRPr lang="en-US"/>
           </a:p>
@@ -1068,7 +1070,7 @@
           <a:p>
             <a:fld id="{5BCAD085-E8A6-8845-BD4E-CB4CCA059FC4}" type="datetimeFigureOut">
               <a:rPr lang="en-US" smtClean="0"/>
-              <a:t>7/6/2026</a:t>
+              <a:t>7/7/2026</a:t>
             </a:fld>
             <a:endParaRPr lang="en-US"/>
           </a:p>
@@ -1353,7 +1355,7 @@
           <a:p>
             <a:fld id="{5BCAD085-E8A6-8845-BD4E-CB4CCA059FC4}" type="datetimeFigureOut">
               <a:rPr lang="en-US" smtClean="0"/>
-              <a:t>7/6/2026</a:t>
+              <a:t>7/7/2026</a:t>
             </a:fld>
             <a:endParaRPr lang="en-US"/>
           </a:p>
@@ -1772,7 +1774,7 @@
           <a:p>
             <a:fld id="{5BCAD085-E8A6-8845-BD4E-CB4CCA059FC4}" type="datetimeFigureOut">
               <a:rPr lang="en-US" smtClean="0"/>
-              <a:t>7/6/2026</a:t>
+              <a:t>7/7/2026</a:t>
             </a:fld>
             <a:endParaRPr lang="en-US"/>
           </a:p>
@@ -1889,7 +1891,7 @@
           <a:p>
             <a:fld id="{5BCAD085-E8A6-8845-BD4E-CB4CCA059FC4}" type="datetimeFigureOut">
               <a:rPr lang="en-US" smtClean="0"/>
-              <a:t>7/6/2026</a:t>
+              <a:t>7/7/2026</a:t>
             </a:fld>
             <a:endParaRPr lang="en-US"/>
           </a:p>
@@ -1984,7 +1986,7 @@
           <a:p>
             <a:fld id="{5BCAD085-E8A6-8845-BD4E-CB4CCA059FC4}" type="datetimeFigureOut">
               <a:rPr lang="en-US" smtClean="0"/>
-              <a:t>7/6/2026</a:t>
+              <a:t>7/7/2026</a:t>
             </a:fld>
             <a:endParaRPr lang="en-US"/>
           </a:p>
@@ -2259,7 +2261,7 @@
           <a:p>
             <a:fld id="{5BCAD085-E8A6-8845-BD4E-CB4CCA059FC4}" type="datetimeFigureOut">
               <a:rPr lang="en-US" smtClean="0"/>
-              <a:t>7/6/2026</a:t>
+              <a:t>7/7/2026</a:t>
             </a:fld>
             <a:endParaRPr lang="en-US"/>
           </a:p>
@@ -2511,7 +2513,7 @@
           <a:p>
             <a:fld id="{5BCAD085-E8A6-8845-BD4E-CB4CCA059FC4}" type="datetimeFigureOut">
               <a:rPr lang="en-US" smtClean="0"/>
-              <a:t>7/6/2026</a:t>
+              <a:t>7/7/2026</a:t>
             </a:fld>
             <a:endParaRPr lang="en-US"/>
           </a:p>
@@ -2722,7 +2724,7 @@
           <a:p>
             <a:fld id="{5BCAD085-E8A6-8845-BD4E-CB4CCA059FC4}" type="datetimeFigureOut">
               <a:rPr lang="en-US" smtClean="0"/>
-              <a:t>7/6/2026</a:t>
+              <a:t>7/7/2026</a:t>
             </a:fld>
             <a:endParaRPr lang="en-US"/>
           </a:p>
@@ -3137,7 +3139,7 @@
           <a:lstStyle/>
           <a:p>
             <a:pPr algn="ctr"/>
-            <a:endParaRPr/>
+            <a:endParaRPr lang="es-EC" noProof="0" dirty="0"/>
           </a:p>
         </p:txBody>
       </p:sp>
@@ -3181,7 +3183,7 @@
           <a:lstStyle/>
           <a:p>
             <a:pPr algn="ctr"/>
-            <a:endParaRPr/>
+            <a:endParaRPr lang="es-EC" noProof="0" dirty="0"/>
           </a:p>
         </p:txBody>
       </p:sp>
@@ -3216,7 +3218,7 @@
               </a:defRPr>
             </a:pPr>
             <a:r>
-              <a:rPr dirty="0"/>
+              <a:rPr lang="es-EC" noProof="0" dirty="0"/>
               <a:t>UNIVERSIDAD ESTATAL DE MILAGRO</a:t>
             </a:r>
           </a:p>
@@ -3233,36 +3235,8 @@
               </a:defRPr>
             </a:pPr>
             <a:r>
-              <a:rPr dirty="0" err="1"/>
-              <a:t>Facultad</a:t>
-            </a:r>
-            <a:r>
-              <a:rPr dirty="0"/>
-              <a:t> de </a:t>
-            </a:r>
-            <a:r>
-              <a:rPr dirty="0" err="1"/>
-              <a:t>Ciencias</a:t>
-            </a:r>
-            <a:r>
-              <a:rPr dirty="0"/>
-              <a:t> e </a:t>
-            </a:r>
-            <a:r>
-              <a:rPr dirty="0" err="1"/>
-              <a:t>Ingenierías</a:t>
-            </a:r>
-            <a:r>
-              <a:rPr dirty="0"/>
-              <a:t> | Carrera de Ingeniería </a:t>
-            </a:r>
-            <a:r>
-              <a:rPr dirty="0" err="1"/>
-              <a:t>en</a:t>
-            </a:r>
-            <a:r>
-              <a:rPr dirty="0"/>
-              <a:t> Software</a:t>
+              <a:rPr lang="es-EC" noProof="0" dirty="0"/>
+              <a:t>Facultad de Ciencias e Ingenierías | Carrera de Ingeniería en Software</a:t>
             </a:r>
           </a:p>
         </p:txBody>
@@ -3298,7 +3272,7 @@
               </a:defRPr>
             </a:pPr>
             <a:r>
-              <a:rPr dirty="0" err="1">
+              <a:rPr lang="es-EC" noProof="0" dirty="0">
                 <a:solidFill>
                   <a:srgbClr val="FFC000"/>
                 </a:solidFill>
@@ -3306,12 +3280,8 @@
               <a:t>Py</a:t>
             </a:r>
             <a:r>
-              <a:rPr dirty="0" err="1"/>
-              <a:t>Pharma</a:t>
-            </a:r>
-            <a:r>
-              <a:rPr dirty="0"/>
-              <a:t> Manager</a:t>
+              <a:rPr lang="es-EC" noProof="0" dirty="0"/>
+              <a:t>Pharma Manager</a:t>
             </a:r>
           </a:p>
           <a:p>
@@ -3324,30 +3294,9 @@
               </a:defRPr>
             </a:pPr>
             <a:r>
-              <a:rPr dirty="0"/>
-              <a:t>Sistema de </a:t>
-            </a:r>
-            <a:r>
-              <a:rPr dirty="0" err="1"/>
-              <a:t>Gestión</a:t>
-            </a:r>
-            <a:r>
-              <a:rPr dirty="0"/>
-              <a:t> de Farmacia </a:t>
-            </a:r>
-            <a:r>
-              <a:rPr dirty="0" err="1"/>
-              <a:t>Orientado</a:t>
-            </a:r>
-            <a:r>
-              <a:rPr dirty="0"/>
-              <a:t> a </a:t>
-            </a:r>
-            <a:r>
-              <a:rPr dirty="0" err="1"/>
-              <a:t>Objetos</a:t>
-            </a:r>
-            <a:endParaRPr dirty="0"/>
+              <a:rPr lang="es-EC" noProof="0" dirty="0"/>
+              <a:t>Sistema de Gestión de Farmacia Orientado a Objetos</a:t>
+            </a:r>
           </a:p>
         </p:txBody>
       </p:sp>
@@ -3393,7 +3342,7 @@
           <a:lstStyle/>
           <a:p>
             <a:pPr algn="ctr"/>
-            <a:endParaRPr/>
+            <a:endParaRPr lang="es-EC" noProof="0" dirty="0"/>
           </a:p>
         </p:txBody>
       </p:sp>
@@ -3431,7 +3380,7 @@
               </a:defRPr>
             </a:pPr>
             <a:r>
-              <a:rPr dirty="0"/>
+              <a:rPr lang="es-EC" noProof="0" dirty="0"/>
               <a:t>DATOS ACADÉMICOS Y EQUIPO DE DESARROLLO</a:t>
             </a:r>
           </a:p>
@@ -3448,18 +3397,9 @@
               </a:defRPr>
             </a:pPr>
             <a:r>
-              <a:rPr dirty="0"/>
-              <a:t>• Materia: </a:t>
-            </a:r>
-            <a:r>
-              <a:rPr dirty="0" err="1"/>
-              <a:t>Estructura</a:t>
-            </a:r>
-            <a:r>
-              <a:rPr dirty="0"/>
-              <a:t> de Datos     </a:t>
-            </a:r>
-            <a:endParaRPr lang="es-419" dirty="0"/>
+              <a:rPr lang="es-EC" noProof="0" dirty="0"/>
+              <a:t>• Materia: Estructura de Datos     </a:t>
+            </a:r>
           </a:p>
           <a:p>
             <a:pPr>
@@ -3474,7 +3414,7 @@
               </a:defRPr>
             </a:pPr>
             <a:r>
-              <a:rPr dirty="0"/>
+              <a:rPr lang="es-EC" noProof="0" dirty="0"/>
               <a:t>• Docente: Ing. Jessica Janina Cabezas Quinto</a:t>
             </a:r>
           </a:p>
@@ -3491,16 +3431,8 @@
               </a:defRPr>
             </a:pPr>
             <a:r>
-              <a:rPr dirty="0"/>
-              <a:t>• </a:t>
-            </a:r>
-            <a:r>
-              <a:rPr dirty="0" err="1"/>
-              <a:t>Integrantes</a:t>
-            </a:r>
-            <a:r>
-              <a:rPr dirty="0"/>
-              <a:t> - Grupo 7:</a:t>
+              <a:rPr lang="es-EC" noProof="0" dirty="0"/>
+              <a:t>• Integrantes - Grupo 7:</a:t>
             </a:r>
           </a:p>
           <a:p>
@@ -3513,16 +3445,8 @@
               </a:defRPr>
             </a:pPr>
             <a:r>
-              <a:rPr dirty="0"/>
-              <a:t>    - Steven </a:t>
-            </a:r>
-            <a:r>
-              <a:rPr dirty="0" err="1"/>
-              <a:t>Montalván</a:t>
-            </a:r>
-            <a:r>
-              <a:rPr dirty="0"/>
-              <a:t>        - Jonathan Bravo        - Sebastián Nevárez        - Elías Balladares</a:t>
+              <a:rPr lang="es-EC" noProof="0" dirty="0"/>
+              <a:t>    - Steven Montalván        - Jonathan Bravo        - Sebastián Nevárez        - Elías Balladares</a:t>
             </a:r>
           </a:p>
         </p:txBody>
@@ -3566,8 +3490,8 @@
 </p:sld>
 </file>
 
-<file path=ppt/slides/slide2.xml><?xml version="1.0" encoding="utf-8"?>
-<p:sld xmlns:a="http://schemas.openxmlformats.org/drawingml/2006/main" xmlns:r="http://schemas.openxmlformats.org/officeDocument/2006/relationships" xmlns:p="http://schemas.openxmlformats.org/presentationml/2006/main">
+<file path=ppt/slides/slide10.xml><?xml version="1.0" encoding="utf-8"?>
+<p:sld xmlns:a="http://schemas.openxmlformats.org/drawingml/2006/main" xmlns:p="http://schemas.openxmlformats.org/presentationml/2006/main" xmlns:r="http://schemas.openxmlformats.org/officeDocument/2006/relationships">
   <p:cSld>
     <p:spTree>
       <p:nvGrpSpPr>
@@ -3575,14 +3499,7 @@
         <p:cNvGrpSpPr/>
         <p:nvPr/>
       </p:nvGrpSpPr>
-      <p:grpSpPr>
-        <a:xfrm>
-          <a:off x="0" y="0"/>
-          <a:ext cx="0" cy="0"/>
-          <a:chOff x="0" y="0"/>
-          <a:chExt cx="0" cy="0"/>
-        </a:xfrm>
-      </p:grpSpPr>
+      <p:grpSpPr/>
       <p:sp>
         <p:nvSpPr>
           <p:cNvPr id="2" name="Rectangle 1"/>
@@ -3623,7 +3540,6 @@
           <a:lstStyle/>
           <a:p>
             <a:pPr algn="ctr"/>
-            <a:endParaRPr/>
           </a:p>
         </p:txBody>
       </p:sp>
@@ -3658,14 +3574,11 @@
               </a:defRPr>
             </a:pPr>
             <a:r>
-              <a:t>¿Qué es PyPharma Manager?</a:t>
-            </a:r>
-          </a:p>
-          <a:p>
-            <a:pPr>
-              <a:spcBef>
-                <a:spcPts val="400"/>
-              </a:spcBef>
+              <a:t>[3. LA SUPERFICIE] Interfaz Web HTML5 de Apoyo</a:t>
+            </a:r>
+          </a:p>
+          <a:p>
+            <a:pPr>
               <a:defRPr sz="1500">
                 <a:solidFill>
                   <a:srgbClr val="6E7882"/>
@@ -3674,7 +3587,7 @@
               </a:defRPr>
             </a:pPr>
             <a:r>
-              <a:t>Solución integral para la administración y control farmacéutico</a:t>
+              <a:t>Portafolio visual moderno y documentación como soporte para la exposición</a:t>
             </a:r>
           </a:p>
         </p:txBody>
@@ -3719,7 +3632,6 @@
           <a:lstStyle/>
           <a:p>
             <a:pPr algn="ctr"/>
-            <a:endParaRPr/>
           </a:p>
         </p:txBody>
       </p:sp>
@@ -3765,7 +3677,6 @@
           <a:lstStyle/>
           <a:p>
             <a:pPr algn="ctr"/>
-            <a:endParaRPr/>
           </a:p>
         </p:txBody>
       </p:sp>
@@ -3792,9 +3703,6 @@
           <a:lstStyle/>
           <a:p>
             <a:pPr>
-              <a:spcAft>
-                <a:spcPts val="1200"/>
-              </a:spcAft>
               <a:defRPr sz="1900" b="1">
                 <a:solidFill>
                   <a:srgbClr val="1E3A4C"/>
@@ -3803,15 +3711,12 @@
               </a:defRPr>
             </a:pPr>
             <a:r>
-              <a:t>Propuesta de Valor</a:t>
-            </a:r>
-          </a:p>
-          <a:p>
-            <a:pPr>
-              <a:spcAft>
-                <a:spcPts val="800"/>
-              </a:spcAft>
-              <a:defRPr sz="1400">
+              <a:t>Diseño y Desarrollo Web</a:t>
+            </a:r>
+          </a:p>
+          <a:p>
+            <a:pPr>
+              <a:defRPr sz="1400" b="0">
                 <a:solidFill>
                   <a:srgbClr val="283038"/>
                 </a:solidFill>
@@ -3819,23 +3724,12 @@
               </a:defRPr>
             </a:pPr>
             <a:r>
-              <a:rPr b="1">
-                <a:solidFill>
-                  <a:srgbClr val="48A9A6"/>
-                </a:solidFill>
-              </a:rPr>
-              <a:t>• Control de Inventario: </a:t>
-            </a:r>
-            <a:r>
-              <a:t>Administración eficiente del catálogo de medicamentos en tiempo real.</a:t>
-            </a:r>
-          </a:p>
-          <a:p>
-            <a:pPr>
-              <a:spcAft>
-                <a:spcPts val="800"/>
-              </a:spcAft>
-              <a:defRPr sz="1400">
+              <a:t>• Cumplimiento Académico: Desarrollo de página web ('index.html' y 'presentacion.html') según requisitos de la asignatura.</a:t>
+            </a:r>
+          </a:p>
+          <a:p>
+            <a:pPr>
+              <a:defRPr sz="1400" b="0">
                 <a:solidFill>
                   <a:srgbClr val="283038"/>
                 </a:solidFill>
@@ -3843,23 +3737,12 @@
               </a:defRPr>
             </a:pPr>
             <a:r>
-              <a:rPr b="1">
-                <a:solidFill>
-                  <a:srgbClr val="48A9A6"/>
-                </a:solidFill>
-              </a:rPr>
-              <a:t>• Gestión de Ventas: </a:t>
-            </a:r>
-            <a:r>
-              <a:t>Registro rápido de pedidos de clientes con cálculo automático de totales.</a:t>
-            </a:r>
-          </a:p>
-          <a:p>
-            <a:pPr>
-              <a:spcAft>
-                <a:spcPts val="800"/>
-              </a:spcAft>
-              <a:defRPr sz="1400">
+              <a:t>• Estética Moderna: Estilos CSS avanzados con gradientes, tipografía Google Fonts y diseño limpio y responsivo.</a:t>
+            </a:r>
+          </a:p>
+          <a:p>
+            <a:pPr>
+              <a:defRPr sz="1400" b="0">
                 <a:solidFill>
                   <a:srgbClr val="283038"/>
                 </a:solidFill>
@@ -3867,39 +3750,7 @@
               </a:defRPr>
             </a:pPr>
             <a:r>
-              <a:rPr b="1">
-                <a:solidFill>
-                  <a:srgbClr val="48A9A6"/>
-                </a:solidFill>
-              </a:rPr>
-              <a:t>• Persistencia Confiable: </a:t>
-            </a:r>
-            <a:r>
-              <a:t>Almacenamiento seguro y continuo en archivos de texto planos (TXT/CSV).</a:t>
-            </a:r>
-          </a:p>
-          <a:p>
-            <a:pPr>
-              <a:spcAft>
-                <a:spcPts val="800"/>
-              </a:spcAft>
-              <a:defRPr sz="1400">
-                <a:solidFill>
-                  <a:srgbClr val="283038"/>
-                </a:solidFill>
-                <a:latin typeface="Segoe UI"/>
-              </a:defRPr>
-            </a:pPr>
-            <a:r>
-              <a:rPr b="1">
-                <a:solidFill>
-                  <a:srgbClr val="48A9A6"/>
-                </a:solidFill>
-              </a:rPr>
-              <a:t>• Precisión Operativa: </a:t>
-            </a:r>
-            <a:r>
-              <a:t>Previene descuadres de stock y errores de cálculo en caja.</a:t>
+              <a:t>• Rol de Apoyo: Actúa como soporte visual y documental mientras el sistema principal corre de forma nativa en Python.</a:t>
             </a:r>
           </a:p>
         </p:txBody>
@@ -3946,7 +3797,6 @@
           <a:lstStyle/>
           <a:p>
             <a:pPr algn="ctr"/>
-            <a:endParaRPr/>
           </a:p>
         </p:txBody>
       </p:sp>
@@ -3973,9 +3823,6 @@
           <a:lstStyle/>
           <a:p>
             <a:pPr>
-              <a:spcAft>
-                <a:spcPts val="1200"/>
-              </a:spcAft>
               <a:defRPr sz="1900" b="1">
                 <a:solidFill>
                   <a:srgbClr val="1E3A4C"/>
@@ -3984,15 +3831,12 @@
               </a:defRPr>
             </a:pPr>
             <a:r>
-              <a:t>Características Principales</a:t>
-            </a:r>
-          </a:p>
-          <a:p>
-            <a:pPr>
-              <a:spcAft>
-                <a:spcPts val="800"/>
-              </a:spcAft>
-              <a:defRPr sz="1400">
+              <a:t>Contenido del Portal HTML5</a:t>
+            </a:r>
+          </a:p>
+          <a:p>
+            <a:pPr>
+              <a:defRPr sz="1400" b="0">
                 <a:solidFill>
                   <a:srgbClr val="283038"/>
                 </a:solidFill>
@@ -4000,23 +3844,12 @@
               </a:defRPr>
             </a:pPr>
             <a:r>
-              <a:rPr b="1">
-                <a:solidFill>
-                  <a:srgbClr val="48A9A6"/>
-                </a:solidFill>
-              </a:rPr>
-              <a:t>• Interfaz por Consola: </a:t>
-            </a:r>
-            <a:r>
-              <a:t>Menús interactivos rápidos, fluidos y de excelente legibilidad.</a:t>
-            </a:r>
-          </a:p>
-          <a:p>
-            <a:pPr>
-              <a:spcAft>
-                <a:spcPts val="800"/>
-              </a:spcAft>
-              <a:defRPr sz="1400">
+              <a:t>• Portada Institucional: Universidad Estatal de Milagro, facultad, asignatura, docente e integrantes del Grupo 7.</a:t>
+            </a:r>
+          </a:p>
+          <a:p>
+            <a:pPr>
+              <a:defRPr sz="1400" b="0">
                 <a:solidFill>
                   <a:srgbClr val="283038"/>
                 </a:solidFill>
@@ -4024,23 +3857,12 @@
               </a:defRPr>
             </a:pPr>
             <a:r>
-              <a:rPr b="1">
-                <a:solidFill>
-                  <a:srgbClr val="48A9A6"/>
-                </a:solidFill>
-              </a:rPr>
-              <a:t>• Validación Activa: </a:t>
-            </a:r>
-            <a:r>
-              <a:t>Protección contra errores de tipeo y manejo de excepciones (try/except).</a:t>
-            </a:r>
-          </a:p>
-          <a:p>
-            <a:pPr>
-              <a:spcAft>
-                <a:spcPts val="800"/>
-              </a:spcAft>
-              <a:defRPr sz="1400">
+              <a:t>• Documentación Técnica: Objetivo del sistema, descripción del problema y funcionalidades clave orientadas a objetos.</a:t>
+            </a:r>
+          </a:p>
+          <a:p>
+            <a:pPr>
+              <a:defRPr sz="1400" b="0">
                 <a:solidFill>
                   <a:srgbClr val="283038"/>
                 </a:solidFill>
@@ -4048,39 +3870,475 @@
               </a:defRPr>
             </a:pPr>
             <a:r>
-              <a:rPr b="1">
-                <a:solidFill>
-                  <a:srgbClr val="48A9A6"/>
-                </a:solidFill>
-              </a:rPr>
-              <a:t>• Orientado a Objetos: </a:t>
-            </a:r>
-            <a:r>
-              <a:t>Modelado robusto con clases especializadas y alta cohesión.</a:t>
-            </a:r>
-          </a:p>
-          <a:p>
-            <a:pPr>
-              <a:spcAft>
-                <a:spcPts val="800"/>
-              </a:spcAft>
-              <a:defRPr sz="1400">
-                <a:solidFill>
-                  <a:srgbClr val="283038"/>
-                </a:solidFill>
-                <a:latin typeface="Segoe UI"/>
-              </a:defRPr>
-            </a:pPr>
-            <a:r>
-              <a:rPr b="1">
-                <a:solidFill>
-                  <a:srgbClr val="48A9A6"/>
-                </a:solidFill>
-              </a:rPr>
-              <a:t>• Ligero y Nativo: </a:t>
-            </a:r>
-            <a:r>
-              <a:t>Desarrollado en Python puro, sin necesidad de bases de datos externas.</a:t>
+              <a:t>• Evidencia Visual: Capturas de pantalla del sistema en Python, tecnologías utilizadas y conclusiones generales.</a:t>
+            </a:r>
+          </a:p>
+        </p:txBody>
+      </p:sp>
+    </p:spTree>
+  </p:cSld>
+  <p:clrMapOvr>
+    <a:masterClrMapping/>
+  </p:clrMapOvr>
+</p:sld>
+</file>
+
+<file path=ppt/slides/slide2.xml><?xml version="1.0" encoding="utf-8"?>
+<p:sld xmlns:a="http://schemas.openxmlformats.org/drawingml/2006/main" xmlns:p="http://schemas.openxmlformats.org/presentationml/2006/main" xmlns:r="http://schemas.openxmlformats.org/officeDocument/2006/relationships">
+  <p:cSld>
+    <p:spTree>
+      <p:nvGrpSpPr>
+        <p:cNvPr id="1" name=""/>
+        <p:cNvGrpSpPr/>
+        <p:nvPr/>
+      </p:nvGrpSpPr>
+      <p:grpSpPr/>
+      <p:sp>
+        <p:nvSpPr>
+          <p:cNvPr id="2" name="Rectangle 1"/>
+          <p:cNvSpPr/>
+          <p:nvPr/>
+        </p:nvSpPr>
+        <p:spPr>
+          <a:xfrm>
+            <a:off x="0" y="0"/>
+            <a:ext cx="12191695" cy="6858000"/>
+          </a:xfrm>
+          <a:prstGeom prst="rect">
+            <a:avLst/>
+          </a:prstGeom>
+          <a:solidFill>
+            <a:srgbClr val="FAFBFC"/>
+          </a:solidFill>
+          <a:ln>
+            <a:noFill/>
+          </a:ln>
+        </p:spPr>
+        <p:style>
+          <a:lnRef idx="1">
+            <a:schemeClr val="accent1"/>
+          </a:lnRef>
+          <a:fillRef idx="3">
+            <a:schemeClr val="accent1"/>
+          </a:fillRef>
+          <a:effectRef idx="2">
+            <a:schemeClr val="accent1"/>
+          </a:effectRef>
+          <a:fontRef idx="minor">
+            <a:schemeClr val="lt1"/>
+          </a:fontRef>
+        </p:style>
+        <p:txBody>
+          <a:bodyPr rtlCol="0" anchor="ctr"/>
+          <a:lstStyle/>
+          <a:p>
+            <a:pPr algn="ctr"/>
+          </a:p>
+        </p:txBody>
+      </p:sp>
+      <p:sp>
+        <p:nvSpPr>
+          <p:cNvPr id="3" name="TextBox 2"/>
+          <p:cNvSpPr txBox="1"/>
+          <p:nvPr/>
+        </p:nvSpPr>
+        <p:spPr>
+          <a:xfrm>
+            <a:off x="731520" y="320040"/>
+            <a:ext cx="10698480" cy="1005840"/>
+          </a:xfrm>
+          <a:prstGeom prst="rect">
+            <a:avLst/>
+          </a:prstGeom>
+          <a:noFill/>
+        </p:spPr>
+        <p:txBody>
+          <a:bodyPr wrap="square">
+            <a:spAutoFit/>
+          </a:bodyPr>
+          <a:lstStyle/>
+          <a:p>
+            <a:pPr>
+              <a:defRPr sz="2800" b="1">
+                <a:solidFill>
+                  <a:srgbClr val="1E3A4C"/>
+                </a:solidFill>
+                <a:latin typeface="Segoe UI"/>
+              </a:defRPr>
+            </a:pPr>
+            <a:r>
+              <a:t>Jerarquía del Sistema: De la Raíz a la Superficie</a:t>
+            </a:r>
+          </a:p>
+          <a:p>
+            <a:pPr>
+              <a:defRPr sz="1500">
+                <a:solidFill>
+                  <a:srgbClr val="6E7882"/>
+                </a:solidFill>
+                <a:latin typeface="Segoe UI"/>
+              </a:defRPr>
+            </a:pPr>
+            <a:r>
+              <a:t>Estructura en capas y flujo bottom-up para la presentación del proyecto</a:t>
+            </a:r>
+          </a:p>
+        </p:txBody>
+      </p:sp>
+      <p:sp>
+        <p:nvSpPr>
+          <p:cNvPr id="4" name="Rectangle 3"/>
+          <p:cNvSpPr/>
+          <p:nvPr/>
+        </p:nvSpPr>
+        <p:spPr>
+          <a:xfrm>
+            <a:off x="731520" y="1325880"/>
+            <a:ext cx="1371600" cy="54864"/>
+          </a:xfrm>
+          <a:prstGeom prst="rect">
+            <a:avLst/>
+          </a:prstGeom>
+          <a:solidFill>
+            <a:srgbClr val="48A9A6"/>
+          </a:solidFill>
+          <a:ln>
+            <a:noFill/>
+          </a:ln>
+        </p:spPr>
+        <p:style>
+          <a:lnRef idx="1">
+            <a:schemeClr val="accent1"/>
+          </a:lnRef>
+          <a:fillRef idx="3">
+            <a:schemeClr val="accent1"/>
+          </a:fillRef>
+          <a:effectRef idx="2">
+            <a:schemeClr val="accent1"/>
+          </a:effectRef>
+          <a:fontRef idx="minor">
+            <a:schemeClr val="lt1"/>
+          </a:fontRef>
+        </p:style>
+        <p:txBody>
+          <a:bodyPr rtlCol="0" anchor="ctr"/>
+          <a:lstStyle/>
+          <a:p>
+            <a:pPr algn="ctr"/>
+          </a:p>
+        </p:txBody>
+      </p:sp>
+      <p:sp>
+        <p:nvSpPr>
+          <p:cNvPr id="5" name="Rounded Rectangle 4"/>
+          <p:cNvSpPr/>
+          <p:nvPr/>
+        </p:nvSpPr>
+        <p:spPr>
+          <a:xfrm>
+            <a:off x="731520" y="1600000"/>
+            <a:ext cx="10728960" cy="1380000"/>
+          </a:xfrm>
+          <a:prstGeom prst="roundRect">
+            <a:avLst/>
+          </a:prstGeom>
+          <a:solidFill>
+            <a:srgbClr val="FFFFFF"/>
+          </a:solidFill>
+          <a:ln w="25400">
+            <a:solidFill>
+              <a:srgbClr val="48A9A6"/>
+            </a:solidFill>
+          </a:ln>
+        </p:spPr>
+        <p:style>
+          <a:lnRef idx="1">
+            <a:schemeClr val="accent1"/>
+          </a:lnRef>
+          <a:fillRef idx="3">
+            <a:schemeClr val="accent1"/>
+          </a:fillRef>
+          <a:effectRef idx="2">
+            <a:schemeClr val="accent1"/>
+          </a:effectRef>
+          <a:fontRef idx="minor">
+            <a:schemeClr val="lt1"/>
+          </a:fontRef>
+        </p:style>
+        <p:txBody>
+          <a:bodyPr rtlCol="0" anchor="ctr" wrap="square" lIns="190500" tIns="152400" rIns="190500" bIns="152400"/>
+          <a:lstStyle/>
+          <a:p>
+            <a:pPr algn="ctr">
+              <a:defRPr sz="1700" b="1">
+                <a:solidFill>
+                  <a:srgbClr val="1E3A4C"/>
+                </a:solidFill>
+                <a:latin typeface="Segoe UI"/>
+              </a:defRPr>
+            </a:pPr>
+            <a:r>
+              <a:t>🔵  3. LA SUPERFICIE: Interfaz Visual y Consola (Capa de Presentación / UI)</a:t>
+            </a:r>
+          </a:p>
+          <a:p>
+            <a:pPr>
+              <a:defRPr sz="1300">
+                <a:solidFill>
+                  <a:srgbClr val="333333"/>
+                </a:solidFill>
+                <a:latin typeface="Segoe UI"/>
+              </a:defRPr>
+            </a:pPr>
+            <a:r>
+              <a:t>• Interfaz Operativa: Menús interactivos por consola ('menus.py' y 'main.py') con validaciones activas y limpieza de pantalla.</a:t>
+            </a:r>
+          </a:p>
+          <a:p>
+            <a:pPr>
+              <a:defRPr sz="1300">
+                <a:solidFill>
+                  <a:srgbClr val="333333"/>
+                </a:solidFill>
+                <a:latin typeface="Segoe UI"/>
+              </a:defRPr>
+            </a:pPr>
+            <a:r>
+              <a:t>• Soporte Web HTML5: Página web de apoyo ('index.html' y 'presentacion.html') que documenta visualmente el proyecto.</a:t>
+            </a:r>
+          </a:p>
+        </p:txBody>
+      </p:sp>
+      <p:sp>
+        <p:nvSpPr>
+          <p:cNvPr id="6" name="Rounded Rectangle 5"/>
+          <p:cNvSpPr/>
+          <p:nvPr/>
+        </p:nvSpPr>
+        <p:spPr>
+          <a:xfrm>
+            <a:off x="731520" y="3200000"/>
+            <a:ext cx="10728960" cy="1380000"/>
+          </a:xfrm>
+          <a:prstGeom prst="roundRect">
+            <a:avLst/>
+          </a:prstGeom>
+          <a:solidFill>
+            <a:srgbClr val="FFFFFF"/>
+          </a:solidFill>
+          <a:ln w="25400">
+            <a:solidFill>
+              <a:srgbClr val="E09F3E"/>
+            </a:solidFill>
+          </a:ln>
+        </p:spPr>
+        <p:style>
+          <a:lnRef idx="1">
+            <a:schemeClr val="accent1"/>
+          </a:lnRef>
+          <a:fillRef idx="3">
+            <a:schemeClr val="accent1"/>
+          </a:fillRef>
+          <a:effectRef idx="2">
+            <a:schemeClr val="accent1"/>
+          </a:effectRef>
+          <a:fontRef idx="minor">
+            <a:schemeClr val="lt1"/>
+          </a:fontRef>
+        </p:style>
+        <p:txBody>
+          <a:bodyPr rtlCol="0" anchor="ctr" wrap="square" lIns="190500" tIns="152400" rIns="190500" bIns="152400"/>
+          <a:lstStyle/>
+          <a:p>
+            <a:pPr algn="ctr">
+              <a:defRPr sz="1700" b="1">
+                <a:solidFill>
+                  <a:srgbClr val="1E3A4C"/>
+                </a:solidFill>
+                <a:latin typeface="Segoe UI"/>
+              </a:defRPr>
+            </a:pPr>
+            <a:r>
+              <a:t>🟡  2. EL TRONCO: Lógica de Negocio y Estructuras de Datos (Capa de Dominio POO)</a:t>
+            </a:r>
+          </a:p>
+          <a:p>
+            <a:pPr>
+              <a:defRPr sz="1300">
+                <a:solidFill>
+                  <a:srgbClr val="333333"/>
+                </a:solidFill>
+                <a:latin typeface="Segoe UI"/>
+              </a:defRPr>
+            </a:pPr>
+            <a:r>
+              <a:t>• Modelos en Memoria RAM: Clases 'Medicamento' (stock, descuentos) y 'Pedido' (carrito de compras, total, historial).</a:t>
+            </a:r>
+          </a:p>
+          <a:p>
+            <a:pPr>
+              <a:defRPr sz="1300">
+                <a:solidFill>
+                  <a:srgbClr val="333333"/>
+                </a:solidFill>
+                <a:latin typeface="Segoe UI"/>
+              </a:defRPr>
+            </a:pPr>
+            <a:r>
+              <a:t>• Modularidad y Seguridad: Búsquedas ultrarrápidas en listas de objetos y manejo de excepciones ('utilidades.py').</a:t>
+            </a:r>
+          </a:p>
+        </p:txBody>
+      </p:sp>
+      <p:sp>
+        <p:nvSpPr>
+          <p:cNvPr id="7" name="Rounded Rectangle 6"/>
+          <p:cNvSpPr/>
+          <p:nvPr/>
+        </p:nvSpPr>
+        <p:spPr>
+          <a:xfrm>
+            <a:off x="731520" y="4800000"/>
+            <a:ext cx="10728960" cy="1380000"/>
+          </a:xfrm>
+          <a:prstGeom prst="roundRect">
+            <a:avLst/>
+          </a:prstGeom>
+          <a:solidFill>
+            <a:srgbClr val="FFFFFF"/>
+          </a:solidFill>
+          <a:ln w="25400">
+            <a:solidFill>
+              <a:srgbClr val="2A9D8F"/>
+            </a:solidFill>
+          </a:ln>
+        </p:spPr>
+        <p:style>
+          <a:lnRef idx="1">
+            <a:schemeClr val="accent1"/>
+          </a:lnRef>
+          <a:fillRef idx="3">
+            <a:schemeClr val="accent1"/>
+          </a:fillRef>
+          <a:effectRef idx="2">
+            <a:schemeClr val="accent1"/>
+          </a:effectRef>
+          <a:fontRef idx="minor">
+            <a:schemeClr val="lt1"/>
+          </a:fontRef>
+        </p:style>
+        <p:txBody>
+          <a:bodyPr rtlCol="0" anchor="ctr" wrap="square" lIns="190500" tIns="152400" rIns="190500" bIns="152400"/>
+          <a:lstStyle/>
+          <a:p>
+            <a:pPr algn="ctr">
+              <a:defRPr sz="1700" b="1">
+                <a:solidFill>
+                  <a:srgbClr val="1E3A4C"/>
+                </a:solidFill>
+                <a:latin typeface="Segoe UI"/>
+              </a:defRPr>
+            </a:pPr>
+            <a:r>
+              <a:t>🟢  1. LA RAÍZ: Persistencia y Almacenamiento Seguros (Capa de Datos / Disco)</a:t>
+            </a:r>
+          </a:p>
+          <a:p>
+            <a:pPr>
+              <a:defRPr sz="1300">
+                <a:solidFill>
+                  <a:srgbClr val="333333"/>
+                </a:solidFill>
+                <a:latin typeface="Segoe UI"/>
+              </a:defRPr>
+            </a:pPr>
+            <a:r>
+              <a:t>• Archivos Planos TXT: 'inventario_medicinas.txt' y 'registro_pedidos.txt' que preservan la información físicamente.</a:t>
+            </a:r>
+          </a:p>
+          <a:p>
+            <a:pPr>
+              <a:defRPr sz="1300">
+                <a:solidFill>
+                  <a:srgbClr val="333333"/>
+                </a:solidFill>
+                <a:latin typeface="Segoe UI"/>
+              </a:defRPr>
+            </a:pPr>
+            <a:r>
+              <a:t>• Módulo 'gestion_archivos.py': Lectura/escritura segura con 'with open', limpieza de líneas y conversión automática de tipos.</a:t>
+            </a:r>
+          </a:p>
+        </p:txBody>
+      </p:sp>
+      <p:sp>
+        <p:nvSpPr>
+          <p:cNvPr id="8" name="TextBox 7"/>
+          <p:cNvSpPr txBox="1"/>
+          <p:nvPr/>
+        </p:nvSpPr>
+        <p:spPr>
+          <a:xfrm>
+            <a:off x="731520" y="4580000"/>
+            <a:ext cx="10728960" cy="220000"/>
+          </a:xfrm>
+          <a:prstGeom prst="rect">
+            <a:avLst/>
+          </a:prstGeom>
+          <a:noFill/>
+        </p:spPr>
+        <p:txBody>
+          <a:bodyPr wrap="none">
+            <a:spAutoFit/>
+          </a:bodyPr>
+          <a:lstStyle/>
+          <a:p>
+            <a:pPr algn="ctr">
+              <a:defRPr sz="1100" b="1">
+                <a:solidFill>
+                  <a:srgbClr val="556B2F"/>
+                </a:solidFill>
+                <a:latin typeface="Segoe UI"/>
+              </a:defRPr>
+            </a:pPr>
+            <a:r>
+              <a:t>▲   Carga al iniciar (desde_lista)   |   Guardado automático (actualizar_archivo)   ▲</a:t>
+            </a:r>
+          </a:p>
+        </p:txBody>
+      </p:sp>
+      <p:sp>
+        <p:nvSpPr>
+          <p:cNvPr id="9" name="TextBox 8"/>
+          <p:cNvSpPr txBox="1"/>
+          <p:nvPr/>
+        </p:nvSpPr>
+        <p:spPr>
+          <a:xfrm>
+            <a:off x="731520" y="2980000"/>
+            <a:ext cx="10728960" cy="220000"/>
+          </a:xfrm>
+          <a:prstGeom prst="rect">
+            <a:avLst/>
+          </a:prstGeom>
+          <a:noFill/>
+        </p:spPr>
+        <p:txBody>
+          <a:bodyPr wrap="none">
+            <a:spAutoFit/>
+          </a:bodyPr>
+          <a:lstStyle/>
+          <a:p>
+            <a:pPr algn="ctr">
+              <a:defRPr sz="1100" b="1">
+                <a:solidFill>
+                  <a:srgbClr val="556B2F"/>
+                </a:solidFill>
+                <a:latin typeface="Segoe UI"/>
+              </a:defRPr>
+            </a:pPr>
+            <a:r>
+              <a:t>▲   La interfaz invoca métodos en RAM y muestra respuestas en tiempo real   ▲</a:t>
             </a:r>
           </a:p>
         </p:txBody>
@@ -4150,7 +4408,7 @@
           <a:lstStyle/>
           <a:p>
             <a:pPr algn="ctr"/>
-            <a:endParaRPr/>
+            <a:endParaRPr lang="es-EC" noProof="0" dirty="0"/>
           </a:p>
         </p:txBody>
       </p:sp>
@@ -4185,7 +4443,8 @@
               </a:defRPr>
             </a:pPr>
             <a:r>
-              <a:t>Arquitectura del Sistema</a:t>
+              <a:rPr lang="es-EC" noProof="0" dirty="0"/>
+              <a:t>¿Qué es PyPharma Manager?</a:t>
             </a:r>
           </a:p>
           <a:p>
@@ -4201,7 +4460,8 @@
               </a:defRPr>
             </a:pPr>
             <a:r>
-              <a:t>Organización modular y vista estructural del proyecto</a:t>
+              <a:rPr lang="es-EC" noProof="0" dirty="0"/>
+              <a:t>Solución integral para la administración y control farmacéutico</a:t>
             </a:r>
           </a:p>
         </p:txBody>
@@ -4246,7 +4506,7 @@
           <a:lstStyle/>
           <a:p>
             <a:pPr algn="ctr"/>
-            <a:endParaRPr/>
+            <a:endParaRPr lang="es-EC" noProof="0" dirty="0"/>
           </a:p>
         </p:txBody>
       </p:sp>
@@ -4259,7 +4519,7 @@
         <p:spPr>
           <a:xfrm>
             <a:off x="731520" y="1645920"/>
-            <a:ext cx="5303520" cy="4572000"/>
+            <a:ext cx="5120640" cy="4572000"/>
           </a:xfrm>
           <a:prstGeom prst="roundRect">
             <a:avLst/>
@@ -4292,7 +4552,7 @@
           <a:lstStyle/>
           <a:p>
             <a:pPr algn="ctr"/>
-            <a:endParaRPr/>
+            <a:endParaRPr lang="es-EC" noProof="0" dirty="0"/>
           </a:p>
         </p:txBody>
       </p:sp>
@@ -4305,7 +4565,7 @@
         <p:spPr>
           <a:xfrm>
             <a:off x="960120" y="1828800"/>
-            <a:ext cx="4846320" cy="4206240"/>
+            <a:ext cx="4663440" cy="2569934"/>
           </a:xfrm>
           <a:prstGeom prst="rect">
             <a:avLst/>
@@ -4330,26 +4590,9 @@
               </a:defRPr>
             </a:pPr>
             <a:r>
-              <a:rPr dirty="0" err="1"/>
-              <a:t>Diseño</a:t>
-            </a:r>
-            <a:r>
-              <a:rPr dirty="0"/>
-              <a:t> Modular </a:t>
-            </a:r>
-            <a:r>
-              <a:rPr dirty="0" err="1"/>
-              <a:t>en</a:t>
-            </a:r>
-            <a:r>
-              <a:rPr dirty="0"/>
-              <a:t> 3 </a:t>
-            </a:r>
-            <a:r>
-              <a:rPr dirty="0" err="1"/>
-              <a:t>Capas</a:t>
-            </a:r>
-            <a:endParaRPr dirty="0"/>
+              <a:rPr lang="es-EC" noProof="0" dirty="0"/>
+              <a:t>Propuesta de Valor</a:t>
+            </a:r>
           </a:p>
           <a:p>
             <a:pPr>
@@ -4364,72 +4607,16 @@
               </a:defRPr>
             </a:pPr>
             <a:r>
-              <a:rPr b="1" dirty="0">
+              <a:rPr lang="es-EC" b="1" noProof="0" dirty="0">
                 <a:solidFill>
                   <a:srgbClr val="48A9A6"/>
                 </a:solidFill>
               </a:rPr>
-              <a:t>• Capa de Entrada (main.py): </a:t>
-            </a:r>
-            <a:r>
-              <a:rPr dirty="0"/>
-              <a:t>Punto de </a:t>
-            </a:r>
-            <a:r>
-              <a:rPr dirty="0" err="1"/>
-              <a:t>inicio</a:t>
-            </a:r>
-            <a:r>
-              <a:rPr dirty="0"/>
-              <a:t> </a:t>
-            </a:r>
-            <a:r>
-              <a:rPr dirty="0" err="1"/>
-              <a:t>conciso</a:t>
-            </a:r>
-            <a:r>
-              <a:rPr dirty="0"/>
-              <a:t> </a:t>
-            </a:r>
-            <a:r>
-              <a:rPr dirty="0" err="1"/>
-              <a:t>que</a:t>
-            </a:r>
-            <a:r>
-              <a:rPr dirty="0"/>
-              <a:t> </a:t>
-            </a:r>
-            <a:r>
-              <a:rPr dirty="0" err="1"/>
-              <a:t>conecta</a:t>
-            </a:r>
-            <a:r>
-              <a:rPr dirty="0"/>
-              <a:t> </a:t>
-            </a:r>
-            <a:r>
-              <a:rPr dirty="0" err="1"/>
-              <a:t>módulos</a:t>
-            </a:r>
-            <a:r>
-              <a:rPr dirty="0"/>
-              <a:t> y </a:t>
-            </a:r>
-            <a:r>
-              <a:rPr dirty="0" err="1"/>
-              <a:t>arranca</a:t>
-            </a:r>
-            <a:r>
-              <a:rPr dirty="0"/>
-              <a:t> el </a:t>
-            </a:r>
-            <a:r>
-              <a:rPr dirty="0" err="1"/>
-              <a:t>bucle</a:t>
-            </a:r>
-            <a:r>
-              <a:rPr dirty="0"/>
-              <a:t> principal.</a:t>
+              <a:t>• Control de Inventario: </a:t>
+            </a:r>
+            <a:r>
+              <a:rPr lang="es-EC" noProof="0" dirty="0"/>
+              <a:t>Administración eficiente del catálogo de medicamentos en tiempo real.</a:t>
             </a:r>
           </a:p>
           <a:p>
@@ -4445,258 +4632,66 @@
               </a:defRPr>
             </a:pPr>
             <a:r>
-              <a:rPr b="1" dirty="0">
+              <a:rPr lang="es-EC" b="1" noProof="0" dirty="0">
                 <a:solidFill>
                   <a:srgbClr val="48A9A6"/>
                 </a:solidFill>
               </a:rPr>
-              <a:t>• Capa de Modelo (</a:t>
-            </a:r>
-            <a:r>
-              <a:rPr b="1" dirty="0" err="1">
+              <a:t>• Gestión de Ventas: </a:t>
+            </a:r>
+            <a:r>
+              <a:rPr lang="es-EC" noProof="0" dirty="0"/>
+              <a:t>Registro rápido de pedidos de clientes con cálculo automático de totales.</a:t>
+            </a:r>
+          </a:p>
+          <a:p>
+            <a:pPr>
+              <a:spcAft>
+                <a:spcPts val="800"/>
+              </a:spcAft>
+              <a:defRPr sz="1400">
+                <a:solidFill>
+                  <a:srgbClr val="283038"/>
+                </a:solidFill>
+                <a:latin typeface="Segoe UI"/>
+              </a:defRPr>
+            </a:pPr>
+            <a:r>
+              <a:rPr lang="es-EC" b="1" noProof="0" dirty="0">
                 <a:solidFill>
                   <a:srgbClr val="48A9A6"/>
                 </a:solidFill>
               </a:rPr>
-              <a:t>clases</a:t>
-            </a:r>
-            <a:r>
-              <a:rPr b="1" dirty="0">
+              <a:t>• Persistencia Confiable: </a:t>
+            </a:r>
+            <a:r>
+              <a:rPr lang="es-EC" noProof="0" dirty="0"/>
+              <a:t>Almacenamiento seguro y continuo en archivos de texto planos (TXT).</a:t>
+            </a:r>
+          </a:p>
+          <a:p>
+            <a:pPr>
+              <a:spcAft>
+                <a:spcPts val="800"/>
+              </a:spcAft>
+              <a:defRPr sz="1400">
+                <a:solidFill>
+                  <a:srgbClr val="283038"/>
+                </a:solidFill>
+                <a:latin typeface="Segoe UI"/>
+              </a:defRPr>
+            </a:pPr>
+            <a:r>
+              <a:rPr lang="es-EC" b="1" noProof="0" dirty="0">
                 <a:solidFill>
                   <a:srgbClr val="48A9A6"/>
                 </a:solidFill>
               </a:rPr>
-              <a:t>/): </a:t>
-            </a:r>
-            <a:r>
-              <a:rPr dirty="0" err="1"/>
-              <a:t>Entidades</a:t>
-            </a:r>
-            <a:r>
-              <a:rPr dirty="0"/>
-              <a:t> '</a:t>
-            </a:r>
-            <a:r>
-              <a:rPr dirty="0" err="1"/>
-              <a:t>Medicamento</a:t>
-            </a:r>
-            <a:r>
-              <a:rPr dirty="0"/>
-              <a:t>' y '</a:t>
-            </a:r>
-            <a:r>
-              <a:rPr dirty="0" err="1"/>
-              <a:t>Pedido</a:t>
-            </a:r>
-            <a:r>
-              <a:rPr dirty="0"/>
-              <a:t>' con </a:t>
-            </a:r>
-            <a:r>
-              <a:rPr dirty="0" err="1"/>
-              <a:t>lógica</a:t>
-            </a:r>
-            <a:r>
-              <a:rPr dirty="0"/>
-              <a:t> </a:t>
-            </a:r>
-            <a:r>
-              <a:rPr dirty="0" err="1"/>
-              <a:t>autónoma</a:t>
-            </a:r>
-            <a:r>
-              <a:rPr dirty="0"/>
-              <a:t>.</a:t>
-            </a:r>
-          </a:p>
-          <a:p>
-            <a:pPr>
-              <a:spcAft>
-                <a:spcPts val="800"/>
-              </a:spcAft>
-              <a:defRPr sz="1400">
-                <a:solidFill>
-                  <a:srgbClr val="283038"/>
-                </a:solidFill>
-                <a:latin typeface="Segoe UI"/>
-              </a:defRPr>
-            </a:pPr>
-            <a:r>
-              <a:rPr b="1" dirty="0">
-                <a:solidFill>
-                  <a:srgbClr val="48A9A6"/>
-                </a:solidFill>
-              </a:rPr>
-              <a:t>• Capa de </a:t>
-            </a:r>
-            <a:r>
-              <a:rPr b="1" dirty="0" err="1">
-                <a:solidFill>
-                  <a:srgbClr val="48A9A6"/>
-                </a:solidFill>
-              </a:rPr>
-              <a:t>Servicios</a:t>
-            </a:r>
-            <a:r>
-              <a:rPr b="1" dirty="0">
-                <a:solidFill>
-                  <a:srgbClr val="48A9A6"/>
-                </a:solidFill>
-              </a:rPr>
-              <a:t> (</a:t>
-            </a:r>
-            <a:r>
-              <a:rPr b="1" dirty="0" err="1">
-                <a:solidFill>
-                  <a:srgbClr val="48A9A6"/>
-                </a:solidFill>
-              </a:rPr>
-              <a:t>modulos</a:t>
-            </a:r>
-            <a:r>
-              <a:rPr b="1" dirty="0">
-                <a:solidFill>
-                  <a:srgbClr val="48A9A6"/>
-                </a:solidFill>
-              </a:rPr>
-              <a:t>/): </a:t>
-            </a:r>
-            <a:r>
-              <a:rPr dirty="0" err="1"/>
-              <a:t>Manejo</a:t>
-            </a:r>
-            <a:r>
-              <a:rPr dirty="0"/>
-              <a:t> de </a:t>
-            </a:r>
-            <a:r>
-              <a:rPr dirty="0" err="1"/>
-              <a:t>archivos</a:t>
-            </a:r>
-            <a:r>
-              <a:rPr dirty="0"/>
-              <a:t> TXT, </a:t>
-            </a:r>
-            <a:r>
-              <a:rPr dirty="0" err="1"/>
-              <a:t>menús</a:t>
-            </a:r>
-            <a:r>
-              <a:rPr dirty="0"/>
-              <a:t> de </a:t>
-            </a:r>
-            <a:r>
-              <a:rPr dirty="0" err="1"/>
-              <a:t>usuario</a:t>
-            </a:r>
-            <a:r>
-              <a:rPr dirty="0"/>
-              <a:t> y </a:t>
-            </a:r>
-            <a:r>
-              <a:rPr dirty="0" err="1"/>
-              <a:t>utilidades</a:t>
-            </a:r>
-            <a:r>
-              <a:rPr dirty="0"/>
-              <a:t>.</a:t>
-            </a:r>
-          </a:p>
-          <a:p>
-            <a:pPr>
-              <a:spcAft>
-                <a:spcPts val="800"/>
-              </a:spcAft>
-              <a:defRPr sz="1400">
-                <a:solidFill>
-                  <a:srgbClr val="283038"/>
-                </a:solidFill>
-                <a:latin typeface="Segoe UI"/>
-              </a:defRPr>
-            </a:pPr>
-            <a:r>
-              <a:rPr b="1" dirty="0">
-                <a:solidFill>
-                  <a:srgbClr val="48A9A6"/>
-                </a:solidFill>
-              </a:rPr>
-              <a:t>• </a:t>
-            </a:r>
-            <a:r>
-              <a:rPr b="1" dirty="0" err="1">
-                <a:solidFill>
-                  <a:srgbClr val="48A9A6"/>
-                </a:solidFill>
-              </a:rPr>
-              <a:t>Desacoplamiento</a:t>
-            </a:r>
-            <a:r>
-              <a:rPr b="1" dirty="0">
-                <a:solidFill>
-                  <a:srgbClr val="48A9A6"/>
-                </a:solidFill>
-              </a:rPr>
-              <a:t>: </a:t>
-            </a:r>
-            <a:r>
-              <a:rPr dirty="0"/>
-              <a:t>Cada </a:t>
-            </a:r>
-            <a:r>
-              <a:rPr dirty="0" err="1"/>
-              <a:t>módulo</a:t>
-            </a:r>
-            <a:r>
-              <a:rPr dirty="0"/>
-              <a:t> </a:t>
-            </a:r>
-            <a:r>
-              <a:rPr dirty="0" err="1"/>
-              <a:t>cumple</a:t>
-            </a:r>
-            <a:r>
-              <a:rPr dirty="0"/>
-              <a:t> </a:t>
-            </a:r>
-            <a:r>
-              <a:rPr dirty="0" err="1"/>
-              <a:t>una</a:t>
-            </a:r>
-            <a:r>
-              <a:rPr dirty="0"/>
-              <a:t> </a:t>
-            </a:r>
-            <a:r>
-              <a:rPr dirty="0" err="1"/>
-              <a:t>única</a:t>
-            </a:r>
-            <a:r>
-              <a:rPr dirty="0"/>
-              <a:t> </a:t>
-            </a:r>
-            <a:r>
-              <a:rPr dirty="0" err="1"/>
-              <a:t>responsabilidad</a:t>
-            </a:r>
-            <a:r>
-              <a:rPr dirty="0"/>
-              <a:t> </a:t>
-            </a:r>
-            <a:r>
-              <a:rPr dirty="0" err="1"/>
-              <a:t>clara</a:t>
-            </a:r>
-            <a:r>
-              <a:rPr dirty="0"/>
-              <a:t> y bien </a:t>
-            </a:r>
-            <a:r>
-              <a:rPr dirty="0" err="1"/>
-              <a:t>definida</a:t>
-            </a:r>
-            <a:r>
-              <a:rPr dirty="0"/>
-              <a:t>.</a:t>
+              <a:t>• Precisión Operativa: </a:t>
+            </a:r>
+            <a:r>
+              <a:rPr lang="es-EC" noProof="0" dirty="0"/>
+              <a:t>Previene descuadres de stock y errores de cálculo en caja.</a:t>
             </a:r>
           </a:p>
         </p:txBody>
@@ -4716,11 +4711,11 @@
             <a:avLst/>
           </a:prstGeom>
           <a:solidFill>
-            <a:srgbClr val="F0F4F8"/>
+            <a:srgbClr val="FFFFFF"/>
           </a:solidFill>
           <a:ln w="19050">
             <a:solidFill>
-              <a:srgbClr val="48A9A6"/>
+              <a:srgbClr val="DCE4EB"/>
             </a:solidFill>
           </a:ln>
         </p:spPr>
@@ -4743,7 +4738,7 @@
           <a:lstStyle/>
           <a:p>
             <a:pPr algn="ctr"/>
-            <a:endParaRPr/>
+            <a:endParaRPr lang="es-EC" noProof="0" dirty="0"/>
           </a:p>
         </p:txBody>
       </p:sp>
@@ -4755,8 +4750,8 @@
         </p:nvSpPr>
         <p:spPr>
           <a:xfrm>
-            <a:off x="6492240" y="1783080"/>
-            <a:ext cx="4754880" cy="365760"/>
+            <a:off x="6537960" y="1828800"/>
+            <a:ext cx="4663440" cy="4206240"/>
           </a:xfrm>
           <a:prstGeom prst="rect">
             <a:avLst/>
@@ -4764,42 +4759,6 @@
           <a:noFill/>
         </p:spPr>
         <p:txBody>
-          <a:bodyPr wrap="none">
-            <a:spAutoFit/>
-          </a:bodyPr>
-          <a:lstStyle/>
-          <a:p>
-            <a:pPr>
-              <a:defRPr sz="1400" b="1">
-                <a:solidFill>
-                  <a:srgbClr val="1E3A4C"/>
-                </a:solidFill>
-                <a:latin typeface="Segoe UI"/>
-              </a:defRPr>
-            </a:pPr>
-            <a:r>
-              <a:t>📄 Vista de Archivos del Proyecto</a:t>
-            </a:r>
-          </a:p>
-        </p:txBody>
-      </p:sp>
-      <p:sp>
-        <p:nvSpPr>
-          <p:cNvPr id="9" name="TextBox 8"/>
-          <p:cNvSpPr txBox="1"/>
-          <p:nvPr/>
-        </p:nvSpPr>
-        <p:spPr>
-          <a:xfrm>
-            <a:off x="6492240" y="2194560"/>
-            <a:ext cx="4754880" cy="2872581"/>
-          </a:xfrm>
-          <a:prstGeom prst="rect">
-            <a:avLst/>
-          </a:prstGeom>
-          <a:noFill/>
-        </p:spPr>
-        <p:txBody>
           <a:bodyPr wrap="square">
             <a:spAutoFit/>
           </a:bodyPr>
@@ -4807,272 +4766,126 @@
           <a:p>
             <a:pPr>
               <a:spcAft>
-                <a:spcPts val="400"/>
-              </a:spcAft>
-              <a:defRPr sz="1200">
+                <a:spcPts val="1200"/>
+              </a:spcAft>
+              <a:defRPr sz="1900" b="1">
+                <a:solidFill>
+                  <a:srgbClr val="1E3A4C"/>
+                </a:solidFill>
+                <a:latin typeface="Segoe UI"/>
+              </a:defRPr>
+            </a:pPr>
+            <a:r>
+              <a:rPr lang="es-EC" noProof="0" dirty="0"/>
+              <a:t>Características Principales</a:t>
+            </a:r>
+          </a:p>
+          <a:p>
+            <a:pPr>
+              <a:spcAft>
+                <a:spcPts val="800"/>
+              </a:spcAft>
+              <a:defRPr sz="1400">
                 <a:solidFill>
                   <a:srgbClr val="283038"/>
                 </a:solidFill>
-                <a:latin typeface="Consolas"/>
-              </a:defRPr>
-            </a:pPr>
-            <a:r>
-              <a:rPr dirty="0" err="1"/>
-              <a:t>PyPharma_Manager</a:t>
-            </a:r>
-            <a:r>
-              <a:rPr dirty="0"/>
-              <a:t>/</a:t>
-            </a:r>
-          </a:p>
-          <a:p>
-            <a:pPr>
-              <a:spcAft>
-                <a:spcPts val="400"/>
-              </a:spcAft>
-              <a:defRPr sz="1200">
+                <a:latin typeface="Segoe UI"/>
+              </a:defRPr>
+            </a:pPr>
+            <a:r>
+              <a:rPr lang="es-EC" b="1" noProof="0" dirty="0">
+                <a:solidFill>
+                  <a:srgbClr val="48A9A6"/>
+                </a:solidFill>
+              </a:rPr>
+              <a:t>• Interfaz por Consola: </a:t>
+            </a:r>
+            <a:r>
+              <a:rPr lang="es-EC" noProof="0" dirty="0"/>
+              <a:t>Menús interactivos rápidos, fluidos y de excelente legibilidad.</a:t>
+            </a:r>
+          </a:p>
+          <a:p>
+            <a:pPr>
+              <a:spcAft>
+                <a:spcPts val="800"/>
+              </a:spcAft>
+              <a:defRPr sz="1400">
                 <a:solidFill>
                   <a:srgbClr val="283038"/>
                 </a:solidFill>
-                <a:latin typeface="Consolas"/>
-              </a:defRPr>
-            </a:pPr>
-            <a:r>
-              <a:rPr dirty="0"/>
-              <a:t>├── 📂 </a:t>
-            </a:r>
-            <a:r>
-              <a:rPr dirty="0" err="1"/>
-              <a:t>clases</a:t>
-            </a:r>
-            <a:r>
-              <a:rPr dirty="0"/>
-              <a:t>/</a:t>
-            </a:r>
-          </a:p>
-          <a:p>
-            <a:pPr>
-              <a:spcAft>
-                <a:spcPts val="400"/>
-              </a:spcAft>
-              <a:defRPr sz="1200">
+                <a:latin typeface="Segoe UI"/>
+              </a:defRPr>
+            </a:pPr>
+            <a:r>
+              <a:rPr lang="es-EC" b="1" noProof="0" dirty="0">
+                <a:solidFill>
+                  <a:srgbClr val="48A9A6"/>
+                </a:solidFill>
+              </a:rPr>
+              <a:t>• Validación Activa: </a:t>
+            </a:r>
+            <a:r>
+              <a:rPr lang="es-EC" noProof="0" dirty="0"/>
+              <a:t>Protección contra errores de tipeo y manejo de excepciones (try/</a:t>
+            </a:r>
+            <a:r>
+              <a:rPr lang="es-EC" noProof="0" dirty="0" err="1"/>
+              <a:t>except</a:t>
+            </a:r>
+            <a:r>
+              <a:rPr lang="es-EC" noProof="0" dirty="0"/>
+              <a:t>).</a:t>
+            </a:r>
+          </a:p>
+          <a:p>
+            <a:pPr>
+              <a:spcAft>
+                <a:spcPts val="800"/>
+              </a:spcAft>
+              <a:defRPr sz="1400">
                 <a:solidFill>
                   <a:srgbClr val="283038"/>
                 </a:solidFill>
-                <a:latin typeface="Consolas"/>
-              </a:defRPr>
-            </a:pPr>
-            <a:r>
-              <a:rPr dirty="0"/>
-              <a:t>│   ├── 📄 medicamento.py   # Modelo </a:t>
-            </a:r>
-            <a:r>
-              <a:rPr dirty="0" err="1"/>
-              <a:t>Fármaco</a:t>
-            </a:r>
-            <a:endParaRPr dirty="0"/>
-          </a:p>
-          <a:p>
-            <a:pPr>
-              <a:spcAft>
-                <a:spcPts val="400"/>
-              </a:spcAft>
-              <a:defRPr sz="1200">
+                <a:latin typeface="Segoe UI"/>
+              </a:defRPr>
+            </a:pPr>
+            <a:r>
+              <a:rPr lang="es-EC" b="1" noProof="0" dirty="0">
+                <a:solidFill>
+                  <a:srgbClr val="48A9A6"/>
+                </a:solidFill>
+              </a:rPr>
+              <a:t>• Orientado a Objetos: </a:t>
+            </a:r>
+            <a:r>
+              <a:rPr lang="es-EC" noProof="0" dirty="0"/>
+              <a:t>Modelado robusto con clases especializadas y alta cohesión.</a:t>
+            </a:r>
+          </a:p>
+          <a:p>
+            <a:pPr>
+              <a:spcAft>
+                <a:spcPts val="800"/>
+              </a:spcAft>
+              <a:defRPr sz="1400">
                 <a:solidFill>
                   <a:srgbClr val="283038"/>
                 </a:solidFill>
-                <a:latin typeface="Consolas"/>
-              </a:defRPr>
-            </a:pPr>
-            <a:r>
-              <a:rPr dirty="0"/>
-              <a:t>│   └── 📄 pedido.py        # Modelo Venta/Orden</a:t>
-            </a:r>
-          </a:p>
-          <a:p>
-            <a:pPr>
-              <a:spcAft>
-                <a:spcPts val="400"/>
-              </a:spcAft>
-              <a:defRPr sz="1200">
-                <a:solidFill>
-                  <a:srgbClr val="283038"/>
-                </a:solidFill>
-                <a:latin typeface="Consolas"/>
-              </a:defRPr>
-            </a:pPr>
-            <a:r>
-              <a:rPr dirty="0"/>
-              <a:t>├── 📂 </a:t>
-            </a:r>
-            <a:r>
-              <a:rPr dirty="0" err="1"/>
-              <a:t>modulos</a:t>
-            </a:r>
-            <a:r>
-              <a:rPr dirty="0"/>
-              <a:t>/</a:t>
-            </a:r>
-          </a:p>
-          <a:p>
-            <a:pPr>
-              <a:spcAft>
-                <a:spcPts val="400"/>
-              </a:spcAft>
-              <a:defRPr sz="1200">
-                <a:solidFill>
-                  <a:srgbClr val="283038"/>
-                </a:solidFill>
-                <a:latin typeface="Consolas"/>
-              </a:defRPr>
-            </a:pPr>
-            <a:r>
-              <a:rPr dirty="0"/>
-              <a:t>│   ├── 📄 gestion_archivos.py # </a:t>
-            </a:r>
-            <a:r>
-              <a:rPr dirty="0" err="1"/>
-              <a:t>Persistencia</a:t>
-            </a:r>
-            <a:r>
-              <a:rPr dirty="0"/>
-              <a:t> TXT</a:t>
-            </a:r>
-          </a:p>
-          <a:p>
-            <a:pPr>
-              <a:spcAft>
-                <a:spcPts val="400"/>
-              </a:spcAft>
-              <a:defRPr sz="1200">
-                <a:solidFill>
-                  <a:srgbClr val="283038"/>
-                </a:solidFill>
-                <a:latin typeface="Consolas"/>
-              </a:defRPr>
-            </a:pPr>
-            <a:r>
-              <a:rPr dirty="0"/>
-              <a:t>│   ├── 📄 utilidades.py       # </a:t>
-            </a:r>
-            <a:r>
-              <a:rPr dirty="0" err="1"/>
-              <a:t>Validaciones</a:t>
-            </a:r>
-            <a:r>
-              <a:rPr dirty="0"/>
-              <a:t> try/ex</a:t>
-            </a:r>
-            <a:r>
-              <a:rPr lang="es-EC" dirty="0"/>
-              <a:t>c</a:t>
-            </a:r>
-            <a:endParaRPr dirty="0"/>
-          </a:p>
-          <a:p>
-            <a:pPr>
-              <a:spcAft>
-                <a:spcPts val="400"/>
-              </a:spcAft>
-              <a:defRPr sz="1200">
-                <a:solidFill>
-                  <a:srgbClr val="283038"/>
-                </a:solidFill>
-                <a:latin typeface="Consolas"/>
-              </a:defRPr>
-            </a:pPr>
-            <a:r>
-              <a:rPr dirty="0"/>
-              <a:t>│   └── 📄 menus.py            # </a:t>
-            </a:r>
-            <a:r>
-              <a:rPr dirty="0" err="1"/>
-              <a:t>Interfaz</a:t>
-            </a:r>
-            <a:r>
-              <a:rPr dirty="0"/>
-              <a:t> de </a:t>
-            </a:r>
-            <a:r>
-              <a:rPr dirty="0" err="1"/>
-              <a:t>Usuario</a:t>
-            </a:r>
-            <a:endParaRPr dirty="0"/>
-          </a:p>
-          <a:p>
-            <a:pPr>
-              <a:spcAft>
-                <a:spcPts val="400"/>
-              </a:spcAft>
-              <a:defRPr sz="1200">
-                <a:solidFill>
-                  <a:srgbClr val="283038"/>
-                </a:solidFill>
-                <a:latin typeface="Consolas"/>
-              </a:defRPr>
-            </a:pPr>
-            <a:r>
-              <a:rPr dirty="0"/>
-              <a:t>├── 📂 </a:t>
-            </a:r>
-            <a:r>
-              <a:rPr dirty="0" err="1"/>
-              <a:t>datos</a:t>
-            </a:r>
-            <a:r>
-              <a:rPr dirty="0"/>
-              <a:t>/</a:t>
-            </a:r>
-          </a:p>
-          <a:p>
-            <a:pPr>
-              <a:spcAft>
-                <a:spcPts val="400"/>
-              </a:spcAft>
-              <a:defRPr sz="1200">
-                <a:solidFill>
-                  <a:srgbClr val="283038"/>
-                </a:solidFill>
-                <a:latin typeface="Consolas"/>
-              </a:defRPr>
-            </a:pPr>
-            <a:r>
-              <a:rPr dirty="0"/>
-              <a:t>│   ├── 📄 inventario_medicinas.txt</a:t>
-            </a:r>
-          </a:p>
-          <a:p>
-            <a:pPr>
-              <a:spcAft>
-                <a:spcPts val="400"/>
-              </a:spcAft>
-              <a:defRPr sz="1200">
-                <a:solidFill>
-                  <a:srgbClr val="283038"/>
-                </a:solidFill>
-                <a:latin typeface="Consolas"/>
-              </a:defRPr>
-            </a:pPr>
-            <a:r>
-              <a:rPr dirty="0"/>
-              <a:t>│   └── 📄 registro_pedidos.txt</a:t>
-            </a:r>
-          </a:p>
-          <a:p>
-            <a:pPr>
-              <a:spcAft>
-                <a:spcPts val="400"/>
-              </a:spcAft>
-              <a:defRPr sz="1200">
-                <a:solidFill>
-                  <a:srgbClr val="283038"/>
-                </a:solidFill>
-                <a:latin typeface="Consolas"/>
-              </a:defRPr>
-            </a:pPr>
-            <a:r>
-              <a:rPr dirty="0"/>
-              <a:t>└── 🚀 main.py              # Entry Point del Sistema</a:t>
+                <a:latin typeface="Segoe UI"/>
+              </a:defRPr>
+            </a:pPr>
+            <a:r>
+              <a:rPr lang="es-EC" b="1" noProof="0" dirty="0">
+                <a:solidFill>
+                  <a:srgbClr val="48A9A6"/>
+                </a:solidFill>
+              </a:rPr>
+              <a:t>• Ligero y Nativo: </a:t>
+            </a:r>
+            <a:r>
+              <a:rPr lang="es-EC" noProof="0" dirty="0"/>
+              <a:t>Desarrollado en Python puro, sin necesidad de bases de datos externas.</a:t>
             </a:r>
           </a:p>
         </p:txBody>
@@ -5110,7 +4923,7 @@
         </p:nvSpPr>
         <p:spPr>
           <a:xfrm>
-            <a:off x="14990" y="0"/>
+            <a:off x="12700" y="0"/>
             <a:ext cx="12191695" cy="6858000"/>
           </a:xfrm>
           <a:prstGeom prst="rect">
@@ -5142,7 +4955,7 @@
           <a:lstStyle/>
           <a:p>
             <a:pPr algn="ctr"/>
-            <a:endParaRPr/>
+            <a:endParaRPr lang="es-EC" noProof="0" dirty="0"/>
           </a:p>
         </p:txBody>
       </p:sp>
@@ -5177,7 +4990,7 @@
               </a:defRPr>
             </a:pPr>
             <a:r>
-              <a:t>Interfaz de Consola y Navegación</a:t>
+              <a:t>[1. LA RAÍZ] Persistencia y Almacenamiento (Capa de Datos)</a:t>
             </a:r>
           </a:p>
           <a:p>
@@ -5193,7 +5006,7 @@
               </a:defRPr>
             </a:pPr>
             <a:r>
-              <a:t>Experiencia de usuario interactiva y protegida contra fallos</a:t>
+              <a:t>Almacenamiento continuo en archivos planos TXT sin pérdida de información</a:t>
             </a:r>
           </a:p>
         </p:txBody>
@@ -5238,7 +5051,7 @@
           <a:lstStyle/>
           <a:p>
             <a:pPr algn="ctr"/>
-            <a:endParaRPr/>
+            <a:endParaRPr lang="es-EC" noProof="0" dirty="0"/>
           </a:p>
         </p:txBody>
       </p:sp>
@@ -5284,7 +5097,7 @@
           <a:lstStyle/>
           <a:p>
             <a:pPr algn="ctr"/>
-            <a:endParaRPr/>
+            <a:endParaRPr lang="es-EC" noProof="0" dirty="0"/>
           </a:p>
         </p:txBody>
       </p:sp>
@@ -5322,7 +5135,7 @@
               </a:defRPr>
             </a:pPr>
             <a:r>
-              <a:t>Navegación e Interacción</a:t>
+              <a:t>Manejo de Archivos (TXT/CSV)</a:t>
             </a:r>
           </a:p>
           <a:p>
@@ -5330,6 +5143,670 @@
               <a:spcAft>
                 <a:spcPts val="800"/>
               </a:spcAft>
+              <a:defRPr sz="1400" b="0">
+                <a:solidFill>
+                  <a:srgbClr val="283038"/>
+                </a:solidFill>
+                <a:latin typeface="Segoe UI"/>
+              </a:defRPr>
+            </a:pPr>
+            <a:r>
+              <a:t>• Manejadores de Contexto: Uso seguro de 'with open(...)' que garantiza el cierre de archivos sin bloqueos.</a:t>
+            </a:r>
+          </a:p>
+          <a:p>
+            <a:pPr>
+              <a:spcAft>
+                <a:spcPts val="800"/>
+              </a:spcAft>
+              <a:defRPr sz="1400" b="0">
+                <a:solidFill>
+                  <a:srgbClr val="283038"/>
+                </a:solidFill>
+                <a:latin typeface="Segoe UI"/>
+              </a:defRPr>
+            </a:pPr>
+            <a:r>
+              <a:t>• Conversión Automática: Función 'evaluar_y_convertir()' en gestion_archivos.py que tipifica int, float y str al iniciar.</a:t>
+            </a:r>
+          </a:p>
+          <a:p>
+            <a:pPr>
+              <a:spcAft>
+                <a:spcPts val="800"/>
+              </a:spcAft>
+              <a:defRPr sz="1400" b="0">
+                <a:solidFill>
+                  <a:srgbClr val="283038"/>
+                </a:solidFill>
+                <a:latin typeface="Segoe UI"/>
+              </a:defRPr>
+            </a:pPr>
+            <a:r>
+              <a:t>• Codificación UTF-8: Soporte nativo para tildes y caracteres especiales en español.</a:t>
+            </a:r>
+          </a:p>
+          <a:p>
+            <a:pPr>
+              <a:spcAft>
+                <a:spcPts val="800"/>
+              </a:spcAft>
+              <a:defRPr sz="1400" b="0">
+                <a:solidFill>
+                  <a:srgbClr val="283038"/>
+                </a:solidFill>
+                <a:latin typeface="Segoe UI"/>
+              </a:defRPr>
+            </a:pPr>
+            <a:r>
+              <a:t>• Sobrescritura Segura: Actualización instantánea y sincronizada tras cada registro, venta o modificación.</a:t>
+            </a:r>
+          </a:p>
+        </p:txBody>
+      </p:sp>
+      <p:sp>
+        <p:nvSpPr>
+          <p:cNvPr id="7" name="Rounded Rectangle 6"/>
+          <p:cNvSpPr/>
+          <p:nvPr/>
+        </p:nvSpPr>
+        <p:spPr>
+          <a:xfrm>
+            <a:off x="6309360" y="1645920"/>
+            <a:ext cx="5120640" cy="4572000"/>
+          </a:xfrm>
+          <a:prstGeom prst="roundRect">
+            <a:avLst/>
+          </a:prstGeom>
+          <a:solidFill>
+            <a:srgbClr val="F0F4F8"/>
+          </a:solidFill>
+          <a:ln w="19050">
+            <a:solidFill>
+              <a:srgbClr val="48A9A6"/>
+            </a:solidFill>
+          </a:ln>
+        </p:spPr>
+        <p:style>
+          <a:lnRef idx="1">
+            <a:schemeClr val="accent1"/>
+          </a:lnRef>
+          <a:fillRef idx="3">
+            <a:schemeClr val="accent1"/>
+          </a:fillRef>
+          <a:effectRef idx="2">
+            <a:schemeClr val="accent1"/>
+          </a:effectRef>
+          <a:fontRef idx="minor">
+            <a:schemeClr val="lt1"/>
+          </a:fontRef>
+        </p:style>
+        <p:txBody>
+          <a:bodyPr rtlCol="0" anchor="ctr"/>
+          <a:lstStyle/>
+          <a:p>
+            <a:pPr algn="ctr"/>
+            <a:endParaRPr lang="es-EC" noProof="0" dirty="0"/>
+          </a:p>
+        </p:txBody>
+      </p:sp>
+      <p:sp>
+        <p:nvSpPr>
+          <p:cNvPr id="8" name="TextBox 7"/>
+          <p:cNvSpPr txBox="1"/>
+          <p:nvPr/>
+        </p:nvSpPr>
+        <p:spPr>
+          <a:xfrm>
+            <a:off x="6492240" y="1783080"/>
+            <a:ext cx="4754880" cy="365760"/>
+          </a:xfrm>
+          <a:prstGeom prst="rect">
+            <a:avLst/>
+          </a:prstGeom>
+          <a:noFill/>
+        </p:spPr>
+        <p:txBody>
+          <a:bodyPr wrap="none">
+            <a:spAutoFit/>
+          </a:bodyPr>
+          <a:lstStyle/>
+          <a:p>
+            <a:pPr>
+              <a:defRPr sz="1400" b="1">
+                <a:solidFill>
+                  <a:srgbClr val="1E3A4C"/>
+                </a:solidFill>
+                <a:latin typeface="Segoe UI"/>
+              </a:defRPr>
+            </a:pPr>
+            <a:r>
+              <a:rPr lang="es-EC" noProof="0" dirty="0"/>
+              <a:t>📄 Estructura de Archivos TXT</a:t>
+            </a:r>
+          </a:p>
+        </p:txBody>
+      </p:sp>
+      <p:sp>
+        <p:nvSpPr>
+          <p:cNvPr id="9" name="TextBox 8"/>
+          <p:cNvSpPr txBox="1"/>
+          <p:nvPr/>
+        </p:nvSpPr>
+        <p:spPr>
+          <a:xfrm>
+            <a:off x="6492240" y="2194560"/>
+            <a:ext cx="4754880" cy="3931920"/>
+          </a:xfrm>
+          <a:prstGeom prst="rect">
+            <a:avLst/>
+          </a:prstGeom>
+          <a:noFill/>
+        </p:spPr>
+        <p:txBody>
+          <a:bodyPr wrap="square">
+            <a:spAutoFit/>
+          </a:bodyPr>
+          <a:lstStyle/>
+          <a:p>
+            <a:pPr>
+              <a:spcAft>
+                <a:spcPts val="400"/>
+              </a:spcAft>
+              <a:defRPr sz="1200">
+                <a:solidFill>
+                  <a:srgbClr val="283038"/>
+                </a:solidFill>
+                <a:latin typeface="Consolas"/>
+              </a:defRPr>
+            </a:pPr>
+            <a:r>
+              <a:rPr lang="es-EC" noProof="0" dirty="0"/>
+              <a:t>=== datos/inventario_medicinas.txt ===</a:t>
+            </a:r>
+          </a:p>
+          <a:p>
+            <a:pPr>
+              <a:spcAft>
+                <a:spcPts val="400"/>
+              </a:spcAft>
+              <a:defRPr sz="1200">
+                <a:solidFill>
+                  <a:srgbClr val="283038"/>
+                </a:solidFill>
+                <a:latin typeface="Consolas"/>
+              </a:defRPr>
+            </a:pPr>
+            <a:r>
+              <a:rPr lang="es-EC" noProof="0" dirty="0"/>
+              <a:t>15,Paracetamol,0.3</a:t>
+            </a:r>
+          </a:p>
+          <a:p>
+            <a:pPr>
+              <a:spcAft>
+                <a:spcPts val="400"/>
+              </a:spcAft>
+              <a:defRPr sz="1200">
+                <a:solidFill>
+                  <a:srgbClr val="283038"/>
+                </a:solidFill>
+                <a:latin typeface="Consolas"/>
+              </a:defRPr>
+            </a:pPr>
+            <a:r>
+              <a:rPr lang="es-EC" noProof="0" dirty="0"/>
+              <a:t>24,Ibuprofeno,0.85</a:t>
+            </a:r>
+          </a:p>
+          <a:p>
+            <a:pPr>
+              <a:spcAft>
+                <a:spcPts val="400"/>
+              </a:spcAft>
+              <a:defRPr sz="1200">
+                <a:solidFill>
+                  <a:srgbClr val="283038"/>
+                </a:solidFill>
+                <a:latin typeface="Consolas"/>
+              </a:defRPr>
+            </a:pPr>
+            <a:r>
+              <a:rPr lang="es-EC" noProof="0" dirty="0"/>
+              <a:t>34,Amoxicilina,0.45</a:t>
+            </a:r>
+          </a:p>
+          <a:p>
+            <a:pPr>
+              <a:spcAft>
+                <a:spcPts val="400"/>
+              </a:spcAft>
+              <a:defRPr sz="1200">
+                <a:solidFill>
+                  <a:srgbClr val="283038"/>
+                </a:solidFill>
+                <a:latin typeface="Consolas"/>
+              </a:defRPr>
+            </a:pPr>
+            <a:r>
+              <a:rPr lang="es-EC" noProof="0" dirty="0"/>
+              <a:t>10,Omeprazol,0.8</a:t>
+            </a:r>
+          </a:p>
+          <a:p>
+            <a:pPr>
+              <a:spcAft>
+                <a:spcPts val="400"/>
+              </a:spcAft>
+              <a:defRPr sz="1200">
+                <a:solidFill>
+                  <a:srgbClr val="283038"/>
+                </a:solidFill>
+                <a:latin typeface="Consolas"/>
+              </a:defRPr>
+            </a:pPr>
+            <a:r>
+              <a:rPr lang="es-EC" noProof="0" dirty="0"/>
+              <a:t>50,Vitamina C,1.5</a:t>
+            </a:r>
+          </a:p>
+          <a:p>
+            <a:pPr>
+              <a:spcAft>
+                <a:spcPts val="400"/>
+              </a:spcAft>
+              <a:defRPr sz="1200">
+                <a:solidFill>
+                  <a:srgbClr val="283038"/>
+                </a:solidFill>
+                <a:latin typeface="Consolas"/>
+              </a:defRPr>
+            </a:pPr>
+            <a:endParaRPr lang="es-EC" noProof="0" dirty="0"/>
+          </a:p>
+          <a:p>
+            <a:pPr>
+              <a:spcAft>
+                <a:spcPts val="400"/>
+              </a:spcAft>
+              <a:defRPr sz="1200">
+                <a:solidFill>
+                  <a:srgbClr val="283038"/>
+                </a:solidFill>
+                <a:latin typeface="Consolas"/>
+              </a:defRPr>
+            </a:pPr>
+            <a:r>
+              <a:rPr lang="es-EC" noProof="0" dirty="0"/>
+              <a:t>=== datos/registro_pedidos.txt ===</a:t>
+            </a:r>
+          </a:p>
+          <a:p>
+            <a:pPr>
+              <a:spcAft>
+                <a:spcPts val="400"/>
+              </a:spcAft>
+              <a:defRPr sz="1200">
+                <a:solidFill>
+                  <a:srgbClr val="283038"/>
+                </a:solidFill>
+                <a:latin typeface="Consolas"/>
+              </a:defRPr>
+            </a:pPr>
+            <a:r>
+              <a:rPr lang="es-EC" noProof="0" dirty="0"/>
+              <a:t>Steven,2,Cefalexina,0.2</a:t>
+            </a:r>
+          </a:p>
+          <a:p>
+            <a:pPr>
+              <a:spcAft>
+                <a:spcPts val="400"/>
+              </a:spcAft>
+              <a:defRPr sz="1200">
+                <a:solidFill>
+                  <a:srgbClr val="283038"/>
+                </a:solidFill>
+                <a:latin typeface="Consolas"/>
+              </a:defRPr>
+            </a:pPr>
+            <a:r>
+              <a:rPr lang="es-EC" noProof="0" dirty="0"/>
+              <a:t>Jonathan,2,Loratadina,0.25</a:t>
+            </a:r>
+          </a:p>
+          <a:p>
+            <a:pPr>
+              <a:spcAft>
+                <a:spcPts val="400"/>
+              </a:spcAft>
+              <a:defRPr sz="1200">
+                <a:solidFill>
+                  <a:srgbClr val="283038"/>
+                </a:solidFill>
+                <a:latin typeface="Consolas"/>
+              </a:defRPr>
+            </a:pPr>
+            <a:r>
+              <a:rPr lang="es-EC" noProof="0" dirty="0"/>
+              <a:t>Elias,3,Paracetamol,0.3</a:t>
+            </a:r>
+          </a:p>
+          <a:p>
+            <a:pPr>
+              <a:spcAft>
+                <a:spcPts val="400"/>
+              </a:spcAft>
+              <a:defRPr sz="1200">
+                <a:solidFill>
+                  <a:srgbClr val="283038"/>
+                </a:solidFill>
+                <a:latin typeface="Consolas"/>
+              </a:defRPr>
+            </a:pPr>
+            <a:r>
+              <a:rPr lang="es-EC" noProof="0" dirty="0"/>
+              <a:t>Sebastian,1,Vitamina C,1.5</a:t>
+            </a:r>
+          </a:p>
+        </p:txBody>
+      </p:sp>
+      <p:cxnSp>
+        <p:nvCxnSpPr>
+          <p:cNvPr id="11" name="Straight Connector 10">
+            <a:extLst>
+              <a:ext uri="{FF2B5EF4-FFF2-40B4-BE49-F238E27FC236}">
+                <a16:creationId xmlns:a16="http://schemas.microsoft.com/office/drawing/2014/main" id="{5727ACBB-D31B-598E-937C-A55D20E39BCE}"/>
+              </a:ext>
+            </a:extLst>
+          </p:cNvPr>
+          <p:cNvCxnSpPr/>
+          <p:nvPr/>
+        </p:nvCxnSpPr>
+        <p:spPr>
+          <a:xfrm>
+            <a:off x="6492240" y="3732551"/>
+            <a:ext cx="4754880" cy="0"/>
+          </a:xfrm>
+          <a:prstGeom prst="line">
+            <a:avLst/>
+          </a:prstGeom>
+          <a:ln>
+            <a:solidFill>
+              <a:srgbClr val="00B0F0"/>
+            </a:solidFill>
+            <a:prstDash val="dash"/>
+          </a:ln>
+        </p:spPr>
+        <p:style>
+          <a:lnRef idx="2">
+            <a:schemeClr val="accent1"/>
+          </a:lnRef>
+          <a:fillRef idx="0">
+            <a:schemeClr val="accent1"/>
+          </a:fillRef>
+          <a:effectRef idx="1">
+            <a:schemeClr val="accent1"/>
+          </a:effectRef>
+          <a:fontRef idx="minor">
+            <a:schemeClr val="tx1"/>
+          </a:fontRef>
+        </p:style>
+      </p:cxnSp>
+    </p:spTree>
+  </p:cSld>
+  <p:clrMapOvr>
+    <a:masterClrMapping/>
+  </p:clrMapOvr>
+</p:sld>
+</file>
+
+<file path=ppt/slides/slide5.xml><?xml version="1.0" encoding="utf-8"?>
+<p:sld xmlns:a="http://schemas.openxmlformats.org/drawingml/2006/main" xmlns:r="http://schemas.openxmlformats.org/officeDocument/2006/relationships" xmlns:p="http://schemas.openxmlformats.org/presentationml/2006/main">
+  <p:cSld>
+    <p:spTree>
+      <p:nvGrpSpPr>
+        <p:cNvPr id="1" name=""/>
+        <p:cNvGrpSpPr/>
+        <p:nvPr/>
+      </p:nvGrpSpPr>
+      <p:grpSpPr>
+        <a:xfrm>
+          <a:off x="0" y="0"/>
+          <a:ext cx="0" cy="0"/>
+          <a:chOff x="0" y="0"/>
+          <a:chExt cx="0" cy="0"/>
+        </a:xfrm>
+      </p:grpSpPr>
+      <p:sp>
+        <p:nvSpPr>
+          <p:cNvPr id="2" name="Rectangle 1"/>
+          <p:cNvSpPr/>
+          <p:nvPr/>
+        </p:nvSpPr>
+        <p:spPr>
+          <a:xfrm>
+            <a:off x="0" y="0"/>
+            <a:ext cx="12191695" cy="6858000"/>
+          </a:xfrm>
+          <a:prstGeom prst="rect">
+            <a:avLst/>
+          </a:prstGeom>
+          <a:solidFill>
+            <a:srgbClr val="FAFBFC"/>
+          </a:solidFill>
+          <a:ln>
+            <a:noFill/>
+          </a:ln>
+        </p:spPr>
+        <p:style>
+          <a:lnRef idx="1">
+            <a:schemeClr val="accent1"/>
+          </a:lnRef>
+          <a:fillRef idx="3">
+            <a:schemeClr val="accent1"/>
+          </a:fillRef>
+          <a:effectRef idx="2">
+            <a:schemeClr val="accent1"/>
+          </a:effectRef>
+          <a:fontRef idx="minor">
+            <a:schemeClr val="lt1"/>
+          </a:fontRef>
+        </p:style>
+        <p:txBody>
+          <a:bodyPr rtlCol="0" anchor="ctr"/>
+          <a:lstStyle/>
+          <a:p>
+            <a:pPr algn="ctr"/>
+            <a:endParaRPr lang="es-EC" noProof="0" dirty="0"/>
+          </a:p>
+        </p:txBody>
+      </p:sp>
+      <p:sp>
+        <p:nvSpPr>
+          <p:cNvPr id="3" name="TextBox 2"/>
+          <p:cNvSpPr txBox="1"/>
+          <p:nvPr/>
+        </p:nvSpPr>
+        <p:spPr>
+          <a:xfrm>
+            <a:off x="731520" y="320040"/>
+            <a:ext cx="10698480" cy="1005840"/>
+          </a:xfrm>
+          <a:prstGeom prst="rect">
+            <a:avLst/>
+          </a:prstGeom>
+          <a:noFill/>
+        </p:spPr>
+        <p:txBody>
+          <a:bodyPr wrap="square">
+            <a:spAutoFit/>
+          </a:bodyPr>
+          <a:lstStyle/>
+          <a:p>
+            <a:pPr>
+              <a:defRPr sz="2800" b="1">
+                <a:solidFill>
+                  <a:srgbClr val="1E3A4C"/>
+                </a:solidFill>
+                <a:latin typeface="Segoe UI"/>
+              </a:defRPr>
+            </a:pPr>
+            <a:r>
+              <a:t>Arquitectura Modular del Proyecto (3 Capas)</a:t>
+            </a:r>
+          </a:p>
+          <a:p>
+            <a:pPr>
+              <a:spcBef>
+                <a:spcPts val="400"/>
+              </a:spcBef>
+              <a:defRPr sz="1500">
+                <a:solidFill>
+                  <a:srgbClr val="6E7882"/>
+                </a:solidFill>
+                <a:latin typeface="Segoe UI"/>
+              </a:defRPr>
+            </a:pPr>
+            <a:r>
+              <a:t>Vista estructural del código y separación de responsabilidades</a:t>
+            </a:r>
+          </a:p>
+        </p:txBody>
+      </p:sp>
+      <p:sp>
+        <p:nvSpPr>
+          <p:cNvPr id="4" name="Rectangle 3"/>
+          <p:cNvSpPr/>
+          <p:nvPr/>
+        </p:nvSpPr>
+        <p:spPr>
+          <a:xfrm>
+            <a:off x="731520" y="1325880"/>
+            <a:ext cx="1371600" cy="54864"/>
+          </a:xfrm>
+          <a:prstGeom prst="rect">
+            <a:avLst/>
+          </a:prstGeom>
+          <a:solidFill>
+            <a:srgbClr val="48A9A6"/>
+          </a:solidFill>
+          <a:ln>
+            <a:noFill/>
+          </a:ln>
+        </p:spPr>
+        <p:style>
+          <a:lnRef idx="1">
+            <a:schemeClr val="accent1"/>
+          </a:lnRef>
+          <a:fillRef idx="3">
+            <a:schemeClr val="accent1"/>
+          </a:fillRef>
+          <a:effectRef idx="2">
+            <a:schemeClr val="accent1"/>
+          </a:effectRef>
+          <a:fontRef idx="minor">
+            <a:schemeClr val="lt1"/>
+          </a:fontRef>
+        </p:style>
+        <p:txBody>
+          <a:bodyPr rtlCol="0" anchor="ctr"/>
+          <a:lstStyle/>
+          <a:p>
+            <a:pPr algn="ctr"/>
+            <a:endParaRPr lang="es-EC" noProof="0" dirty="0"/>
+          </a:p>
+        </p:txBody>
+      </p:sp>
+      <p:sp>
+        <p:nvSpPr>
+          <p:cNvPr id="5" name="Rounded Rectangle 4"/>
+          <p:cNvSpPr/>
+          <p:nvPr/>
+        </p:nvSpPr>
+        <p:spPr>
+          <a:xfrm>
+            <a:off x="731520" y="1645920"/>
+            <a:ext cx="5303520" cy="4572000"/>
+          </a:xfrm>
+          <a:prstGeom prst="roundRect">
+            <a:avLst/>
+          </a:prstGeom>
+          <a:solidFill>
+            <a:srgbClr val="FFFFFF"/>
+          </a:solidFill>
+          <a:ln w="19050">
+            <a:solidFill>
+              <a:srgbClr val="DCE4EB"/>
+            </a:solidFill>
+          </a:ln>
+        </p:spPr>
+        <p:style>
+          <a:lnRef idx="1">
+            <a:schemeClr val="accent1"/>
+          </a:lnRef>
+          <a:fillRef idx="3">
+            <a:schemeClr val="accent1"/>
+          </a:fillRef>
+          <a:effectRef idx="2">
+            <a:schemeClr val="accent1"/>
+          </a:effectRef>
+          <a:fontRef idx="minor">
+            <a:schemeClr val="lt1"/>
+          </a:fontRef>
+        </p:style>
+        <p:txBody>
+          <a:bodyPr rtlCol="0" anchor="ctr"/>
+          <a:lstStyle/>
+          <a:p>
+            <a:pPr algn="ctr"/>
+            <a:endParaRPr lang="es-EC" noProof="0" dirty="0"/>
+          </a:p>
+        </p:txBody>
+      </p:sp>
+      <p:sp>
+        <p:nvSpPr>
+          <p:cNvPr id="6" name="TextBox 5"/>
+          <p:cNvSpPr txBox="1"/>
+          <p:nvPr/>
+        </p:nvSpPr>
+        <p:spPr>
+          <a:xfrm>
+            <a:off x="960120" y="1828800"/>
+            <a:ext cx="4846320" cy="4206240"/>
+          </a:xfrm>
+          <a:prstGeom prst="rect">
+            <a:avLst/>
+          </a:prstGeom>
+          <a:noFill/>
+        </p:spPr>
+        <p:txBody>
+          <a:bodyPr wrap="square">
+            <a:spAutoFit/>
+          </a:bodyPr>
+          <a:lstStyle/>
+          <a:p>
+            <a:pPr>
+              <a:spcAft>
+                <a:spcPts val="1200"/>
+              </a:spcAft>
+              <a:defRPr sz="1900" b="1">
+                <a:solidFill>
+                  <a:srgbClr val="1E3A4C"/>
+                </a:solidFill>
+                <a:latin typeface="Segoe UI"/>
+              </a:defRPr>
+            </a:pPr>
+            <a:r>
+              <a:rPr lang="es-EC" noProof="0" dirty="0"/>
+              <a:t>Diseño Modular en 3 Capas</a:t>
+            </a:r>
+          </a:p>
+          <a:p>
+            <a:pPr>
+              <a:spcAft>
+                <a:spcPts val="800"/>
+              </a:spcAft>
               <a:defRPr sz="1400">
                 <a:solidFill>
                   <a:srgbClr val="283038"/>
@@ -5338,15 +5815,16 @@
               </a:defRPr>
             </a:pPr>
             <a:r>
-              <a:rPr b="1">
+              <a:rPr lang="es-EC" b="1" noProof="0" dirty="0">
                 <a:solidFill>
                   <a:srgbClr val="48A9A6"/>
                 </a:solidFill>
               </a:rPr>
-              <a:t>• Menú Principal: </a:t>
-            </a:r>
-            <a:r>
-              <a:t>Opciones numeradas del 1 al 8 para un acceso directo y rápido.</a:t>
+              <a:t>• Capa de Entrada (main.py): </a:t>
+            </a:r>
+            <a:r>
+              <a:rPr lang="es-EC" noProof="0" dirty="0"/>
+              <a:t>Punto de inicio conciso que conecta módulos y arranca el bucle principal.</a:t>
             </a:r>
           </a:p>
           <a:p>
@@ -5362,15 +5840,16 @@
               </a:defRPr>
             </a:pPr>
             <a:r>
-              <a:rPr b="1">
+              <a:rPr lang="es-EC" b="1" noProof="0" dirty="0">
                 <a:solidFill>
                   <a:srgbClr val="48A9A6"/>
                 </a:solidFill>
               </a:rPr>
-              <a:t>• Validación de Entrada: </a:t>
-            </a:r>
-            <a:r>
-              <a:t>Uso de 'utilidades.py' para verificar números enteros y decimales.</a:t>
+              <a:t>• Capa de Modelo (clases/): </a:t>
+            </a:r>
+            <a:r>
+              <a:rPr lang="es-EC" noProof="0" dirty="0"/>
+              <a:t>Entidades 'Medicamento' y 'Pedido' con lógica autónoma.</a:t>
             </a:r>
           </a:p>
           <a:p>
@@ -5386,15 +5865,32 @@
               </a:defRPr>
             </a:pPr>
             <a:r>
-              <a:rPr b="1">
+              <a:rPr lang="es-EC" b="1" noProof="0" dirty="0">
                 <a:solidFill>
                   <a:srgbClr val="48A9A6"/>
                 </a:solidFill>
               </a:rPr>
-              <a:t>• Limpieza de Pantalla: </a:t>
-            </a:r>
-            <a:r>
-              <a:t>Uso de 'os.system("cls")' para mantener una vista ordenada.</a:t>
+              <a:t>• Capa de Servicios (</a:t>
+            </a:r>
+            <a:r>
+              <a:rPr lang="es-EC" b="1" noProof="0" dirty="0" err="1">
+                <a:solidFill>
+                  <a:srgbClr val="48A9A6"/>
+                </a:solidFill>
+              </a:rPr>
+              <a:t>modulos</a:t>
+            </a:r>
+            <a:r>
+              <a:rPr lang="es-EC" b="1" noProof="0" dirty="0">
+                <a:solidFill>
+                  <a:srgbClr val="48A9A6"/>
+                </a:solidFill>
+              </a:rPr>
+              <a:t>/): </a:t>
+            </a:r>
+            <a:r>
+              <a:rPr lang="es-EC" noProof="0" dirty="0"/>
+              <a:t>Manejo de archivos TXT, menús de usuario y utilidades.</a:t>
             </a:r>
           </a:p>
           <a:p>
@@ -5410,15 +5906,1622 @@
               </a:defRPr>
             </a:pPr>
             <a:r>
-              <a:rPr b="1">
+              <a:rPr lang="es-EC" b="1" noProof="0" dirty="0">
                 <a:solidFill>
                   <a:srgbClr val="48A9A6"/>
                 </a:solidFill>
               </a:rPr>
-              <a:t>• Flujo Continuo: </a:t>
-            </a:r>
-            <a:r>
-              <a:t>El usuario puede realizar múltiples operaciones sin salir del sistema.</a:t>
+              <a:t>• Desacoplamiento: </a:t>
+            </a:r>
+            <a:r>
+              <a:rPr lang="es-EC" noProof="0" dirty="0"/>
+              <a:t>Cada módulo cumple una única responsabilidad clara y bien definida.</a:t>
+            </a:r>
+          </a:p>
+        </p:txBody>
+      </p:sp>
+      <p:sp>
+        <p:nvSpPr>
+          <p:cNvPr id="7" name="Rounded Rectangle 6"/>
+          <p:cNvSpPr/>
+          <p:nvPr/>
+        </p:nvSpPr>
+        <p:spPr>
+          <a:xfrm>
+            <a:off x="6309360" y="1645920"/>
+            <a:ext cx="5120640" cy="4572000"/>
+          </a:xfrm>
+          <a:prstGeom prst="roundRect">
+            <a:avLst/>
+          </a:prstGeom>
+          <a:solidFill>
+            <a:srgbClr val="F0F4F8"/>
+          </a:solidFill>
+          <a:ln w="19050">
+            <a:solidFill>
+              <a:srgbClr val="48A9A6"/>
+            </a:solidFill>
+          </a:ln>
+        </p:spPr>
+        <p:style>
+          <a:lnRef idx="1">
+            <a:schemeClr val="accent1"/>
+          </a:lnRef>
+          <a:fillRef idx="3">
+            <a:schemeClr val="accent1"/>
+          </a:fillRef>
+          <a:effectRef idx="2">
+            <a:schemeClr val="accent1"/>
+          </a:effectRef>
+          <a:fontRef idx="minor">
+            <a:schemeClr val="lt1"/>
+          </a:fontRef>
+        </p:style>
+        <p:txBody>
+          <a:bodyPr rtlCol="0" anchor="ctr"/>
+          <a:lstStyle/>
+          <a:p>
+            <a:pPr algn="ctr"/>
+            <a:endParaRPr lang="es-EC" noProof="0" dirty="0"/>
+          </a:p>
+        </p:txBody>
+      </p:sp>
+      <p:sp>
+        <p:nvSpPr>
+          <p:cNvPr id="8" name="TextBox 7"/>
+          <p:cNvSpPr txBox="1"/>
+          <p:nvPr/>
+        </p:nvSpPr>
+        <p:spPr>
+          <a:xfrm>
+            <a:off x="6492240" y="1783080"/>
+            <a:ext cx="4754880" cy="365760"/>
+          </a:xfrm>
+          <a:prstGeom prst="rect">
+            <a:avLst/>
+          </a:prstGeom>
+          <a:noFill/>
+        </p:spPr>
+        <p:txBody>
+          <a:bodyPr wrap="none">
+            <a:spAutoFit/>
+          </a:bodyPr>
+          <a:lstStyle/>
+          <a:p>
+            <a:pPr>
+              <a:defRPr sz="1400" b="1">
+                <a:solidFill>
+                  <a:srgbClr val="1E3A4C"/>
+                </a:solidFill>
+                <a:latin typeface="Segoe UI"/>
+              </a:defRPr>
+            </a:pPr>
+            <a:r>
+              <a:rPr lang="es-EC" noProof="0" dirty="0"/>
+              <a:t>📄 Vista de Archivos del Proyecto</a:t>
+            </a:r>
+          </a:p>
+        </p:txBody>
+      </p:sp>
+      <p:sp>
+        <p:nvSpPr>
+          <p:cNvPr id="9" name="TextBox 8"/>
+          <p:cNvSpPr txBox="1"/>
+          <p:nvPr/>
+        </p:nvSpPr>
+        <p:spPr>
+          <a:xfrm>
+            <a:off x="6492240" y="2194560"/>
+            <a:ext cx="4754880" cy="2872581"/>
+          </a:xfrm>
+          <a:prstGeom prst="rect">
+            <a:avLst/>
+          </a:prstGeom>
+          <a:noFill/>
+        </p:spPr>
+        <p:txBody>
+          <a:bodyPr wrap="square">
+            <a:spAutoFit/>
+          </a:bodyPr>
+          <a:lstStyle/>
+          <a:p>
+            <a:pPr>
+              <a:spcAft>
+                <a:spcPts val="400"/>
+              </a:spcAft>
+              <a:defRPr sz="1200">
+                <a:solidFill>
+                  <a:srgbClr val="283038"/>
+                </a:solidFill>
+                <a:latin typeface="Consolas"/>
+              </a:defRPr>
+            </a:pPr>
+            <a:r>
+              <a:rPr lang="es-EC" noProof="0" dirty="0" err="1"/>
+              <a:t>PyPharma_Manager</a:t>
+            </a:r>
+            <a:r>
+              <a:rPr lang="es-EC" noProof="0" dirty="0"/>
+              <a:t>/</a:t>
+            </a:r>
+          </a:p>
+          <a:p>
+            <a:pPr>
+              <a:spcAft>
+                <a:spcPts val="400"/>
+              </a:spcAft>
+              <a:defRPr sz="1200">
+                <a:solidFill>
+                  <a:srgbClr val="283038"/>
+                </a:solidFill>
+                <a:latin typeface="Consolas"/>
+              </a:defRPr>
+            </a:pPr>
+            <a:r>
+              <a:rPr lang="es-EC" noProof="0" dirty="0"/>
+              <a:t>├── 📂 clases/</a:t>
+            </a:r>
+          </a:p>
+          <a:p>
+            <a:pPr>
+              <a:spcAft>
+                <a:spcPts val="400"/>
+              </a:spcAft>
+              <a:defRPr sz="1200">
+                <a:solidFill>
+                  <a:srgbClr val="283038"/>
+                </a:solidFill>
+                <a:latin typeface="Consolas"/>
+              </a:defRPr>
+            </a:pPr>
+            <a:r>
+              <a:rPr lang="es-EC" noProof="0" dirty="0"/>
+              <a:t>│   ├── 📄 medicamento.py   # Modelo Fármaco</a:t>
+            </a:r>
+          </a:p>
+          <a:p>
+            <a:pPr>
+              <a:spcAft>
+                <a:spcPts val="400"/>
+              </a:spcAft>
+              <a:defRPr sz="1200">
+                <a:solidFill>
+                  <a:srgbClr val="283038"/>
+                </a:solidFill>
+                <a:latin typeface="Consolas"/>
+              </a:defRPr>
+            </a:pPr>
+            <a:r>
+              <a:rPr lang="es-EC" noProof="0" dirty="0"/>
+              <a:t>│   └── 📄 pedido.py        # Modelo Venta/Orden</a:t>
+            </a:r>
+          </a:p>
+          <a:p>
+            <a:pPr>
+              <a:spcAft>
+                <a:spcPts val="400"/>
+              </a:spcAft>
+              <a:defRPr sz="1200">
+                <a:solidFill>
+                  <a:srgbClr val="283038"/>
+                </a:solidFill>
+                <a:latin typeface="Consolas"/>
+              </a:defRPr>
+            </a:pPr>
+            <a:r>
+              <a:rPr lang="es-EC" noProof="0" dirty="0"/>
+              <a:t>├── 📂 </a:t>
+            </a:r>
+            <a:r>
+              <a:rPr lang="es-EC" noProof="0" dirty="0" err="1"/>
+              <a:t>modulos</a:t>
+            </a:r>
+            <a:r>
+              <a:rPr lang="es-EC" noProof="0" dirty="0"/>
+              <a:t>/</a:t>
+            </a:r>
+          </a:p>
+          <a:p>
+            <a:pPr>
+              <a:spcAft>
+                <a:spcPts val="400"/>
+              </a:spcAft>
+              <a:defRPr sz="1200">
+                <a:solidFill>
+                  <a:srgbClr val="283038"/>
+                </a:solidFill>
+                <a:latin typeface="Consolas"/>
+              </a:defRPr>
+            </a:pPr>
+            <a:r>
+              <a:rPr lang="es-EC" noProof="0" dirty="0"/>
+              <a:t>│   ├── 📄 gestion_archivos.py # Persistencia TXT</a:t>
+            </a:r>
+          </a:p>
+          <a:p>
+            <a:pPr>
+              <a:spcAft>
+                <a:spcPts val="400"/>
+              </a:spcAft>
+              <a:defRPr sz="1200">
+                <a:solidFill>
+                  <a:srgbClr val="283038"/>
+                </a:solidFill>
+                <a:latin typeface="Consolas"/>
+              </a:defRPr>
+            </a:pPr>
+            <a:r>
+              <a:rPr lang="es-EC" noProof="0" dirty="0"/>
+              <a:t>│   ├── 📄 utilidades.py       # Validaciones try/</a:t>
+            </a:r>
+            <a:r>
+              <a:rPr lang="es-EC" noProof="0" dirty="0" err="1"/>
+              <a:t>exc</a:t>
+            </a:r>
+            <a:endParaRPr lang="es-EC" noProof="0" dirty="0"/>
+          </a:p>
+          <a:p>
+            <a:pPr>
+              <a:spcAft>
+                <a:spcPts val="400"/>
+              </a:spcAft>
+              <a:defRPr sz="1200">
+                <a:solidFill>
+                  <a:srgbClr val="283038"/>
+                </a:solidFill>
+                <a:latin typeface="Consolas"/>
+              </a:defRPr>
+            </a:pPr>
+            <a:r>
+              <a:rPr lang="es-EC" noProof="0" dirty="0"/>
+              <a:t>│   └── 📄 menus.py            # Interfaz de Usuario</a:t>
+            </a:r>
+          </a:p>
+          <a:p>
+            <a:pPr>
+              <a:spcAft>
+                <a:spcPts val="400"/>
+              </a:spcAft>
+              <a:defRPr sz="1200">
+                <a:solidFill>
+                  <a:srgbClr val="283038"/>
+                </a:solidFill>
+                <a:latin typeface="Consolas"/>
+              </a:defRPr>
+            </a:pPr>
+            <a:r>
+              <a:rPr lang="es-EC" noProof="0" dirty="0"/>
+              <a:t>├── 📂 datos/</a:t>
+            </a:r>
+          </a:p>
+          <a:p>
+            <a:pPr>
+              <a:spcAft>
+                <a:spcPts val="400"/>
+              </a:spcAft>
+              <a:defRPr sz="1200">
+                <a:solidFill>
+                  <a:srgbClr val="283038"/>
+                </a:solidFill>
+                <a:latin typeface="Consolas"/>
+              </a:defRPr>
+            </a:pPr>
+            <a:r>
+              <a:rPr lang="es-EC" noProof="0" dirty="0"/>
+              <a:t>│   ├── 📄 inventario_medicinas.txt</a:t>
+            </a:r>
+          </a:p>
+          <a:p>
+            <a:pPr>
+              <a:spcAft>
+                <a:spcPts val="400"/>
+              </a:spcAft>
+              <a:defRPr sz="1200">
+                <a:solidFill>
+                  <a:srgbClr val="283038"/>
+                </a:solidFill>
+                <a:latin typeface="Consolas"/>
+              </a:defRPr>
+            </a:pPr>
+            <a:r>
+              <a:rPr lang="es-EC" noProof="0" dirty="0"/>
+              <a:t>│   └── 📄 registro_pedidos.txt</a:t>
+            </a:r>
+          </a:p>
+          <a:p>
+            <a:pPr>
+              <a:spcAft>
+                <a:spcPts val="400"/>
+              </a:spcAft>
+              <a:defRPr sz="1200">
+                <a:solidFill>
+                  <a:srgbClr val="283038"/>
+                </a:solidFill>
+                <a:latin typeface="Consolas"/>
+              </a:defRPr>
+            </a:pPr>
+            <a:r>
+              <a:rPr lang="es-EC" noProof="0" dirty="0"/>
+              <a:t>└── 🚀 main.py              # </a:t>
+            </a:r>
+            <a:r>
+              <a:rPr lang="es-EC" noProof="0" dirty="0" err="1"/>
+              <a:t>Entry</a:t>
+            </a:r>
+            <a:r>
+              <a:rPr lang="es-EC" noProof="0" dirty="0"/>
+              <a:t> Point del Sistema</a:t>
+            </a:r>
+          </a:p>
+        </p:txBody>
+      </p:sp>
+    </p:spTree>
+  </p:cSld>
+  <p:clrMapOvr>
+    <a:masterClrMapping/>
+  </p:clrMapOvr>
+</p:sld>
+</file>
+
+<file path=ppt/slides/slide6.xml><?xml version="1.0" encoding="utf-8"?>
+<p:sld xmlns:a="http://schemas.openxmlformats.org/drawingml/2006/main" xmlns:r="http://schemas.openxmlformats.org/officeDocument/2006/relationships" xmlns:p="http://schemas.openxmlformats.org/presentationml/2006/main">
+  <p:cSld>
+    <p:spTree>
+      <p:nvGrpSpPr>
+        <p:cNvPr id="1" name=""/>
+        <p:cNvGrpSpPr/>
+        <p:nvPr/>
+      </p:nvGrpSpPr>
+      <p:grpSpPr>
+        <a:xfrm>
+          <a:off x="0" y="0"/>
+          <a:ext cx="0" cy="0"/>
+          <a:chOff x="0" y="0"/>
+          <a:chExt cx="0" cy="0"/>
+        </a:xfrm>
+      </p:grpSpPr>
+      <p:sp>
+        <p:nvSpPr>
+          <p:cNvPr id="2" name="Rectangle 1"/>
+          <p:cNvSpPr/>
+          <p:nvPr/>
+        </p:nvSpPr>
+        <p:spPr>
+          <a:xfrm>
+            <a:off x="0" y="0"/>
+            <a:ext cx="12191695" cy="6858000"/>
+          </a:xfrm>
+          <a:prstGeom prst="rect">
+            <a:avLst/>
+          </a:prstGeom>
+          <a:solidFill>
+            <a:srgbClr val="FAFBFC"/>
+          </a:solidFill>
+          <a:ln>
+            <a:noFill/>
+          </a:ln>
+        </p:spPr>
+        <p:style>
+          <a:lnRef idx="1">
+            <a:schemeClr val="accent1"/>
+          </a:lnRef>
+          <a:fillRef idx="3">
+            <a:schemeClr val="accent1"/>
+          </a:fillRef>
+          <a:effectRef idx="2">
+            <a:schemeClr val="accent1"/>
+          </a:effectRef>
+          <a:fontRef idx="minor">
+            <a:schemeClr val="lt1"/>
+          </a:fontRef>
+        </p:style>
+        <p:txBody>
+          <a:bodyPr rtlCol="0" anchor="ctr"/>
+          <a:lstStyle/>
+          <a:p>
+            <a:pPr algn="ctr"/>
+            <a:endParaRPr lang="es-EC" noProof="0" dirty="0"/>
+          </a:p>
+        </p:txBody>
+      </p:sp>
+      <p:sp>
+        <p:nvSpPr>
+          <p:cNvPr id="3" name="TextBox 2"/>
+          <p:cNvSpPr txBox="1"/>
+          <p:nvPr/>
+        </p:nvSpPr>
+        <p:spPr>
+          <a:xfrm>
+            <a:off x="731520" y="320040"/>
+            <a:ext cx="10698480" cy="1005840"/>
+          </a:xfrm>
+          <a:prstGeom prst="rect">
+            <a:avLst/>
+          </a:prstGeom>
+          <a:noFill/>
+        </p:spPr>
+        <p:txBody>
+          <a:bodyPr wrap="square">
+            <a:spAutoFit/>
+          </a:bodyPr>
+          <a:lstStyle/>
+          <a:p>
+            <a:pPr>
+              <a:defRPr sz="2800" b="1">
+                <a:solidFill>
+                  <a:srgbClr val="1E3A4C"/>
+                </a:solidFill>
+                <a:latin typeface="Segoe UI"/>
+              </a:defRPr>
+            </a:pPr>
+            <a:r>
+              <a:t>[2. EL TRONCO] Modelos POO y Comunicación Directa</a:t>
+            </a:r>
+          </a:p>
+          <a:p>
+            <a:pPr>
+              <a:spcBef>
+                <a:spcPts val="400"/>
+              </a:spcBef>
+              <a:defRPr sz="1500">
+                <a:solidFill>
+                  <a:srgbClr val="6E7882"/>
+                </a:solidFill>
+                <a:latin typeface="Segoe UI"/>
+              </a:defRPr>
+            </a:pPr>
+            <a:r>
+              <a:t>Autonomía de entidades en memoria RAM y principio 'sin intermediarios'</a:t>
+            </a:r>
+          </a:p>
+        </p:txBody>
+      </p:sp>
+      <p:sp>
+        <p:nvSpPr>
+          <p:cNvPr id="4" name="Rectangle 3"/>
+          <p:cNvSpPr/>
+          <p:nvPr/>
+        </p:nvSpPr>
+        <p:spPr>
+          <a:xfrm>
+            <a:off x="731520" y="1325880"/>
+            <a:ext cx="1371600" cy="54864"/>
+          </a:xfrm>
+          <a:prstGeom prst="rect">
+            <a:avLst/>
+          </a:prstGeom>
+          <a:solidFill>
+            <a:srgbClr val="48A9A6"/>
+          </a:solidFill>
+          <a:ln>
+            <a:noFill/>
+          </a:ln>
+        </p:spPr>
+        <p:style>
+          <a:lnRef idx="1">
+            <a:schemeClr val="accent1"/>
+          </a:lnRef>
+          <a:fillRef idx="3">
+            <a:schemeClr val="accent1"/>
+          </a:fillRef>
+          <a:effectRef idx="2">
+            <a:schemeClr val="accent1"/>
+          </a:effectRef>
+          <a:fontRef idx="minor">
+            <a:schemeClr val="lt1"/>
+          </a:fontRef>
+        </p:style>
+        <p:txBody>
+          <a:bodyPr rtlCol="0" anchor="ctr"/>
+          <a:lstStyle/>
+          <a:p>
+            <a:pPr algn="ctr"/>
+            <a:endParaRPr lang="es-EC" noProof="0" dirty="0"/>
+          </a:p>
+        </p:txBody>
+      </p:sp>
+      <p:sp>
+        <p:nvSpPr>
+          <p:cNvPr id="5" name="Rounded Rectangle 4"/>
+          <p:cNvSpPr/>
+          <p:nvPr/>
+        </p:nvSpPr>
+        <p:spPr>
+          <a:xfrm>
+            <a:off x="731520" y="1645920"/>
+            <a:ext cx="5120640" cy="4572000"/>
+          </a:xfrm>
+          <a:prstGeom prst="roundRect">
+            <a:avLst/>
+          </a:prstGeom>
+          <a:solidFill>
+            <a:srgbClr val="FFFFFF"/>
+          </a:solidFill>
+          <a:ln w="19050">
+            <a:solidFill>
+              <a:srgbClr val="DCE4EB"/>
+            </a:solidFill>
+          </a:ln>
+        </p:spPr>
+        <p:style>
+          <a:lnRef idx="1">
+            <a:schemeClr val="accent1"/>
+          </a:lnRef>
+          <a:fillRef idx="3">
+            <a:schemeClr val="accent1"/>
+          </a:fillRef>
+          <a:effectRef idx="2">
+            <a:schemeClr val="accent1"/>
+          </a:effectRef>
+          <a:fontRef idx="minor">
+            <a:schemeClr val="lt1"/>
+          </a:fontRef>
+        </p:style>
+        <p:txBody>
+          <a:bodyPr rtlCol="0" anchor="ctr"/>
+          <a:lstStyle/>
+          <a:p>
+            <a:pPr algn="ctr"/>
+            <a:endParaRPr lang="es-EC" noProof="0" dirty="0"/>
+          </a:p>
+        </p:txBody>
+      </p:sp>
+      <p:sp>
+        <p:nvSpPr>
+          <p:cNvPr id="6" name="TextBox 5"/>
+          <p:cNvSpPr txBox="1"/>
+          <p:nvPr/>
+        </p:nvSpPr>
+        <p:spPr>
+          <a:xfrm>
+            <a:off x="960120" y="1828800"/>
+            <a:ext cx="4663440" cy="4206240"/>
+          </a:xfrm>
+          <a:prstGeom prst="rect">
+            <a:avLst/>
+          </a:prstGeom>
+          <a:noFill/>
+        </p:spPr>
+        <p:txBody>
+          <a:bodyPr wrap="square">
+            <a:spAutoFit/>
+          </a:bodyPr>
+          <a:lstStyle/>
+          <a:p>
+            <a:pPr>
+              <a:spcAft>
+                <a:spcPts val="1200"/>
+              </a:spcAft>
+              <a:defRPr sz="1900" b="1">
+                <a:solidFill>
+                  <a:srgbClr val="1E3A4C"/>
+                </a:solidFill>
+                <a:latin typeface="Segoe UI"/>
+              </a:defRPr>
+            </a:pPr>
+            <a:r>
+              <a:t>Autonomía de las Clases en RAM</a:t>
+            </a:r>
+          </a:p>
+          <a:p>
+            <a:pPr>
+              <a:spcAft>
+                <a:spcPts val="800"/>
+              </a:spcAft>
+              <a:defRPr sz="1400" b="0">
+                <a:solidFill>
+                  <a:srgbClr val="283038"/>
+                </a:solidFill>
+                <a:latin typeface="Segoe UI"/>
+              </a:defRPr>
+            </a:pPr>
+            <a:r>
+              <a:t>• Clase Medicamento: Modelado de fármacos con métodos propios 'a_lista()' y 'desde_lista()' para autogestionarse.</a:t>
+            </a:r>
+          </a:p>
+          <a:p>
+            <a:pPr>
+              <a:spcAft>
+                <a:spcPts val="800"/>
+              </a:spcAft>
+              <a:defRPr sz="1400" b="0">
+                <a:solidFill>
+                  <a:srgbClr val="283038"/>
+                </a:solidFill>
+                <a:latin typeface="Segoe UI"/>
+              </a:defRPr>
+            </a:pPr>
+            <a:r>
+              <a:t>• Clase Pedido: Gestión del carrito de compras y método 'a_filas_registro()' para exportar ventas al historial.</a:t>
+            </a:r>
+          </a:p>
+          <a:p>
+            <a:pPr>
+              <a:spcAft>
+                <a:spcPts val="800"/>
+              </a:spcAft>
+              <a:defRPr sz="1400" b="0">
+                <a:solidFill>
+                  <a:srgbClr val="283038"/>
+                </a:solidFill>
+                <a:latin typeface="Segoe UI"/>
+              </a:defRPr>
+            </a:pPr>
+            <a:r>
+              <a:t>• Módulo de Archivos: Separación pura de responsabilidades; se enfoca solo en leer y escribir en disco.</a:t>
+            </a:r>
+          </a:p>
+          <a:p>
+            <a:pPr>
+              <a:spcAft>
+                <a:spcPts val="800"/>
+              </a:spcAft>
+              <a:defRPr sz="1400" b="0">
+                <a:solidFill>
+                  <a:srgbClr val="283038"/>
+                </a:solidFill>
+                <a:latin typeface="Segoe UI"/>
+              </a:defRPr>
+            </a:pPr>
+            <a:r>
+              <a:t>• Módulo de Menús: Conecta de forma directa las clases en memoria con el guardado físico.</a:t>
+            </a:r>
+          </a:p>
+        </p:txBody>
+      </p:sp>
+      <p:sp>
+        <p:nvSpPr>
+          <p:cNvPr id="7" name="Rounded Rectangle 6"/>
+          <p:cNvSpPr/>
+          <p:nvPr/>
+        </p:nvSpPr>
+        <p:spPr>
+          <a:xfrm>
+            <a:off x="6309360" y="1645920"/>
+            <a:ext cx="5120640" cy="4572000"/>
+          </a:xfrm>
+          <a:prstGeom prst="roundRect">
+            <a:avLst/>
+          </a:prstGeom>
+          <a:solidFill>
+            <a:srgbClr val="FFFFFF"/>
+          </a:solidFill>
+          <a:ln w="19050">
+            <a:solidFill>
+              <a:srgbClr val="DCE4EB"/>
+            </a:solidFill>
+          </a:ln>
+        </p:spPr>
+        <p:style>
+          <a:lnRef idx="1">
+            <a:schemeClr val="accent1"/>
+          </a:lnRef>
+          <a:fillRef idx="3">
+            <a:schemeClr val="accent1"/>
+          </a:fillRef>
+          <a:effectRef idx="2">
+            <a:schemeClr val="accent1"/>
+          </a:effectRef>
+          <a:fontRef idx="minor">
+            <a:schemeClr val="lt1"/>
+          </a:fontRef>
+        </p:style>
+        <p:txBody>
+          <a:bodyPr rtlCol="0" anchor="ctr"/>
+          <a:lstStyle/>
+          <a:p>
+            <a:pPr algn="ctr"/>
+            <a:endParaRPr lang="es-EC" noProof="0" dirty="0"/>
+          </a:p>
+        </p:txBody>
+      </p:sp>
+      <p:sp>
+        <p:nvSpPr>
+          <p:cNvPr id="8" name="TextBox 7"/>
+          <p:cNvSpPr txBox="1"/>
+          <p:nvPr/>
+        </p:nvSpPr>
+        <p:spPr>
+          <a:xfrm>
+            <a:off x="6537960" y="1828800"/>
+            <a:ext cx="4663440" cy="2569934"/>
+          </a:xfrm>
+          <a:prstGeom prst="rect">
+            <a:avLst/>
+          </a:prstGeom>
+          <a:noFill/>
+        </p:spPr>
+        <p:txBody>
+          <a:bodyPr wrap="square">
+            <a:spAutoFit/>
+          </a:bodyPr>
+          <a:lstStyle/>
+          <a:p>
+            <a:pPr>
+              <a:spcAft>
+                <a:spcPts val="1200"/>
+              </a:spcAft>
+              <a:defRPr sz="1900" b="1">
+                <a:solidFill>
+                  <a:srgbClr val="1E3A4C"/>
+                </a:solidFill>
+                <a:latin typeface="Segoe UI"/>
+              </a:defRPr>
+            </a:pPr>
+            <a:r>
+              <a:rPr lang="es-EC" noProof="0" dirty="0"/>
+              <a:t>Ventajas del Diseño</a:t>
+            </a:r>
+          </a:p>
+          <a:p>
+            <a:pPr>
+              <a:spcAft>
+                <a:spcPts val="800"/>
+              </a:spcAft>
+              <a:defRPr sz="1400">
+                <a:solidFill>
+                  <a:srgbClr val="283038"/>
+                </a:solidFill>
+                <a:latin typeface="Segoe UI"/>
+              </a:defRPr>
+            </a:pPr>
+            <a:r>
+              <a:rPr lang="es-EC" b="1" noProof="0" dirty="0">
+                <a:solidFill>
+                  <a:srgbClr val="48A9A6"/>
+                </a:solidFill>
+              </a:rPr>
+              <a:t>• Sin Intermediarios: </a:t>
+            </a:r>
+            <a:r>
+              <a:rPr lang="es-EC" noProof="0" dirty="0"/>
+              <a:t>No utilizamos módulos traductores innecesarios y código duplicado.</a:t>
+            </a:r>
+          </a:p>
+          <a:p>
+            <a:pPr>
+              <a:spcAft>
+                <a:spcPts val="800"/>
+              </a:spcAft>
+              <a:defRPr sz="1400">
+                <a:solidFill>
+                  <a:srgbClr val="283038"/>
+                </a:solidFill>
+                <a:latin typeface="Segoe UI"/>
+              </a:defRPr>
+            </a:pPr>
+            <a:r>
+              <a:rPr lang="es-EC" b="1" noProof="0" dirty="0">
+                <a:solidFill>
+                  <a:srgbClr val="48A9A6"/>
+                </a:solidFill>
+              </a:rPr>
+              <a:t>• Alta Cohesión: </a:t>
+            </a:r>
+            <a:r>
+              <a:rPr lang="es-EC" noProof="0" dirty="0"/>
+              <a:t>Cada entidad es dueña absoluta de sus datos y formato.</a:t>
+            </a:r>
+          </a:p>
+          <a:p>
+            <a:pPr>
+              <a:spcAft>
+                <a:spcPts val="800"/>
+              </a:spcAft>
+              <a:defRPr sz="1400">
+                <a:solidFill>
+                  <a:srgbClr val="283038"/>
+                </a:solidFill>
+                <a:latin typeface="Segoe UI"/>
+              </a:defRPr>
+            </a:pPr>
+            <a:r>
+              <a:rPr lang="es-EC" b="1" noProof="0" dirty="0">
+                <a:solidFill>
+                  <a:srgbClr val="48A9A6"/>
+                </a:solidFill>
+              </a:rPr>
+              <a:t>• Bajo Acoplamiento: </a:t>
+            </a:r>
+            <a:r>
+              <a:rPr lang="es-EC" noProof="0" dirty="0"/>
+              <a:t>Las capas se comunican mediante interfaces estándar de listas.</a:t>
+            </a:r>
+          </a:p>
+          <a:p>
+            <a:pPr>
+              <a:spcAft>
+                <a:spcPts val="800"/>
+              </a:spcAft>
+              <a:defRPr sz="1400">
+                <a:solidFill>
+                  <a:srgbClr val="283038"/>
+                </a:solidFill>
+                <a:latin typeface="Segoe UI"/>
+              </a:defRPr>
+            </a:pPr>
+            <a:r>
+              <a:rPr lang="es-EC" b="1" noProof="0" dirty="0">
+                <a:solidFill>
+                  <a:srgbClr val="48A9A6"/>
+                </a:solidFill>
+              </a:rPr>
+              <a:t>• Legibilidad: </a:t>
+            </a:r>
+            <a:r>
+              <a:rPr lang="es-EC" noProof="0" dirty="0"/>
+              <a:t>Código limpio, profesional y altamente mantenible.</a:t>
+            </a:r>
+          </a:p>
+        </p:txBody>
+      </p:sp>
+    </p:spTree>
+  </p:cSld>
+  <p:clrMapOvr>
+    <a:masterClrMapping/>
+  </p:clrMapOvr>
+</p:sld>
+</file>
+
+<file path=ppt/slides/slide7.xml><?xml version="1.0" encoding="utf-8"?>
+<p:sld xmlns:a="http://schemas.openxmlformats.org/drawingml/2006/main" xmlns:r="http://schemas.openxmlformats.org/officeDocument/2006/relationships" xmlns:p="http://schemas.openxmlformats.org/presentationml/2006/main">
+  <p:cSld>
+    <p:spTree>
+      <p:nvGrpSpPr>
+        <p:cNvPr id="1" name=""/>
+        <p:cNvGrpSpPr/>
+        <p:nvPr/>
+      </p:nvGrpSpPr>
+      <p:grpSpPr>
+        <a:xfrm>
+          <a:off x="0" y="0"/>
+          <a:ext cx="0" cy="0"/>
+          <a:chOff x="0" y="0"/>
+          <a:chExt cx="0" cy="0"/>
+        </a:xfrm>
+      </p:grpSpPr>
+      <p:sp>
+        <p:nvSpPr>
+          <p:cNvPr id="2" name="Rectangle 1"/>
+          <p:cNvSpPr/>
+          <p:nvPr/>
+        </p:nvSpPr>
+        <p:spPr>
+          <a:xfrm>
+            <a:off x="0" y="0"/>
+            <a:ext cx="12191695" cy="6858000"/>
+          </a:xfrm>
+          <a:prstGeom prst="rect">
+            <a:avLst/>
+          </a:prstGeom>
+          <a:solidFill>
+            <a:srgbClr val="FAFBFC"/>
+          </a:solidFill>
+          <a:ln>
+            <a:noFill/>
+          </a:ln>
+        </p:spPr>
+        <p:style>
+          <a:lnRef idx="1">
+            <a:schemeClr val="accent1"/>
+          </a:lnRef>
+          <a:fillRef idx="3">
+            <a:schemeClr val="accent1"/>
+          </a:fillRef>
+          <a:effectRef idx="2">
+            <a:schemeClr val="accent1"/>
+          </a:effectRef>
+          <a:fontRef idx="minor">
+            <a:schemeClr val="lt1"/>
+          </a:fontRef>
+        </p:style>
+        <p:txBody>
+          <a:bodyPr rtlCol="0" anchor="ctr"/>
+          <a:lstStyle/>
+          <a:p>
+            <a:pPr algn="ctr"/>
+            <a:endParaRPr lang="es-EC" noProof="0" dirty="0"/>
+          </a:p>
+        </p:txBody>
+      </p:sp>
+      <p:sp>
+        <p:nvSpPr>
+          <p:cNvPr id="3" name="TextBox 2"/>
+          <p:cNvSpPr txBox="1"/>
+          <p:nvPr/>
+        </p:nvSpPr>
+        <p:spPr>
+          <a:xfrm>
+            <a:off x="731520" y="320040"/>
+            <a:ext cx="10698480" cy="1005840"/>
+          </a:xfrm>
+          <a:prstGeom prst="rect">
+            <a:avLst/>
+          </a:prstGeom>
+          <a:noFill/>
+        </p:spPr>
+        <p:txBody>
+          <a:bodyPr wrap="square">
+            <a:spAutoFit/>
+          </a:bodyPr>
+          <a:lstStyle/>
+          <a:p>
+            <a:pPr>
+              <a:defRPr sz="2800" b="1">
+                <a:solidFill>
+                  <a:srgbClr val="1E3A4C"/>
+                </a:solidFill>
+                <a:latin typeface="Segoe UI"/>
+              </a:defRPr>
+            </a:pPr>
+            <a:r>
+              <a:t>[2. EL TRONCO] Lógica de Negocio y Validaciones</a:t>
+            </a:r>
+          </a:p>
+          <a:p>
+            <a:pPr>
+              <a:spcBef>
+                <a:spcPts val="400"/>
+              </a:spcBef>
+              <a:defRPr sz="1500">
+                <a:solidFill>
+                  <a:srgbClr val="6E7882"/>
+                </a:solidFill>
+                <a:latin typeface="Segoe UI"/>
+              </a:defRPr>
+            </a:pPr>
+            <a:r>
+              <a:t>Control operativo en memoria RAM y protección activa contra errores ('utilidades.py')</a:t>
+            </a:r>
+          </a:p>
+        </p:txBody>
+      </p:sp>
+      <p:sp>
+        <p:nvSpPr>
+          <p:cNvPr id="4" name="Rectangle 3"/>
+          <p:cNvSpPr/>
+          <p:nvPr/>
+        </p:nvSpPr>
+        <p:spPr>
+          <a:xfrm>
+            <a:off x="731520" y="1325880"/>
+            <a:ext cx="1371600" cy="54864"/>
+          </a:xfrm>
+          <a:prstGeom prst="rect">
+            <a:avLst/>
+          </a:prstGeom>
+          <a:solidFill>
+            <a:srgbClr val="48A9A6"/>
+          </a:solidFill>
+          <a:ln>
+            <a:noFill/>
+          </a:ln>
+        </p:spPr>
+        <p:style>
+          <a:lnRef idx="1">
+            <a:schemeClr val="accent1"/>
+          </a:lnRef>
+          <a:fillRef idx="3">
+            <a:schemeClr val="accent1"/>
+          </a:fillRef>
+          <a:effectRef idx="2">
+            <a:schemeClr val="accent1"/>
+          </a:effectRef>
+          <a:fontRef idx="minor">
+            <a:schemeClr val="lt1"/>
+          </a:fontRef>
+        </p:style>
+        <p:txBody>
+          <a:bodyPr rtlCol="0" anchor="ctr"/>
+          <a:lstStyle/>
+          <a:p>
+            <a:pPr algn="ctr"/>
+            <a:endParaRPr lang="es-EC" noProof="0" dirty="0"/>
+          </a:p>
+        </p:txBody>
+      </p:sp>
+      <p:sp>
+        <p:nvSpPr>
+          <p:cNvPr id="5" name="Rounded Rectangle 4"/>
+          <p:cNvSpPr/>
+          <p:nvPr/>
+        </p:nvSpPr>
+        <p:spPr>
+          <a:xfrm>
+            <a:off x="731520" y="1645920"/>
+            <a:ext cx="5120640" cy="4572000"/>
+          </a:xfrm>
+          <a:prstGeom prst="roundRect">
+            <a:avLst/>
+          </a:prstGeom>
+          <a:solidFill>
+            <a:srgbClr val="FFFFFF"/>
+          </a:solidFill>
+          <a:ln w="19050">
+            <a:solidFill>
+              <a:srgbClr val="DCE4EB"/>
+            </a:solidFill>
+          </a:ln>
+        </p:spPr>
+        <p:style>
+          <a:lnRef idx="1">
+            <a:schemeClr val="accent1"/>
+          </a:lnRef>
+          <a:fillRef idx="3">
+            <a:schemeClr val="accent1"/>
+          </a:fillRef>
+          <a:effectRef idx="2">
+            <a:schemeClr val="accent1"/>
+          </a:effectRef>
+          <a:fontRef idx="minor">
+            <a:schemeClr val="lt1"/>
+          </a:fontRef>
+        </p:style>
+        <p:txBody>
+          <a:bodyPr rtlCol="0" anchor="ctr"/>
+          <a:lstStyle/>
+          <a:p>
+            <a:pPr algn="ctr"/>
+            <a:endParaRPr lang="es-EC" noProof="0" dirty="0"/>
+          </a:p>
+        </p:txBody>
+      </p:sp>
+      <p:sp>
+        <p:nvSpPr>
+          <p:cNvPr id="6" name="TextBox 5"/>
+          <p:cNvSpPr txBox="1"/>
+          <p:nvPr/>
+        </p:nvSpPr>
+        <p:spPr>
+          <a:xfrm>
+            <a:off x="960120" y="1828800"/>
+            <a:ext cx="4663440" cy="4206240"/>
+          </a:xfrm>
+          <a:prstGeom prst="rect">
+            <a:avLst/>
+          </a:prstGeom>
+          <a:noFill/>
+        </p:spPr>
+        <p:txBody>
+          <a:bodyPr wrap="square">
+            <a:spAutoFit/>
+          </a:bodyPr>
+          <a:lstStyle/>
+          <a:p>
+            <a:pPr>
+              <a:spcAft>
+                <a:spcPts val="1200"/>
+              </a:spcAft>
+              <a:defRPr sz="1900" b="1">
+                <a:solidFill>
+                  <a:srgbClr val="1E3A4C"/>
+                </a:solidFill>
+                <a:latin typeface="Segoe UI"/>
+              </a:defRPr>
+            </a:pPr>
+            <a:r>
+              <a:t>Lógica Operativa en Memoria</a:t>
+            </a:r>
+          </a:p>
+          <a:p>
+            <a:pPr>
+              <a:spcAft>
+                <a:spcPts val="800"/>
+              </a:spcAft>
+              <a:defRPr sz="1400" b="0">
+                <a:solidFill>
+                  <a:srgbClr val="283038"/>
+                </a:solidFill>
+                <a:latin typeface="Segoe UI"/>
+              </a:defRPr>
+            </a:pPr>
+            <a:r>
+              <a:t>• Control de Inventario: Alta de fármacos con verificación de duplicados, edición de precios y reabastecimiento.</a:t>
+            </a:r>
+          </a:p>
+          <a:p>
+            <a:pPr>
+              <a:spcAft>
+                <a:spcPts val="800"/>
+              </a:spcAft>
+              <a:defRPr sz="1400" b="0">
+                <a:solidFill>
+                  <a:srgbClr val="283038"/>
+                </a:solidFill>
+                <a:latin typeface="Segoe UI"/>
+              </a:defRPr>
+            </a:pPr>
+            <a:r>
+              <a:t>• Descuentos y Ventas: Aplicación de rebajas (0-100%) y cálculo automático de totales en el carrito de compras.</a:t>
+            </a:r>
+          </a:p>
+          <a:p>
+            <a:pPr>
+              <a:spcAft>
+                <a:spcPts val="800"/>
+              </a:spcAft>
+              <a:defRPr sz="1400" b="0">
+                <a:solidFill>
+                  <a:srgbClr val="283038"/>
+                </a:solidFill>
+                <a:latin typeface="Segoe UI"/>
+              </a:defRPr>
+            </a:pPr>
+            <a:r>
+              <a:t>• Verificación en Tiempo Real: Comprobación instantánea de stock disponible antes de procesar cualquier pedido.</a:t>
+            </a:r>
+          </a:p>
+          <a:p>
+            <a:pPr>
+              <a:spcAft>
+                <a:spcPts val="800"/>
+              </a:spcAft>
+              <a:defRPr sz="1400">
+                <a:solidFill>
+                  <a:srgbClr val="283038"/>
+                </a:solidFill>
+                <a:latin typeface="Segoe UI"/>
+              </a:defRPr>
+            </a:pPr>
+          </a:p>
+        </p:txBody>
+      </p:sp>
+      <p:sp>
+        <p:nvSpPr>
+          <p:cNvPr id="7" name="Rounded Rectangle 6"/>
+          <p:cNvSpPr/>
+          <p:nvPr/>
+        </p:nvSpPr>
+        <p:spPr>
+          <a:xfrm>
+            <a:off x="6309360" y="1645920"/>
+            <a:ext cx="5120640" cy="4572000"/>
+          </a:xfrm>
+          <a:prstGeom prst="roundRect">
+            <a:avLst/>
+          </a:prstGeom>
+          <a:solidFill>
+            <a:srgbClr val="FFFFFF"/>
+          </a:solidFill>
+          <a:ln w="19050">
+            <a:solidFill>
+              <a:srgbClr val="DCE4EB"/>
+            </a:solidFill>
+          </a:ln>
+        </p:spPr>
+        <p:style>
+          <a:lnRef idx="1">
+            <a:schemeClr val="accent1"/>
+          </a:lnRef>
+          <a:fillRef idx="3">
+            <a:schemeClr val="accent1"/>
+          </a:fillRef>
+          <a:effectRef idx="2">
+            <a:schemeClr val="accent1"/>
+          </a:effectRef>
+          <a:fontRef idx="minor">
+            <a:schemeClr val="lt1"/>
+          </a:fontRef>
+        </p:style>
+        <p:txBody>
+          <a:bodyPr rtlCol="0" anchor="ctr"/>
+          <a:lstStyle/>
+          <a:p>
+            <a:pPr algn="ctr"/>
+            <a:endParaRPr lang="es-EC" noProof="0" dirty="0"/>
+          </a:p>
+        </p:txBody>
+      </p:sp>
+      <p:sp>
+        <p:nvSpPr>
+          <p:cNvPr id="8" name="TextBox 7"/>
+          <p:cNvSpPr txBox="1"/>
+          <p:nvPr/>
+        </p:nvSpPr>
+        <p:spPr>
+          <a:xfrm>
+            <a:off x="6537960" y="1828800"/>
+            <a:ext cx="4663440" cy="4206240"/>
+          </a:xfrm>
+          <a:prstGeom prst="rect">
+            <a:avLst/>
+          </a:prstGeom>
+          <a:noFill/>
+        </p:spPr>
+        <p:txBody>
+          <a:bodyPr wrap="square">
+            <a:spAutoFit/>
+          </a:bodyPr>
+          <a:lstStyle/>
+          <a:p>
+            <a:pPr>
+              <a:spcAft>
+                <a:spcPts val="1200"/>
+              </a:spcAft>
+              <a:defRPr sz="1900" b="1">
+                <a:solidFill>
+                  <a:srgbClr val="1E3A4C"/>
+                </a:solidFill>
+                <a:latin typeface="Segoe UI"/>
+              </a:defRPr>
+            </a:pPr>
+            <a:r>
+              <a:t>Validaciones y Búsquedas (utilidades.py)</a:t>
+            </a:r>
+          </a:p>
+          <a:p>
+            <a:pPr>
+              <a:spcAft>
+                <a:spcPts val="800"/>
+              </a:spcAft>
+              <a:defRPr sz="1400" b="0">
+                <a:solidFill>
+                  <a:srgbClr val="283038"/>
+                </a:solidFill>
+                <a:latin typeface="Segoe UI"/>
+              </a:defRPr>
+            </a:pPr>
+            <a:r>
+              <a:t>• Prevención de Fallos: Funciones 'leer_entero()' y 'leer_float()' blindadas con bloques try-except.</a:t>
+            </a:r>
+          </a:p>
+          <a:p>
+            <a:pPr>
+              <a:spcAft>
+                <a:spcPts val="800"/>
+              </a:spcAft>
+              <a:defRPr sz="1400" b="0">
+                <a:solidFill>
+                  <a:srgbClr val="283038"/>
+                </a:solidFill>
+                <a:latin typeface="Segoe UI"/>
+              </a:defRPr>
+            </a:pPr>
+            <a:r>
+              <a:t>• Estabilidad Total: El programa nunca colapsa ante errores de tipeo o entradas inválidas del usuario en consola.</a:t>
+            </a:r>
+          </a:p>
+          <a:p>
+            <a:pPr>
+              <a:spcAft>
+                <a:spcPts val="800"/>
+              </a:spcAft>
+              <a:defRPr sz="1400" b="0">
+                <a:solidFill>
+                  <a:srgbClr val="283038"/>
+                </a:solidFill>
+                <a:latin typeface="Segoe UI"/>
+              </a:defRPr>
+            </a:pPr>
+            <a:r>
+              <a:t>• Búsqueda Ultrarrápida: Algoritmos de filtrado por nombre exacto o coincidencia parcial en listas en RAM.</a:t>
+            </a:r>
+          </a:p>
+          <a:p>
+            <a:pPr>
+              <a:spcAft>
+                <a:spcPts val="800"/>
+              </a:spcAft>
+              <a:defRPr sz="1400">
+                <a:solidFill>
+                  <a:srgbClr val="283038"/>
+                </a:solidFill>
+                <a:latin typeface="Segoe UI"/>
+              </a:defRPr>
+            </a:pPr>
+          </a:p>
+        </p:txBody>
+      </p:sp>
+    </p:spTree>
+  </p:cSld>
+  <p:clrMapOvr>
+    <a:masterClrMapping/>
+  </p:clrMapOvr>
+</p:sld>
+</file>
+
+<file path=ppt/slides/slide8.xml><?xml version="1.0" encoding="utf-8"?>
+<p:sld xmlns:a="http://schemas.openxmlformats.org/drawingml/2006/main" xmlns:r="http://schemas.openxmlformats.org/officeDocument/2006/relationships" xmlns:p="http://schemas.openxmlformats.org/presentationml/2006/main">
+  <p:cSld>
+    <p:spTree>
+      <p:nvGrpSpPr>
+        <p:cNvPr id="1" name=""/>
+        <p:cNvGrpSpPr/>
+        <p:nvPr/>
+      </p:nvGrpSpPr>
+      <p:grpSpPr>
+        <a:xfrm>
+          <a:off x="0" y="0"/>
+          <a:ext cx="0" cy="0"/>
+          <a:chOff x="0" y="0"/>
+          <a:chExt cx="0" cy="0"/>
+        </a:xfrm>
+      </p:grpSpPr>
+      <p:sp>
+        <p:nvSpPr>
+          <p:cNvPr id="2" name="Rectangle 1"/>
+          <p:cNvSpPr/>
+          <p:nvPr/>
+        </p:nvSpPr>
+        <p:spPr>
+          <a:xfrm>
+            <a:off x="14990" y="0"/>
+            <a:ext cx="12191695" cy="6858000"/>
+          </a:xfrm>
+          <a:prstGeom prst="rect">
+            <a:avLst/>
+          </a:prstGeom>
+          <a:solidFill>
+            <a:srgbClr val="FAFBFC"/>
+          </a:solidFill>
+          <a:ln>
+            <a:noFill/>
+          </a:ln>
+        </p:spPr>
+        <p:style>
+          <a:lnRef idx="1">
+            <a:schemeClr val="accent1"/>
+          </a:lnRef>
+          <a:fillRef idx="3">
+            <a:schemeClr val="accent1"/>
+          </a:fillRef>
+          <a:effectRef idx="2">
+            <a:schemeClr val="accent1"/>
+          </a:effectRef>
+          <a:fontRef idx="minor">
+            <a:schemeClr val="lt1"/>
+          </a:fontRef>
+        </p:style>
+        <p:txBody>
+          <a:bodyPr rtlCol="0" anchor="ctr"/>
+          <a:lstStyle/>
+          <a:p>
+            <a:pPr algn="ctr"/>
+            <a:endParaRPr lang="es-EC" noProof="0" dirty="0"/>
+          </a:p>
+        </p:txBody>
+      </p:sp>
+      <p:sp>
+        <p:nvSpPr>
+          <p:cNvPr id="3" name="TextBox 2"/>
+          <p:cNvSpPr txBox="1"/>
+          <p:nvPr/>
+        </p:nvSpPr>
+        <p:spPr>
+          <a:xfrm>
+            <a:off x="731520" y="320040"/>
+            <a:ext cx="10698480" cy="1005840"/>
+          </a:xfrm>
+          <a:prstGeom prst="rect">
+            <a:avLst/>
+          </a:prstGeom>
+          <a:noFill/>
+        </p:spPr>
+        <p:txBody>
+          <a:bodyPr wrap="square">
+            <a:spAutoFit/>
+          </a:bodyPr>
+          <a:lstStyle/>
+          <a:p>
+            <a:pPr>
+              <a:defRPr sz="2800" b="1">
+                <a:solidFill>
+                  <a:srgbClr val="1E3A4C"/>
+                </a:solidFill>
+                <a:latin typeface="Segoe UI"/>
+              </a:defRPr>
+            </a:pPr>
+            <a:r>
+              <a:t>[3. LA SUPERFICIE] Interfaz Interactiva de Consola</a:t>
+            </a:r>
+          </a:p>
+          <a:p>
+            <a:pPr>
+              <a:spcBef>
+                <a:spcPts val="400"/>
+              </a:spcBef>
+              <a:defRPr sz="1500">
+                <a:solidFill>
+                  <a:srgbClr val="6E7882"/>
+                </a:solidFill>
+                <a:latin typeface="Segoe UI"/>
+              </a:defRPr>
+            </a:pPr>
+            <a:r>
+              <a:t>Experiencia de usuario fluida, menús modulares ('menus.py') y control en 'main.py'</a:t>
+            </a:r>
+          </a:p>
+        </p:txBody>
+      </p:sp>
+      <p:sp>
+        <p:nvSpPr>
+          <p:cNvPr id="4" name="Rectangle 3"/>
+          <p:cNvSpPr/>
+          <p:nvPr/>
+        </p:nvSpPr>
+        <p:spPr>
+          <a:xfrm>
+            <a:off x="731520" y="1325880"/>
+            <a:ext cx="1371600" cy="54864"/>
+          </a:xfrm>
+          <a:prstGeom prst="rect">
+            <a:avLst/>
+          </a:prstGeom>
+          <a:solidFill>
+            <a:srgbClr val="48A9A6"/>
+          </a:solidFill>
+          <a:ln>
+            <a:noFill/>
+          </a:ln>
+        </p:spPr>
+        <p:style>
+          <a:lnRef idx="1">
+            <a:schemeClr val="accent1"/>
+          </a:lnRef>
+          <a:fillRef idx="3">
+            <a:schemeClr val="accent1"/>
+          </a:fillRef>
+          <a:effectRef idx="2">
+            <a:schemeClr val="accent1"/>
+          </a:effectRef>
+          <a:fontRef idx="minor">
+            <a:schemeClr val="lt1"/>
+          </a:fontRef>
+        </p:style>
+        <p:txBody>
+          <a:bodyPr rtlCol="0" anchor="ctr"/>
+          <a:lstStyle/>
+          <a:p>
+            <a:pPr algn="ctr"/>
+            <a:endParaRPr lang="es-EC" noProof="0" dirty="0"/>
+          </a:p>
+        </p:txBody>
+      </p:sp>
+      <p:sp>
+        <p:nvSpPr>
+          <p:cNvPr id="5" name="Rounded Rectangle 4"/>
+          <p:cNvSpPr/>
+          <p:nvPr/>
+        </p:nvSpPr>
+        <p:spPr>
+          <a:xfrm>
+            <a:off x="731520" y="1645920"/>
+            <a:ext cx="5120640" cy="4572000"/>
+          </a:xfrm>
+          <a:prstGeom prst="roundRect">
+            <a:avLst/>
+          </a:prstGeom>
+          <a:solidFill>
+            <a:srgbClr val="FFFFFF"/>
+          </a:solidFill>
+          <a:ln w="19050">
+            <a:solidFill>
+              <a:srgbClr val="DCE4EB"/>
+            </a:solidFill>
+          </a:ln>
+        </p:spPr>
+        <p:style>
+          <a:lnRef idx="1">
+            <a:schemeClr val="accent1"/>
+          </a:lnRef>
+          <a:fillRef idx="3">
+            <a:schemeClr val="accent1"/>
+          </a:fillRef>
+          <a:effectRef idx="2">
+            <a:schemeClr val="accent1"/>
+          </a:effectRef>
+          <a:fontRef idx="minor">
+            <a:schemeClr val="lt1"/>
+          </a:fontRef>
+        </p:style>
+        <p:txBody>
+          <a:bodyPr rtlCol="0" anchor="ctr"/>
+          <a:lstStyle/>
+          <a:p>
+            <a:pPr algn="ctr"/>
+            <a:endParaRPr lang="es-EC" noProof="0" dirty="0"/>
+          </a:p>
+        </p:txBody>
+      </p:sp>
+      <p:sp>
+        <p:nvSpPr>
+          <p:cNvPr id="6" name="TextBox 5"/>
+          <p:cNvSpPr txBox="1"/>
+          <p:nvPr/>
+        </p:nvSpPr>
+        <p:spPr>
+          <a:xfrm>
+            <a:off x="960120" y="1828800"/>
+            <a:ext cx="4663440" cy="4206240"/>
+          </a:xfrm>
+          <a:prstGeom prst="rect">
+            <a:avLst/>
+          </a:prstGeom>
+          <a:noFill/>
+        </p:spPr>
+        <p:txBody>
+          <a:bodyPr wrap="square">
+            <a:spAutoFit/>
+          </a:bodyPr>
+          <a:lstStyle/>
+          <a:p>
+            <a:pPr>
+              <a:spcAft>
+                <a:spcPts val="1200"/>
+              </a:spcAft>
+              <a:defRPr sz="1900" b="1">
+                <a:solidFill>
+                  <a:srgbClr val="1E3A4C"/>
+                </a:solidFill>
+                <a:latin typeface="Segoe UI"/>
+              </a:defRPr>
+            </a:pPr>
+            <a:r>
+              <a:t>Navegación e Interacción en Python</a:t>
+            </a:r>
+          </a:p>
+          <a:p>
+            <a:pPr>
+              <a:spcAft>
+                <a:spcPts val="800"/>
+              </a:spcAft>
+              <a:defRPr sz="1400" b="0">
+                <a:solidFill>
+                  <a:srgbClr val="283038"/>
+                </a:solidFill>
+                <a:latin typeface="Segoe UI"/>
+              </a:defRPr>
+            </a:pPr>
+            <a:r>
+              <a:t>• Menú Principal: Opciones numeradas del 1 al 8 en 'menus.py' para un acceso directo y rápido.</a:t>
+            </a:r>
+          </a:p>
+          <a:p>
+            <a:pPr>
+              <a:spcAft>
+                <a:spcPts val="800"/>
+              </a:spcAft>
+              <a:defRPr sz="1400" b="0">
+                <a:solidFill>
+                  <a:srgbClr val="283038"/>
+                </a:solidFill>
+                <a:latin typeface="Segoe UI"/>
+              </a:defRPr>
+            </a:pPr>
+            <a:r>
+              <a:t>• Limpieza de Pantalla: Uso de 'os.system("cls")' para mantener una interfaz limpia y profesional.</a:t>
+            </a:r>
+          </a:p>
+          <a:p>
+            <a:pPr>
+              <a:spcAft>
+                <a:spcPts val="800"/>
+              </a:spcAft>
+              <a:defRPr sz="1400" b="0">
+                <a:solidFill>
+                  <a:srgbClr val="283038"/>
+                </a:solidFill>
+                <a:latin typeface="Segoe UI"/>
+              </a:defRPr>
+            </a:pPr>
+            <a:r>
+              <a:t>• Flujo Continuo: El usuario puede realizar múltiples operaciones operativas sin salir de la sesión.</a:t>
+            </a:r>
+          </a:p>
+          <a:p>
+            <a:pPr>
+              <a:spcAft>
+                <a:spcPts val="800"/>
+              </a:spcAft>
+              <a:defRPr sz="1400" b="0">
+                <a:solidFill>
+                  <a:srgbClr val="283038"/>
+                </a:solidFill>
+                <a:latin typeface="Segoe UI"/>
+              </a:defRPr>
+            </a:pPr>
+            <a:r>
+              <a:t>• Demostración en Vivo: Ejecución real mostrando cómo se actualizan los datos en pantalla y disco.</a:t>
             </a:r>
           </a:p>
         </p:txBody>
@@ -5692,7 +7795,7 @@
           <a:lstStyle/>
           <a:p>
             <a:pPr algn="ctr"/>
-            <a:endParaRPr/>
+            <a:endParaRPr lang="es-EC" noProof="0" dirty="0"/>
           </a:p>
         </p:txBody>
       </p:sp>
@@ -5736,7 +7839,7 @@
           <a:lstStyle/>
           <a:p>
             <a:pPr algn="ctr"/>
-            <a:endParaRPr/>
+            <a:endParaRPr lang="es-EC" noProof="0" dirty="0"/>
           </a:p>
         </p:txBody>
       </p:sp>
@@ -5780,7 +7883,7 @@
           <a:lstStyle/>
           <a:p>
             <a:pPr algn="ctr"/>
-            <a:endParaRPr/>
+            <a:endParaRPr lang="es-EC" noProof="0" dirty="0"/>
           </a:p>
         </p:txBody>
       </p:sp>
@@ -5824,7 +7927,7 @@
           <a:lstStyle/>
           <a:p>
             <a:pPr algn="ctr"/>
-            <a:endParaRPr/>
+            <a:endParaRPr lang="es-EC" noProof="0" dirty="0"/>
           </a:p>
         </p:txBody>
       </p:sp>
@@ -5868,7 +7971,7 @@
           <a:lstStyle/>
           <a:p>
             <a:pPr algn="ctr"/>
-            <a:endParaRPr/>
+            <a:endParaRPr lang="es-EC" noProof="0" dirty="0"/>
           </a:p>
         </p:txBody>
       </p:sp>
@@ -5903,6 +8006,7 @@
               </a:defRPr>
             </a:pPr>
             <a:r>
+              <a:rPr lang="es-EC" noProof="0" dirty="0"/>
               <a:t>Consola - PyPharma Manager</a:t>
             </a:r>
           </a:p>
@@ -5942,7 +8046,7 @@
               </a:defRPr>
             </a:pPr>
             <a:r>
-              <a:rPr sz="1600" dirty="0"/>
+              <a:rPr lang="es-EC" sz="1600" noProof="0" dirty="0"/>
               <a:t>===== SISTEMA DE FARMACIA - GRUPO 7 =====</a:t>
             </a:r>
           </a:p>
@@ -5959,14 +8063,9 @@
               </a:defRPr>
             </a:pPr>
             <a:r>
-              <a:rPr sz="1600" dirty="0"/>
-              <a:t>1. Registrar </a:t>
-            </a:r>
-            <a:r>
-              <a:rPr sz="1600" dirty="0" err="1"/>
-              <a:t>medicamento</a:t>
-            </a:r>
-            <a:endParaRPr sz="1600" dirty="0"/>
+              <a:rPr lang="es-EC" sz="1600" noProof="0" dirty="0"/>
+              <a:t>1. Registrar medicamento</a:t>
+            </a:r>
           </a:p>
           <a:p>
             <a:pPr>
@@ -5981,22 +8080,9 @@
               </a:defRPr>
             </a:pPr>
             <a:r>
-              <a:rPr sz="1600" dirty="0"/>
-              <a:t>2. </a:t>
-            </a:r>
-            <a:r>
-              <a:rPr sz="1600" dirty="0" err="1"/>
-              <a:t>Actualizar</a:t>
-            </a:r>
-            <a:r>
-              <a:rPr sz="1600" dirty="0"/>
-              <a:t> </a:t>
-            </a:r>
-            <a:r>
-              <a:rPr sz="1600" dirty="0" err="1"/>
-              <a:t>medicamento</a:t>
-            </a:r>
-            <a:endParaRPr sz="1600" dirty="0"/>
+              <a:rPr lang="es-EC" sz="1600" noProof="0" dirty="0"/>
+              <a:t>2. Actualizar medicamento</a:t>
+            </a:r>
           </a:p>
           <a:p>
             <a:pPr>
@@ -6011,22 +8097,9 @@
               </a:defRPr>
             </a:pPr>
             <a:r>
-              <a:rPr sz="1600" dirty="0"/>
-              <a:t>3. </a:t>
-            </a:r>
-            <a:r>
-              <a:rPr sz="1600" dirty="0" err="1"/>
-              <a:t>Buscar</a:t>
-            </a:r>
-            <a:r>
-              <a:rPr sz="1600" dirty="0"/>
-              <a:t> </a:t>
-            </a:r>
-            <a:r>
-              <a:rPr sz="1600" dirty="0" err="1"/>
-              <a:t>medicamento</a:t>
-            </a:r>
-            <a:endParaRPr sz="1600" dirty="0"/>
+              <a:rPr lang="es-EC" sz="1600" noProof="0" dirty="0"/>
+              <a:t>3. Buscar medicamento</a:t>
+            </a:r>
           </a:p>
           <a:p>
             <a:pPr>
@@ -6041,22 +8114,9 @@
               </a:defRPr>
             </a:pPr>
             <a:r>
-              <a:rPr sz="1600" dirty="0"/>
-              <a:t>4. </a:t>
-            </a:r>
-            <a:r>
-              <a:rPr sz="1600" dirty="0" err="1"/>
-              <a:t>Consultar</a:t>
-            </a:r>
-            <a:r>
-              <a:rPr sz="1600" dirty="0"/>
-              <a:t> </a:t>
-            </a:r>
-            <a:r>
-              <a:rPr sz="1600" dirty="0" err="1"/>
-              <a:t>inventario</a:t>
-            </a:r>
-            <a:endParaRPr sz="1600" dirty="0"/>
+              <a:rPr lang="es-EC" sz="1600" noProof="0" dirty="0"/>
+              <a:t>4. Consultar inventario</a:t>
+            </a:r>
           </a:p>
           <a:p>
             <a:pPr>
@@ -6071,22 +8131,9 @@
               </a:defRPr>
             </a:pPr>
             <a:r>
-              <a:rPr sz="1600" dirty="0"/>
-              <a:t>5. </a:t>
-            </a:r>
-            <a:r>
-              <a:rPr sz="1600" dirty="0" err="1"/>
-              <a:t>Eliminar</a:t>
-            </a:r>
-            <a:r>
-              <a:rPr sz="1600" dirty="0"/>
-              <a:t> </a:t>
-            </a:r>
-            <a:r>
-              <a:rPr sz="1600" dirty="0" err="1"/>
-              <a:t>medicamento</a:t>
-            </a:r>
-            <a:endParaRPr sz="1600" dirty="0"/>
+              <a:rPr lang="es-EC" sz="1600" noProof="0" dirty="0"/>
+              <a:t>5. Eliminar medicamento</a:t>
+            </a:r>
           </a:p>
           <a:p>
             <a:pPr>
@@ -6101,24 +8148,8 @@
               </a:defRPr>
             </a:pPr>
             <a:r>
-              <a:rPr sz="1600" dirty="0"/>
-              <a:t>6. Crear </a:t>
-            </a:r>
-            <a:r>
-              <a:rPr sz="1600" dirty="0" err="1"/>
-              <a:t>pedido</a:t>
-            </a:r>
-            <a:r>
-              <a:rPr sz="1600" dirty="0"/>
-              <a:t> (</a:t>
-            </a:r>
-            <a:r>
-              <a:rPr sz="1600" dirty="0" err="1"/>
-              <a:t>venta</a:t>
-            </a:r>
-            <a:r>
-              <a:rPr sz="1600" dirty="0"/>
-              <a:t>)</a:t>
+              <a:rPr lang="es-EC" sz="1600" noProof="0" dirty="0"/>
+              <a:t>6. Crear pedido (venta)</a:t>
             </a:r>
           </a:p>
           <a:p>
@@ -6134,22 +8165,9 @@
               </a:defRPr>
             </a:pPr>
             <a:r>
-              <a:rPr sz="1600" dirty="0"/>
-              <a:t>7. </a:t>
-            </a:r>
-            <a:r>
-              <a:rPr sz="1600" dirty="0" err="1"/>
-              <a:t>Consultar</a:t>
-            </a:r>
-            <a:r>
-              <a:rPr sz="1600" dirty="0"/>
-              <a:t> </a:t>
-            </a:r>
-            <a:r>
-              <a:rPr sz="1600" dirty="0" err="1"/>
-              <a:t>pedidos</a:t>
-            </a:r>
-            <a:endParaRPr sz="1600" dirty="0"/>
+              <a:rPr lang="es-EC" sz="1600" noProof="0" dirty="0"/>
+              <a:t>7. Consultar pedidos</a:t>
+            </a:r>
           </a:p>
           <a:p>
             <a:pPr>
@@ -6164,14 +8182,9 @@
               </a:defRPr>
             </a:pPr>
             <a:r>
-              <a:rPr sz="1600" dirty="0"/>
-              <a:t>8. </a:t>
-            </a:r>
-            <a:r>
-              <a:rPr sz="1600" dirty="0" err="1"/>
-              <a:t>Salir</a:t>
-            </a:r>
-            <a:endParaRPr sz="1600" dirty="0"/>
+              <a:rPr lang="es-EC" sz="1600" noProof="0" dirty="0"/>
+              <a:t>8. Salir</a:t>
+            </a:r>
           </a:p>
           <a:p>
             <a:pPr>
@@ -6186,28 +8199,8 @@
               </a:defRPr>
             </a:pPr>
             <a:r>
-              <a:rPr sz="1600" dirty="0" err="1"/>
-              <a:t>Seleccione</a:t>
-            </a:r>
-            <a:r>
-              <a:rPr sz="1600" dirty="0"/>
-              <a:t> </a:t>
-            </a:r>
-            <a:r>
-              <a:rPr sz="1600" dirty="0" err="1"/>
-              <a:t>una</a:t>
-            </a:r>
-            <a:r>
-              <a:rPr sz="1600" dirty="0"/>
-              <a:t> </a:t>
-            </a:r>
-            <a:r>
-              <a:rPr sz="1600" dirty="0" err="1"/>
-              <a:t>opción</a:t>
-            </a:r>
-            <a:r>
-              <a:rPr sz="1600" dirty="0"/>
-              <a:t>:</a:t>
+              <a:rPr lang="es-EC" sz="1600" noProof="0" dirty="0"/>
+              <a:t>Seleccione una opción:</a:t>
             </a:r>
           </a:p>
         </p:txBody>
@@ -6220,7 +8213,7 @@
 </p:sld>
 </file>
 
-<file path=ppt/slides/slide5.xml><?xml version="1.0" encoding="utf-8"?>
+<file path=ppt/slides/slide9.xml><?xml version="1.0" encoding="utf-8"?>
 <p:sld xmlns:a="http://schemas.openxmlformats.org/drawingml/2006/main" xmlns:r="http://schemas.openxmlformats.org/officeDocument/2006/relationships" xmlns:p="http://schemas.openxmlformats.org/presentationml/2006/main">
   <p:cSld>
     <p:spTree>
@@ -6277,7 +8270,7 @@
           <a:lstStyle/>
           <a:p>
             <a:pPr algn="ctr"/>
-            <a:endParaRPr/>
+            <a:endParaRPr lang="es-EC" noProof="0" dirty="0"/>
           </a:p>
         </p:txBody>
       </p:sp>
@@ -6312,7 +8305,8 @@
               </a:defRPr>
             </a:pPr>
             <a:r>
-              <a:t>Gestión de Inventario y Pedidos</a:t>
+              <a:rPr lang="es-EC" noProof="0" dirty="0"/>
+              <a:t>Conclusiones del Proyecto</a:t>
             </a:r>
           </a:p>
           <a:p>
@@ -6328,7 +8322,8 @@
               </a:defRPr>
             </a:pPr>
             <a:r>
-              <a:t>Funcionalidades centrales para el control farmacéutico</a:t>
+              <a:rPr lang="es-EC" noProof="0" dirty="0"/>
+              <a:t>Logros académicos y síntesis técnica de PyPharma Manager</a:t>
             </a:r>
           </a:p>
         </p:txBody>
@@ -6373,7 +8368,7 @@
           <a:lstStyle/>
           <a:p>
             <a:pPr algn="ctr"/>
-            <a:endParaRPr/>
+            <a:endParaRPr lang="es-EC" noProof="0" dirty="0"/>
           </a:p>
         </p:txBody>
       </p:sp>
@@ -6419,7 +8414,7 @@
           <a:lstStyle/>
           <a:p>
             <a:pPr algn="ctr"/>
-            <a:endParaRPr/>
+            <a:endParaRPr lang="es-EC" noProof="0" dirty="0"/>
           </a:p>
         </p:txBody>
       </p:sp>
@@ -6457,7 +8452,8 @@
               </a:defRPr>
             </a:pPr>
             <a:r>
-              <a:t>Control de Inventario</a:t>
+              <a:rPr lang="es-EC" noProof="0" dirty="0"/>
+              <a:t>Logros Académicos</a:t>
             </a:r>
           </a:p>
           <a:p>
@@ -6473,15 +8469,16 @@
               </a:defRPr>
             </a:pPr>
             <a:r>
-              <a:rPr b="1">
+              <a:rPr lang="es-EC" b="1" noProof="0" dirty="0">
                 <a:solidFill>
                   <a:srgbClr val="48A9A6"/>
                 </a:solidFill>
               </a:rPr>
-              <a:t>• Alta de Fármacos: </a:t>
-            </a:r>
-            <a:r>
-              <a:t>Registro con verificación automática de nombres duplicados.</a:t>
+              <a:t>• Estructura de Datos: </a:t>
+            </a:r>
+            <a:r>
+              <a:rPr lang="es-EC" noProof="0" dirty="0"/>
+              <a:t>Aplicación práctica y eficiente de listas, diccionarios y objetos.</a:t>
             </a:r>
           </a:p>
           <a:p>
@@ -6497,15 +8494,16 @@
               </a:defRPr>
             </a:pPr>
             <a:r>
-              <a:rPr b="1">
+              <a:rPr lang="es-EC" b="1" noProof="0" dirty="0">
                 <a:solidFill>
                   <a:srgbClr val="48A9A6"/>
                 </a:solidFill>
               </a:rPr>
-              <a:t>• Consulta y Búsqueda: </a:t>
-            </a:r>
-            <a:r>
-              <a:t>Catálogo formateado y búsqueda por coincidencia parcial de texto.</a:t>
+              <a:t>• Ingeniería en Software: </a:t>
+            </a:r>
+            <a:r>
+              <a:rPr lang="es-EC" noProof="0" dirty="0"/>
+              <a:t>Desarrollo aplicando modularidad y buenas prácticas de codificación.</a:t>
             </a:r>
           </a:p>
           <a:p>
@@ -6521,15 +8519,16 @@
               </a:defRPr>
             </a:pPr>
             <a:r>
-              <a:rPr b="1">
+              <a:rPr lang="es-EC" b="1" noProof="0" dirty="0">
                 <a:solidFill>
                   <a:srgbClr val="48A9A6"/>
                 </a:solidFill>
               </a:rPr>
-              <a:t>• Mantenimiento: </a:t>
-            </a:r>
-            <a:r>
-              <a:t>Edición ágil de precios y reabastecimiento manual de stock.</a:t>
+              <a:t>• Robustez del Sistema: </a:t>
+            </a:r>
+            <a:r>
+              <a:rPr lang="es-EC" noProof="0" dirty="0"/>
+              <a:t>Prevención total de fallos de ejecución ante entradas del usuario.</a:t>
             </a:r>
           </a:p>
           <a:p>
@@ -6545,15 +8544,16 @@
               </a:defRPr>
             </a:pPr>
             <a:r>
-              <a:rPr b="1">
+              <a:rPr lang="es-EC" b="1" noProof="0" dirty="0">
                 <a:solidFill>
                   <a:srgbClr val="48A9A6"/>
                 </a:solidFill>
               </a:rPr>
-              <a:t>• Descuentos: </a:t>
-            </a:r>
-            <a:r>
-              <a:t>Aplicación de rebajas porcentuales (0-100%) con cálculo instantáneo.</a:t>
+              <a:t>• Trabajo en Equipo: </a:t>
+            </a:r>
+            <a:r>
+              <a:rPr lang="es-EC" noProof="0" dirty="0"/>
+              <a:t>Colaboración exitosa y articulación del Grupo 7.</a:t>
             </a:r>
           </a:p>
         </p:txBody>
@@ -6600,7 +8600,7 @@
           <a:lstStyle/>
           <a:p>
             <a:pPr algn="ctr"/>
-            <a:endParaRPr/>
+            <a:endParaRPr lang="es-EC" noProof="0" dirty="0"/>
           </a:p>
         </p:txBody>
       </p:sp>
@@ -6613,7 +8613,7 @@
         <p:spPr>
           <a:xfrm>
             <a:off x="6537960" y="1828800"/>
-            <a:ext cx="4663440" cy="4206240"/>
+            <a:ext cx="4663440" cy="3862596"/>
           </a:xfrm>
           <a:prstGeom prst="rect">
             <a:avLst/>
@@ -6638,7 +8638,8 @@
               </a:defRPr>
             </a:pPr>
             <a:r>
-              <a:t>Procesamiento de Pedidos</a:t>
+              <a:rPr lang="es-EC" noProof="0" dirty="0"/>
+              <a:t>PyPharma Manager - Grupo 7</a:t>
             </a:r>
           </a:p>
           <a:p>
@@ -6654,15 +8655,16 @@
               </a:defRPr>
             </a:pPr>
             <a:r>
-              <a:rPr b="1">
+              <a:rPr lang="es-EC" b="1" noProof="0" dirty="0">
                 <a:solidFill>
                   <a:srgbClr val="48A9A6"/>
                 </a:solidFill>
               </a:rPr>
-              <a:t>• Registro de Cliente: </a:t>
-            </a:r>
-            <a:r>
-              <a:t>Asociación de la transacción al nombre del comprador.</a:t>
+              <a:t>• Steven Montalván: </a:t>
+            </a:r>
+            <a:r>
+              <a:rPr lang="es-EC" noProof="0" dirty="0"/>
+              <a:t>Desarrollo de Modelos y Lógica de Pedidos.</a:t>
             </a:r>
           </a:p>
           <a:p>
@@ -6678,15 +8680,16 @@
               </a:defRPr>
             </a:pPr>
             <a:r>
-              <a:rPr b="1">
+              <a:rPr lang="es-EC" b="1" noProof="0" dirty="0">
                 <a:solidFill>
                   <a:srgbClr val="48A9A6"/>
                 </a:solidFill>
               </a:rPr>
-              <a:t>• Carrito de Compras: </a:t>
-            </a:r>
-            <a:r>
-              <a:t>Capacidad de agregar múltiples fármacos en una misma orden.</a:t>
+              <a:t>• Jonathan Bravo: </a:t>
+            </a:r>
+            <a:r>
+              <a:rPr lang="es-EC" noProof="0" dirty="0"/>
+              <a:t>Módulo de Persistencia y Gestión de Archivos.</a:t>
             </a:r>
           </a:p>
           <a:p>
@@ -6702,15 +8705,16 @@
               </a:defRPr>
             </a:pPr>
             <a:r>
-              <a:rPr b="1">
+              <a:rPr lang="es-EC" b="1" noProof="0" dirty="0">
                 <a:solidFill>
                   <a:srgbClr val="48A9A6"/>
                 </a:solidFill>
               </a:rPr>
-              <a:t>• Control de Stock: </a:t>
-            </a:r>
-            <a:r>
-              <a:t>Verificación en tiempo real para evitar vender sin existencias.</a:t>
+              <a:t>• Sebastián Nevárez: </a:t>
+            </a:r>
+            <a:r>
+              <a:rPr lang="es-EC" noProof="0" dirty="0"/>
+              <a:t>Interfaz por Consola y Punto de Entrada.</a:t>
             </a:r>
           </a:p>
           <a:p>
@@ -6726,1969 +8730,136 @@
               </a:defRPr>
             </a:pPr>
             <a:r>
-              <a:rPr b="1">
+              <a:rPr lang="es-EC" b="1" noProof="0" dirty="0">
                 <a:solidFill>
                   <a:srgbClr val="48A9A6"/>
                 </a:solidFill>
               </a:rPr>
-              <a:t>• Resumen y Recibo: </a:t>
-            </a:r>
-            <a:r>
-              <a:t>Impresión detallada de subtotales, total a pagar e historial.</a:t>
-            </a:r>
-          </a:p>
-        </p:txBody>
-      </p:sp>
-    </p:spTree>
-  </p:cSld>
-  <p:clrMapOvr>
-    <a:masterClrMapping/>
-  </p:clrMapOvr>
-</p:sld>
-</file>
-
-<file path=ppt/slides/slide6.xml><?xml version="1.0" encoding="utf-8"?>
-<p:sld xmlns:a="http://schemas.openxmlformats.org/drawingml/2006/main" xmlns:r="http://schemas.openxmlformats.org/officeDocument/2006/relationships" xmlns:p="http://schemas.openxmlformats.org/presentationml/2006/main">
-  <p:cSld>
-    <p:spTree>
-      <p:nvGrpSpPr>
-        <p:cNvPr id="1" name=""/>
-        <p:cNvGrpSpPr/>
-        <p:nvPr/>
-      </p:nvGrpSpPr>
-      <p:grpSpPr>
-        <a:xfrm>
-          <a:off x="0" y="0"/>
-          <a:ext cx="0" cy="0"/>
-          <a:chOff x="0" y="0"/>
-          <a:chExt cx="0" cy="0"/>
-        </a:xfrm>
-      </p:grpSpPr>
-      <p:sp>
-        <p:nvSpPr>
-          <p:cNvPr id="2" name="Rectangle 1"/>
-          <p:cNvSpPr/>
+              <a:t>• Elías Balladares: </a:t>
+            </a:r>
+            <a:r>
+              <a:rPr lang="es-EC" noProof="0" dirty="0"/>
+              <a:t>Validaciones, Búsquedas y Pruebas Integrales.</a:t>
+            </a:r>
+          </a:p>
+          <a:p>
+            <a:pPr>
+              <a:spcAft>
+                <a:spcPts val="800"/>
+              </a:spcAft>
+              <a:defRPr sz="1400">
+                <a:solidFill>
+                  <a:srgbClr val="283038"/>
+                </a:solidFill>
+                <a:latin typeface="Segoe UI"/>
+              </a:defRPr>
+            </a:pPr>
+            <a:endParaRPr lang="es-EC" noProof="0" dirty="0"/>
+          </a:p>
+          <a:p>
+            <a:pPr>
+              <a:spcAft>
+                <a:spcPts val="800"/>
+              </a:spcAft>
+              <a:defRPr sz="1400">
+                <a:solidFill>
+                  <a:srgbClr val="283038"/>
+                </a:solidFill>
+                <a:latin typeface="Segoe UI"/>
+              </a:defRPr>
+            </a:pPr>
+            <a:endParaRPr lang="es-EC" noProof="0" dirty="0"/>
+          </a:p>
+          <a:p>
+            <a:pPr algn="ctr">
+              <a:spcAft>
+                <a:spcPts val="800"/>
+              </a:spcAft>
+              <a:defRPr sz="1400">
+                <a:solidFill>
+                  <a:srgbClr val="283038"/>
+                </a:solidFill>
+                <a:latin typeface="Segoe UI"/>
+              </a:defRPr>
+            </a:pPr>
+            <a:r>
+              <a:rPr lang="es-EC" sz="3600" b="1" noProof="0" dirty="0">
+                <a:solidFill>
+                  <a:srgbClr val="48A9A6"/>
+                </a:solidFill>
+              </a:rPr>
+              <a:t>¡Muchas Gracias!</a:t>
+            </a:r>
+            <a:endParaRPr lang="es-EC" sz="3600" noProof="0" dirty="0"/>
+          </a:p>
+        </p:txBody>
+      </p:sp>
+      <p:pic>
+        <p:nvPicPr>
+          <p:cNvPr id="9" name="Picture 8" descr="Google Meet: Videoconferencia | UC3M">
+            <a:extLst>
+              <a:ext uri="{FF2B5EF4-FFF2-40B4-BE49-F238E27FC236}">
+                <a16:creationId xmlns:a16="http://schemas.microsoft.com/office/drawing/2014/main" id="{4625E3B5-CDC5-773A-8BB4-CB282613C31D}"/>
+              </a:ext>
+            </a:extLst>
+          </p:cNvPr>
+          <p:cNvPicPr>
+            <a:picLocks noChangeAspect="1"/>
+          </p:cNvPicPr>
           <p:nvPr/>
-        </p:nvSpPr>
-        <p:spPr>
-          <a:xfrm>
-            <a:off x="12700" y="0"/>
-            <a:ext cx="12191695" cy="6858000"/>
+        </p:nvPicPr>
+        <p:blipFill>
+          <a:blip r:embed="rId2"/>
+          <a:stretch>
+            <a:fillRect/>
+          </a:stretch>
+        </p:blipFill>
+        <p:spPr>
+          <a:xfrm>
+            <a:off x="1933306" y="4688052"/>
+            <a:ext cx="1230810" cy="1233272"/>
           </a:xfrm>
           <a:prstGeom prst="rect">
             <a:avLst/>
           </a:prstGeom>
-          <a:solidFill>
-            <a:srgbClr val="FAFBFC"/>
-          </a:solidFill>
-          <a:ln>
-            <a:noFill/>
-          </a:ln>
-        </p:spPr>
-        <p:style>
-          <a:lnRef idx="1">
-            <a:schemeClr val="accent1"/>
-          </a:lnRef>
-          <a:fillRef idx="3">
-            <a:schemeClr val="accent1"/>
-          </a:fillRef>
-          <a:effectRef idx="2">
-            <a:schemeClr val="accent1"/>
-          </a:effectRef>
-          <a:fontRef idx="minor">
-            <a:schemeClr val="lt1"/>
-          </a:fontRef>
-        </p:style>
-        <p:txBody>
-          <a:bodyPr rtlCol="0" anchor="ctr"/>
-          <a:lstStyle/>
-          <a:p>
-            <a:pPr algn="ctr"/>
-            <a:endParaRPr/>
-          </a:p>
-        </p:txBody>
-      </p:sp>
-      <p:sp>
-        <p:nvSpPr>
-          <p:cNvPr id="3" name="TextBox 2"/>
-          <p:cNvSpPr txBox="1"/>
+        </p:spPr>
+      </p:pic>
+      <p:pic>
+        <p:nvPicPr>
+          <p:cNvPr id="10" name="Graphic 9" descr="GitHub - Wikipedia, la enciclopedia libre">
+            <a:extLst>
+              <a:ext uri="{FF2B5EF4-FFF2-40B4-BE49-F238E27FC236}">
+                <a16:creationId xmlns:a16="http://schemas.microsoft.com/office/drawing/2014/main" id="{61AC600D-5B96-AFC9-637E-0F4BAFFD2153}"/>
+              </a:ext>
+            </a:extLst>
+          </p:cNvPr>
+          <p:cNvPicPr>
+            <a:picLocks noChangeAspect="1"/>
+          </p:cNvPicPr>
           <p:nvPr/>
-        </p:nvSpPr>
-        <p:spPr>
-          <a:xfrm>
-            <a:off x="731520" y="320040"/>
-            <a:ext cx="10698480" cy="1005840"/>
+        </p:nvPicPr>
+        <p:blipFill>
+          <a:blip>
+            <a:extLst>
+              <a:ext uri="{96DAC541-7B7A-43D3-8B79-37D633B846F1}">
+                <asvg:svgBlip xmlns:asvg="http://schemas.microsoft.com/office/drawing/2016/SVG/main" r:embed="rId3"/>
+              </a:ext>
+            </a:extLst>
+          </a:blip>
+          <a:stretch>
+            <a:fillRect/>
+          </a:stretch>
+        </p:blipFill>
+        <p:spPr>
+          <a:xfrm>
+            <a:off x="3392716" y="4764347"/>
+            <a:ext cx="1030009" cy="1030009"/>
           </a:xfrm>
           <a:prstGeom prst="rect">
             <a:avLst/>
           </a:prstGeom>
-          <a:noFill/>
-        </p:spPr>
-        <p:txBody>
-          <a:bodyPr wrap="square">
-            <a:spAutoFit/>
-          </a:bodyPr>
-          <a:lstStyle/>
-          <a:p>
-            <a:pPr>
-              <a:defRPr sz="2800" b="1">
-                <a:solidFill>
-                  <a:srgbClr val="1E3A4C"/>
-                </a:solidFill>
-                <a:latin typeface="Segoe UI"/>
-              </a:defRPr>
-            </a:pPr>
-            <a:r>
-              <a:t>Persistencia y Almacenamiento Seguros</a:t>
-            </a:r>
-          </a:p>
-          <a:p>
-            <a:pPr>
-              <a:spcBef>
-                <a:spcPts val="400"/>
-              </a:spcBef>
-              <a:defRPr sz="1500">
-                <a:solidFill>
-                  <a:srgbClr val="6E7882"/>
-                </a:solidFill>
-                <a:latin typeface="Segoe UI"/>
-              </a:defRPr>
-            </a:pPr>
-            <a:r>
-              <a:t>Gestión de datos en archivos planos sin pérdida de información</a:t>
-            </a:r>
-          </a:p>
-        </p:txBody>
-      </p:sp>
-      <p:sp>
-        <p:nvSpPr>
-          <p:cNvPr id="4" name="Rectangle 3"/>
-          <p:cNvSpPr/>
-          <p:nvPr/>
-        </p:nvSpPr>
-        <p:spPr>
-          <a:xfrm>
-            <a:off x="731520" y="1325880"/>
-            <a:ext cx="1371600" cy="54864"/>
-          </a:xfrm>
-          <a:prstGeom prst="rect">
-            <a:avLst/>
-          </a:prstGeom>
-          <a:solidFill>
-            <a:srgbClr val="48A9A6"/>
-          </a:solidFill>
-          <a:ln>
-            <a:noFill/>
-          </a:ln>
-        </p:spPr>
-        <p:style>
-          <a:lnRef idx="1">
-            <a:schemeClr val="accent1"/>
-          </a:lnRef>
-          <a:fillRef idx="3">
-            <a:schemeClr val="accent1"/>
-          </a:fillRef>
-          <a:effectRef idx="2">
-            <a:schemeClr val="accent1"/>
-          </a:effectRef>
-          <a:fontRef idx="minor">
-            <a:schemeClr val="lt1"/>
-          </a:fontRef>
-        </p:style>
-        <p:txBody>
-          <a:bodyPr rtlCol="0" anchor="ctr"/>
-          <a:lstStyle/>
-          <a:p>
-            <a:pPr algn="ctr"/>
-            <a:endParaRPr/>
-          </a:p>
-        </p:txBody>
-      </p:sp>
-      <p:sp>
-        <p:nvSpPr>
-          <p:cNvPr id="5" name="Rounded Rectangle 4"/>
-          <p:cNvSpPr/>
-          <p:nvPr/>
-        </p:nvSpPr>
-        <p:spPr>
-          <a:xfrm>
-            <a:off x="731520" y="1645920"/>
-            <a:ext cx="5120640" cy="4572000"/>
-          </a:xfrm>
-          <a:prstGeom prst="roundRect">
-            <a:avLst/>
-          </a:prstGeom>
-          <a:solidFill>
-            <a:srgbClr val="FFFFFF"/>
-          </a:solidFill>
-          <a:ln w="19050">
-            <a:solidFill>
-              <a:srgbClr val="DCE4EB"/>
-            </a:solidFill>
-          </a:ln>
-        </p:spPr>
-        <p:style>
-          <a:lnRef idx="1">
-            <a:schemeClr val="accent1"/>
-          </a:lnRef>
-          <a:fillRef idx="3">
-            <a:schemeClr val="accent1"/>
-          </a:fillRef>
-          <a:effectRef idx="2">
-            <a:schemeClr val="accent1"/>
-          </a:effectRef>
-          <a:fontRef idx="minor">
-            <a:schemeClr val="lt1"/>
-          </a:fontRef>
-        </p:style>
-        <p:txBody>
-          <a:bodyPr rtlCol="0" anchor="ctr"/>
-          <a:lstStyle/>
-          <a:p>
-            <a:pPr algn="ctr"/>
-            <a:endParaRPr/>
-          </a:p>
-        </p:txBody>
-      </p:sp>
-      <p:sp>
-        <p:nvSpPr>
-          <p:cNvPr id="6" name="TextBox 5"/>
-          <p:cNvSpPr txBox="1"/>
-          <p:nvPr/>
-        </p:nvSpPr>
-        <p:spPr>
-          <a:xfrm>
-            <a:off x="960120" y="1828800"/>
-            <a:ext cx="4663440" cy="4206240"/>
-          </a:xfrm>
-          <a:prstGeom prst="rect">
-            <a:avLst/>
-          </a:prstGeom>
-          <a:noFill/>
-        </p:spPr>
-        <p:txBody>
-          <a:bodyPr wrap="square">
-            <a:spAutoFit/>
-          </a:bodyPr>
-          <a:lstStyle/>
-          <a:p>
-            <a:pPr>
-              <a:spcAft>
-                <a:spcPts val="1200"/>
-              </a:spcAft>
-              <a:defRPr sz="1900" b="1">
-                <a:solidFill>
-                  <a:srgbClr val="1E3A4C"/>
-                </a:solidFill>
-                <a:latin typeface="Segoe UI"/>
-              </a:defRPr>
-            </a:pPr>
-            <a:r>
-              <a:t>Manejo de Archivos (TXT/CSV)</a:t>
-            </a:r>
-          </a:p>
-          <a:p>
-            <a:pPr>
-              <a:spcAft>
-                <a:spcPts val="800"/>
-              </a:spcAft>
-              <a:defRPr sz="1400">
-                <a:solidFill>
-                  <a:srgbClr val="283038"/>
-                </a:solidFill>
-                <a:latin typeface="Segoe UI"/>
-              </a:defRPr>
-            </a:pPr>
-            <a:r>
-              <a:rPr b="1">
-                <a:solidFill>
-                  <a:srgbClr val="48A9A6"/>
-                </a:solidFill>
-              </a:rPr>
-              <a:t>• Manejadores de Contexto: </a:t>
-            </a:r>
-            <a:r>
-              <a:t>Uso de 'with open(...)' que garantiza el cierre seguro del archivo.</a:t>
-            </a:r>
-          </a:p>
-          <a:p>
-            <a:pPr>
-              <a:spcAft>
-                <a:spcPts val="800"/>
-              </a:spcAft>
-              <a:defRPr sz="1400">
-                <a:solidFill>
-                  <a:srgbClr val="283038"/>
-                </a:solidFill>
-                <a:latin typeface="Segoe UI"/>
-              </a:defRPr>
-            </a:pPr>
-            <a:r>
-              <a:rPr b="1">
-                <a:solidFill>
-                  <a:srgbClr val="48A9A6"/>
-                </a:solidFill>
-              </a:rPr>
-              <a:t>• Codificación UTF-8: </a:t>
-            </a:r>
-            <a:r>
-              <a:t>Soporte completo para tildes y caracteres especiales en español.</a:t>
-            </a:r>
-          </a:p>
-          <a:p>
-            <a:pPr>
-              <a:spcAft>
-                <a:spcPts val="800"/>
-              </a:spcAft>
-              <a:defRPr sz="1400">
-                <a:solidFill>
-                  <a:srgbClr val="283038"/>
-                </a:solidFill>
-                <a:latin typeface="Segoe UI"/>
-              </a:defRPr>
-            </a:pPr>
-            <a:r>
-              <a:rPr b="1">
-                <a:solidFill>
-                  <a:srgbClr val="48A9A6"/>
-                </a:solidFill>
-              </a:rPr>
-              <a:t>• Conversión Automática: </a:t>
-            </a:r>
-            <a:r>
-              <a:t>Función 'evaluar_y_convertir()' que tipifica int, float y str.</a:t>
-            </a:r>
-          </a:p>
-          <a:p>
-            <a:pPr>
-              <a:spcAft>
-                <a:spcPts val="800"/>
-              </a:spcAft>
-              <a:defRPr sz="1400">
-                <a:solidFill>
-                  <a:srgbClr val="283038"/>
-                </a:solidFill>
-                <a:latin typeface="Segoe UI"/>
-              </a:defRPr>
-            </a:pPr>
-            <a:r>
-              <a:rPr b="1">
-                <a:solidFill>
-                  <a:srgbClr val="48A9A6"/>
-                </a:solidFill>
-              </a:rPr>
-              <a:t>• Sobrescritura Segura: </a:t>
-            </a:r>
-            <a:r>
-              <a:t>Actualización instantánea tras cada registro o venta.</a:t>
-            </a:r>
-          </a:p>
-        </p:txBody>
-      </p:sp>
-      <p:sp>
-        <p:nvSpPr>
-          <p:cNvPr id="7" name="Rounded Rectangle 6"/>
-          <p:cNvSpPr/>
-          <p:nvPr/>
-        </p:nvSpPr>
-        <p:spPr>
-          <a:xfrm>
-            <a:off x="6309360" y="1645920"/>
-            <a:ext cx="5120640" cy="4572000"/>
-          </a:xfrm>
-          <a:prstGeom prst="roundRect">
-            <a:avLst/>
-          </a:prstGeom>
-          <a:solidFill>
-            <a:srgbClr val="F0F4F8"/>
-          </a:solidFill>
-          <a:ln w="19050">
-            <a:solidFill>
-              <a:srgbClr val="48A9A6"/>
-            </a:solidFill>
-          </a:ln>
-        </p:spPr>
-        <p:style>
-          <a:lnRef idx="1">
-            <a:schemeClr val="accent1"/>
-          </a:lnRef>
-          <a:fillRef idx="3">
-            <a:schemeClr val="accent1"/>
-          </a:fillRef>
-          <a:effectRef idx="2">
-            <a:schemeClr val="accent1"/>
-          </a:effectRef>
-          <a:fontRef idx="minor">
-            <a:schemeClr val="lt1"/>
-          </a:fontRef>
-        </p:style>
-        <p:txBody>
-          <a:bodyPr rtlCol="0" anchor="ctr"/>
-          <a:lstStyle/>
-          <a:p>
-            <a:pPr algn="ctr"/>
-            <a:endParaRPr dirty="0"/>
-          </a:p>
-        </p:txBody>
-      </p:sp>
-      <p:sp>
-        <p:nvSpPr>
-          <p:cNvPr id="8" name="TextBox 7"/>
-          <p:cNvSpPr txBox="1"/>
-          <p:nvPr/>
-        </p:nvSpPr>
-        <p:spPr>
-          <a:xfrm>
-            <a:off x="6492240" y="1783080"/>
-            <a:ext cx="4754880" cy="365760"/>
-          </a:xfrm>
-          <a:prstGeom prst="rect">
-            <a:avLst/>
-          </a:prstGeom>
-          <a:noFill/>
-        </p:spPr>
-        <p:txBody>
-          <a:bodyPr wrap="none">
-            <a:spAutoFit/>
-          </a:bodyPr>
-          <a:lstStyle/>
-          <a:p>
-            <a:pPr>
-              <a:defRPr sz="1400" b="1">
-                <a:solidFill>
-                  <a:srgbClr val="1E3A4C"/>
-                </a:solidFill>
-                <a:latin typeface="Segoe UI"/>
-              </a:defRPr>
-            </a:pPr>
-            <a:r>
-              <a:rPr dirty="0"/>
-              <a:t>📄 </a:t>
-            </a:r>
-            <a:r>
-              <a:rPr dirty="0" err="1"/>
-              <a:t>Estructura</a:t>
-            </a:r>
-            <a:r>
-              <a:rPr dirty="0"/>
-              <a:t> de </a:t>
-            </a:r>
-            <a:r>
-              <a:rPr dirty="0" err="1"/>
-              <a:t>Archivos</a:t>
-            </a:r>
-            <a:r>
-              <a:rPr dirty="0"/>
-              <a:t> TXT</a:t>
-            </a:r>
-          </a:p>
-        </p:txBody>
-      </p:sp>
-      <p:sp>
-        <p:nvSpPr>
-          <p:cNvPr id="9" name="TextBox 8"/>
-          <p:cNvSpPr txBox="1"/>
-          <p:nvPr/>
-        </p:nvSpPr>
-        <p:spPr>
-          <a:xfrm>
-            <a:off x="6492240" y="2194560"/>
-            <a:ext cx="4754880" cy="3931920"/>
-          </a:xfrm>
-          <a:prstGeom prst="rect">
-            <a:avLst/>
-          </a:prstGeom>
-          <a:noFill/>
-        </p:spPr>
-        <p:txBody>
-          <a:bodyPr wrap="square">
-            <a:spAutoFit/>
-          </a:bodyPr>
-          <a:lstStyle/>
-          <a:p>
-            <a:pPr>
-              <a:spcAft>
-                <a:spcPts val="400"/>
-              </a:spcAft>
-              <a:defRPr sz="1200">
-                <a:solidFill>
-                  <a:srgbClr val="283038"/>
-                </a:solidFill>
-                <a:latin typeface="Consolas"/>
-              </a:defRPr>
-            </a:pPr>
-            <a:r>
-              <a:rPr dirty="0"/>
-              <a:t>=== </a:t>
-            </a:r>
-            <a:r>
-              <a:rPr dirty="0" err="1"/>
-              <a:t>datos</a:t>
-            </a:r>
-            <a:r>
-              <a:rPr dirty="0"/>
-              <a:t>/inventario_medicinas.txt ===</a:t>
-            </a:r>
-          </a:p>
-          <a:p>
-            <a:pPr>
-              <a:spcAft>
-                <a:spcPts val="400"/>
-              </a:spcAft>
-              <a:defRPr sz="1200">
-                <a:solidFill>
-                  <a:srgbClr val="283038"/>
-                </a:solidFill>
-                <a:latin typeface="Consolas"/>
-              </a:defRPr>
-            </a:pPr>
-            <a:r>
-              <a:rPr dirty="0"/>
-              <a:t>15,Paracetamol,0.3</a:t>
-            </a:r>
-          </a:p>
-          <a:p>
-            <a:pPr>
-              <a:spcAft>
-                <a:spcPts val="400"/>
-              </a:spcAft>
-              <a:defRPr sz="1200">
-                <a:solidFill>
-                  <a:srgbClr val="283038"/>
-                </a:solidFill>
-                <a:latin typeface="Consolas"/>
-              </a:defRPr>
-            </a:pPr>
-            <a:r>
-              <a:rPr dirty="0"/>
-              <a:t>24,Ibuprofeno,0.85</a:t>
-            </a:r>
-          </a:p>
-          <a:p>
-            <a:pPr>
-              <a:spcAft>
-                <a:spcPts val="400"/>
-              </a:spcAft>
-              <a:defRPr sz="1200">
-                <a:solidFill>
-                  <a:srgbClr val="283038"/>
-                </a:solidFill>
-                <a:latin typeface="Consolas"/>
-              </a:defRPr>
-            </a:pPr>
-            <a:r>
-              <a:rPr dirty="0"/>
-              <a:t>34,Amoxicilina,0.45</a:t>
-            </a:r>
-          </a:p>
-          <a:p>
-            <a:pPr>
-              <a:spcAft>
-                <a:spcPts val="400"/>
-              </a:spcAft>
-              <a:defRPr sz="1200">
-                <a:solidFill>
-                  <a:srgbClr val="283038"/>
-                </a:solidFill>
-                <a:latin typeface="Consolas"/>
-              </a:defRPr>
-            </a:pPr>
-            <a:r>
-              <a:rPr dirty="0"/>
-              <a:t>10,Omeprazol,0.8</a:t>
-            </a:r>
-          </a:p>
-          <a:p>
-            <a:pPr>
-              <a:spcAft>
-                <a:spcPts val="400"/>
-              </a:spcAft>
-              <a:defRPr sz="1200">
-                <a:solidFill>
-                  <a:srgbClr val="283038"/>
-                </a:solidFill>
-                <a:latin typeface="Consolas"/>
-              </a:defRPr>
-            </a:pPr>
-            <a:r>
-              <a:rPr dirty="0"/>
-              <a:t>50,Vitamina C,1.5</a:t>
-            </a:r>
-          </a:p>
-          <a:p>
-            <a:pPr>
-              <a:spcAft>
-                <a:spcPts val="400"/>
-              </a:spcAft>
-              <a:defRPr sz="1200">
-                <a:solidFill>
-                  <a:srgbClr val="283038"/>
-                </a:solidFill>
-                <a:latin typeface="Consolas"/>
-              </a:defRPr>
-            </a:pPr>
-            <a:endParaRPr dirty="0"/>
-          </a:p>
-          <a:p>
-            <a:pPr>
-              <a:spcAft>
-                <a:spcPts val="400"/>
-              </a:spcAft>
-              <a:defRPr sz="1200">
-                <a:solidFill>
-                  <a:srgbClr val="283038"/>
-                </a:solidFill>
-                <a:latin typeface="Consolas"/>
-              </a:defRPr>
-            </a:pPr>
-            <a:r>
-              <a:rPr dirty="0"/>
-              <a:t>=== </a:t>
-            </a:r>
-            <a:r>
-              <a:rPr dirty="0" err="1"/>
-              <a:t>datos</a:t>
-            </a:r>
-            <a:r>
-              <a:rPr dirty="0"/>
-              <a:t>/registro_pedidos.txt ===</a:t>
-            </a:r>
-          </a:p>
-          <a:p>
-            <a:pPr>
-              <a:spcAft>
-                <a:spcPts val="400"/>
-              </a:spcAft>
-              <a:defRPr sz="1200">
-                <a:solidFill>
-                  <a:srgbClr val="283038"/>
-                </a:solidFill>
-                <a:latin typeface="Consolas"/>
-              </a:defRPr>
-            </a:pPr>
-            <a:r>
-              <a:rPr dirty="0"/>
-              <a:t>Steven,2,Cefalexina,0.2</a:t>
-            </a:r>
-          </a:p>
-          <a:p>
-            <a:pPr>
-              <a:spcAft>
-                <a:spcPts val="400"/>
-              </a:spcAft>
-              <a:defRPr sz="1200">
-                <a:solidFill>
-                  <a:srgbClr val="283038"/>
-                </a:solidFill>
-                <a:latin typeface="Consolas"/>
-              </a:defRPr>
-            </a:pPr>
-            <a:r>
-              <a:rPr dirty="0"/>
-              <a:t>Jonathan,2,Loratadina,0.25</a:t>
-            </a:r>
-          </a:p>
-          <a:p>
-            <a:pPr>
-              <a:spcAft>
-                <a:spcPts val="400"/>
-              </a:spcAft>
-              <a:defRPr sz="1200">
-                <a:solidFill>
-                  <a:srgbClr val="283038"/>
-                </a:solidFill>
-                <a:latin typeface="Consolas"/>
-              </a:defRPr>
-            </a:pPr>
-            <a:r>
-              <a:rPr dirty="0"/>
-              <a:t>Elias,3,Paracetamol,0.3</a:t>
-            </a:r>
-          </a:p>
-          <a:p>
-            <a:pPr>
-              <a:spcAft>
-                <a:spcPts val="400"/>
-              </a:spcAft>
-              <a:defRPr sz="1200">
-                <a:solidFill>
-                  <a:srgbClr val="283038"/>
-                </a:solidFill>
-                <a:latin typeface="Consolas"/>
-              </a:defRPr>
-            </a:pPr>
-            <a:r>
-              <a:rPr dirty="0"/>
-              <a:t>Sebastian,1,Vitamina C,1.5</a:t>
-            </a:r>
-          </a:p>
-        </p:txBody>
-      </p:sp>
-      <p:cxnSp>
-        <p:nvCxnSpPr>
-          <p:cNvPr id="11" name="Straight Connector 10">
-            <a:extLst>
-              <a:ext uri="{FF2B5EF4-FFF2-40B4-BE49-F238E27FC236}">
-                <a16:creationId xmlns:a16="http://schemas.microsoft.com/office/drawing/2014/main" id="{5727ACBB-D31B-598E-937C-A55D20E39BCE}"/>
-              </a:ext>
-            </a:extLst>
-          </p:cNvPr>
-          <p:cNvCxnSpPr/>
-          <p:nvPr/>
-        </p:nvCxnSpPr>
-        <p:spPr>
-          <a:xfrm>
-            <a:off x="6492240" y="3732551"/>
-            <a:ext cx="4754880" cy="0"/>
-          </a:xfrm>
-          <a:prstGeom prst="line">
-            <a:avLst/>
-          </a:prstGeom>
-          <a:ln>
-            <a:solidFill>
-              <a:srgbClr val="00B0F0"/>
-            </a:solidFill>
-          </a:ln>
-        </p:spPr>
-        <p:style>
-          <a:lnRef idx="2">
-            <a:schemeClr val="accent1"/>
-          </a:lnRef>
-          <a:fillRef idx="0">
-            <a:schemeClr val="accent1"/>
-          </a:fillRef>
-          <a:effectRef idx="1">
-            <a:schemeClr val="accent1"/>
-          </a:effectRef>
-          <a:fontRef idx="minor">
-            <a:schemeClr val="tx1"/>
-          </a:fontRef>
-        </p:style>
-      </p:cxnSp>
-    </p:spTree>
-  </p:cSld>
-  <p:clrMapOvr>
-    <a:masterClrMapping/>
-  </p:clrMapOvr>
-</p:sld>
-</file>
-
-<file path=ppt/slides/slide7.xml><?xml version="1.0" encoding="utf-8"?>
-<p:sld xmlns:a="http://schemas.openxmlformats.org/drawingml/2006/main" xmlns:r="http://schemas.openxmlformats.org/officeDocument/2006/relationships" xmlns:p="http://schemas.openxmlformats.org/presentationml/2006/main">
-  <p:cSld>
-    <p:spTree>
-      <p:nvGrpSpPr>
-        <p:cNvPr id="1" name=""/>
-        <p:cNvGrpSpPr/>
-        <p:nvPr/>
-      </p:nvGrpSpPr>
-      <p:grpSpPr>
-        <a:xfrm>
-          <a:off x="0" y="0"/>
-          <a:ext cx="0" cy="0"/>
-          <a:chOff x="0" y="0"/>
-          <a:chExt cx="0" cy="0"/>
-        </a:xfrm>
-      </p:grpSpPr>
-      <p:sp>
-        <p:nvSpPr>
-          <p:cNvPr id="2" name="Rectangle 1"/>
-          <p:cNvSpPr/>
-          <p:nvPr/>
-        </p:nvSpPr>
-        <p:spPr>
-          <a:xfrm>
-            <a:off x="0" y="0"/>
-            <a:ext cx="12191695" cy="6858000"/>
-          </a:xfrm>
-          <a:prstGeom prst="rect">
-            <a:avLst/>
-          </a:prstGeom>
-          <a:solidFill>
-            <a:srgbClr val="FAFBFC"/>
-          </a:solidFill>
-          <a:ln>
-            <a:noFill/>
-          </a:ln>
-        </p:spPr>
-        <p:style>
-          <a:lnRef idx="1">
-            <a:schemeClr val="accent1"/>
-          </a:lnRef>
-          <a:fillRef idx="3">
-            <a:schemeClr val="accent1"/>
-          </a:fillRef>
-          <a:effectRef idx="2">
-            <a:schemeClr val="accent1"/>
-          </a:effectRef>
-          <a:fontRef idx="minor">
-            <a:schemeClr val="lt1"/>
-          </a:fontRef>
-        </p:style>
-        <p:txBody>
-          <a:bodyPr rtlCol="0" anchor="ctr"/>
-          <a:lstStyle/>
-          <a:p>
-            <a:pPr algn="ctr"/>
-            <a:endParaRPr/>
-          </a:p>
-        </p:txBody>
-      </p:sp>
-      <p:sp>
-        <p:nvSpPr>
-          <p:cNvPr id="3" name="TextBox 2"/>
-          <p:cNvSpPr txBox="1"/>
-          <p:nvPr/>
-        </p:nvSpPr>
-        <p:spPr>
-          <a:xfrm>
-            <a:off x="731520" y="320040"/>
-            <a:ext cx="10698480" cy="1005840"/>
-          </a:xfrm>
-          <a:prstGeom prst="rect">
-            <a:avLst/>
-          </a:prstGeom>
-          <a:noFill/>
-        </p:spPr>
-        <p:txBody>
-          <a:bodyPr wrap="square">
-            <a:spAutoFit/>
-          </a:bodyPr>
-          <a:lstStyle/>
-          <a:p>
-            <a:pPr>
-              <a:defRPr sz="2800" b="1">
-                <a:solidFill>
-                  <a:srgbClr val="1E3A4C"/>
-                </a:solidFill>
-                <a:latin typeface="Segoe UI"/>
-              </a:defRPr>
-            </a:pPr>
-            <a:r>
-              <a:t>Principio Técnico: Comunicación Directa</a:t>
-            </a:r>
-          </a:p>
-          <a:p>
-            <a:pPr>
-              <a:spcBef>
-                <a:spcPts val="400"/>
-              </a:spcBef>
-              <a:defRPr sz="1500">
-                <a:solidFill>
-                  <a:srgbClr val="6E7882"/>
-                </a:solidFill>
-                <a:latin typeface="Segoe UI"/>
-              </a:defRPr>
-            </a:pPr>
-            <a:r>
-              <a:t>'Que cada parte asuma lo que le corresponde'</a:t>
-            </a:r>
-          </a:p>
-        </p:txBody>
-      </p:sp>
-      <p:sp>
-        <p:nvSpPr>
-          <p:cNvPr id="4" name="Rectangle 3"/>
-          <p:cNvSpPr/>
-          <p:nvPr/>
-        </p:nvSpPr>
-        <p:spPr>
-          <a:xfrm>
-            <a:off x="731520" y="1325880"/>
-            <a:ext cx="1371600" cy="54864"/>
-          </a:xfrm>
-          <a:prstGeom prst="rect">
-            <a:avLst/>
-          </a:prstGeom>
-          <a:solidFill>
-            <a:srgbClr val="48A9A6"/>
-          </a:solidFill>
-          <a:ln>
-            <a:noFill/>
-          </a:ln>
-        </p:spPr>
-        <p:style>
-          <a:lnRef idx="1">
-            <a:schemeClr val="accent1"/>
-          </a:lnRef>
-          <a:fillRef idx="3">
-            <a:schemeClr val="accent1"/>
-          </a:fillRef>
-          <a:effectRef idx="2">
-            <a:schemeClr val="accent1"/>
-          </a:effectRef>
-          <a:fontRef idx="minor">
-            <a:schemeClr val="lt1"/>
-          </a:fontRef>
-        </p:style>
-        <p:txBody>
-          <a:bodyPr rtlCol="0" anchor="ctr"/>
-          <a:lstStyle/>
-          <a:p>
-            <a:pPr algn="ctr"/>
-            <a:endParaRPr/>
-          </a:p>
-        </p:txBody>
-      </p:sp>
-      <p:sp>
-        <p:nvSpPr>
-          <p:cNvPr id="5" name="Rounded Rectangle 4"/>
-          <p:cNvSpPr/>
-          <p:nvPr/>
-        </p:nvSpPr>
-        <p:spPr>
-          <a:xfrm>
-            <a:off x="731520" y="1645920"/>
-            <a:ext cx="5120640" cy="4572000"/>
-          </a:xfrm>
-          <a:prstGeom prst="roundRect">
-            <a:avLst/>
-          </a:prstGeom>
-          <a:solidFill>
-            <a:srgbClr val="FFFFFF"/>
-          </a:solidFill>
-          <a:ln w="19050">
-            <a:solidFill>
-              <a:srgbClr val="DCE4EB"/>
-            </a:solidFill>
-          </a:ln>
-        </p:spPr>
-        <p:style>
-          <a:lnRef idx="1">
-            <a:schemeClr val="accent1"/>
-          </a:lnRef>
-          <a:fillRef idx="3">
-            <a:schemeClr val="accent1"/>
-          </a:fillRef>
-          <a:effectRef idx="2">
-            <a:schemeClr val="accent1"/>
-          </a:effectRef>
-          <a:fontRef idx="minor">
-            <a:schemeClr val="lt1"/>
-          </a:fontRef>
-        </p:style>
-        <p:txBody>
-          <a:bodyPr rtlCol="0" anchor="ctr"/>
-          <a:lstStyle/>
-          <a:p>
-            <a:pPr algn="ctr"/>
-            <a:endParaRPr/>
-          </a:p>
-        </p:txBody>
-      </p:sp>
-      <p:sp>
-        <p:nvSpPr>
-          <p:cNvPr id="6" name="TextBox 5"/>
-          <p:cNvSpPr txBox="1"/>
-          <p:nvPr/>
-        </p:nvSpPr>
-        <p:spPr>
-          <a:xfrm>
-            <a:off x="960120" y="1828800"/>
-            <a:ext cx="4663440" cy="4206240"/>
-          </a:xfrm>
-          <a:prstGeom prst="rect">
-            <a:avLst/>
-          </a:prstGeom>
-          <a:noFill/>
-        </p:spPr>
-        <p:txBody>
-          <a:bodyPr wrap="square">
-            <a:spAutoFit/>
-          </a:bodyPr>
-          <a:lstStyle/>
-          <a:p>
-            <a:pPr>
-              <a:spcAft>
-                <a:spcPts val="1200"/>
-              </a:spcAft>
-              <a:defRPr sz="1900" b="1">
-                <a:solidFill>
-                  <a:srgbClr val="1E3A4C"/>
-                </a:solidFill>
-                <a:latin typeface="Segoe UI"/>
-              </a:defRPr>
-            </a:pPr>
-            <a:r>
-              <a:t>Autonomía de las Clases</a:t>
-            </a:r>
-          </a:p>
-          <a:p>
-            <a:pPr>
-              <a:spcAft>
-                <a:spcPts val="800"/>
-              </a:spcAft>
-              <a:defRPr sz="1400">
-                <a:solidFill>
-                  <a:srgbClr val="283038"/>
-                </a:solidFill>
-                <a:latin typeface="Segoe UI"/>
-              </a:defRPr>
-            </a:pPr>
-            <a:r>
-              <a:rPr b="1">
-                <a:solidFill>
-                  <a:srgbClr val="48A9A6"/>
-                </a:solidFill>
-              </a:rPr>
-              <a:t>• Clase Medicamento: </a:t>
-            </a:r>
-            <a:r>
-              <a:t>Cuenta con métodos 'a_lista()' y 'desde_lista()' para autogestionarse.</a:t>
-            </a:r>
-          </a:p>
-          <a:p>
-            <a:pPr>
-              <a:spcAft>
-                <a:spcPts val="800"/>
-              </a:spcAft>
-              <a:defRPr sz="1400">
-                <a:solidFill>
-                  <a:srgbClr val="283038"/>
-                </a:solidFill>
-                <a:latin typeface="Segoe UI"/>
-              </a:defRPr>
-            </a:pPr>
-            <a:r>
-              <a:rPr b="1">
-                <a:solidFill>
-                  <a:srgbClr val="48A9A6"/>
-                </a:solidFill>
-              </a:rPr>
-              <a:t>• Clase Pedido: </a:t>
-            </a:r>
-            <a:r>
-              <a:t>Cuenta con 'a_filas_registro()' para exportar sus ventas al historial.</a:t>
-            </a:r>
-          </a:p>
-          <a:p>
-            <a:pPr>
-              <a:spcAft>
-                <a:spcPts val="800"/>
-              </a:spcAft>
-              <a:defRPr sz="1400">
-                <a:solidFill>
-                  <a:srgbClr val="283038"/>
-                </a:solidFill>
-                <a:latin typeface="Segoe UI"/>
-              </a:defRPr>
-            </a:pPr>
-            <a:r>
-              <a:rPr b="1">
-                <a:solidFill>
-                  <a:srgbClr val="48A9A6"/>
-                </a:solidFill>
-              </a:rPr>
-              <a:t>• Módulo de Archivos: </a:t>
-            </a:r>
-            <a:r>
-              <a:t>Se enfoca exclusivamente en la lectura y escritura en el disco.</a:t>
-            </a:r>
-          </a:p>
-          <a:p>
-            <a:pPr>
-              <a:spcAft>
-                <a:spcPts val="800"/>
-              </a:spcAft>
-              <a:defRPr sz="1400">
-                <a:solidFill>
-                  <a:srgbClr val="283038"/>
-                </a:solidFill>
-                <a:latin typeface="Segoe UI"/>
-              </a:defRPr>
-            </a:pPr>
-            <a:r>
-              <a:rPr b="1">
-                <a:solidFill>
-                  <a:srgbClr val="48A9A6"/>
-                </a:solidFill>
-              </a:rPr>
-              <a:t>• Módulo de Menús: </a:t>
-            </a:r>
-            <a:r>
-              <a:t>Conecta directamente las clases con el guardado de archivos.</a:t>
-            </a:r>
-          </a:p>
-        </p:txBody>
-      </p:sp>
-      <p:sp>
-        <p:nvSpPr>
-          <p:cNvPr id="7" name="Rounded Rectangle 6"/>
-          <p:cNvSpPr/>
-          <p:nvPr/>
-        </p:nvSpPr>
-        <p:spPr>
-          <a:xfrm>
-            <a:off x="6309360" y="1645920"/>
-            <a:ext cx="5120640" cy="4572000"/>
-          </a:xfrm>
-          <a:prstGeom prst="roundRect">
-            <a:avLst/>
-          </a:prstGeom>
-          <a:solidFill>
-            <a:srgbClr val="FFFFFF"/>
-          </a:solidFill>
-          <a:ln w="19050">
-            <a:solidFill>
-              <a:srgbClr val="DCE4EB"/>
-            </a:solidFill>
-          </a:ln>
-        </p:spPr>
-        <p:style>
-          <a:lnRef idx="1">
-            <a:schemeClr val="accent1"/>
-          </a:lnRef>
-          <a:fillRef idx="3">
-            <a:schemeClr val="accent1"/>
-          </a:fillRef>
-          <a:effectRef idx="2">
-            <a:schemeClr val="accent1"/>
-          </a:effectRef>
-          <a:fontRef idx="minor">
-            <a:schemeClr val="lt1"/>
-          </a:fontRef>
-        </p:style>
-        <p:txBody>
-          <a:bodyPr rtlCol="0" anchor="ctr"/>
-          <a:lstStyle/>
-          <a:p>
-            <a:pPr algn="ctr"/>
-            <a:endParaRPr/>
-          </a:p>
-        </p:txBody>
-      </p:sp>
-      <p:sp>
-        <p:nvSpPr>
-          <p:cNvPr id="8" name="TextBox 7"/>
-          <p:cNvSpPr txBox="1"/>
-          <p:nvPr/>
-        </p:nvSpPr>
-        <p:spPr>
-          <a:xfrm>
-            <a:off x="6537960" y="1828800"/>
-            <a:ext cx="4663440" cy="4206240"/>
-          </a:xfrm>
-          <a:prstGeom prst="rect">
-            <a:avLst/>
-          </a:prstGeom>
-          <a:noFill/>
-        </p:spPr>
-        <p:txBody>
-          <a:bodyPr wrap="square">
-            <a:spAutoFit/>
-          </a:bodyPr>
-          <a:lstStyle/>
-          <a:p>
-            <a:pPr>
-              <a:spcAft>
-                <a:spcPts val="1200"/>
-              </a:spcAft>
-              <a:defRPr sz="1900" b="1">
-                <a:solidFill>
-                  <a:srgbClr val="1E3A4C"/>
-                </a:solidFill>
-                <a:latin typeface="Segoe UI"/>
-              </a:defRPr>
-            </a:pPr>
-            <a:r>
-              <a:t>Ventajas del Diseño</a:t>
-            </a:r>
-          </a:p>
-          <a:p>
-            <a:pPr>
-              <a:spcAft>
-                <a:spcPts val="800"/>
-              </a:spcAft>
-              <a:defRPr sz="1400">
-                <a:solidFill>
-                  <a:srgbClr val="283038"/>
-                </a:solidFill>
-                <a:latin typeface="Segoe UI"/>
-              </a:defRPr>
-            </a:pPr>
-            <a:r>
-              <a:rPr b="1">
-                <a:solidFill>
-                  <a:srgbClr val="48A9A6"/>
-                </a:solidFill>
-              </a:rPr>
-              <a:t>• Sin Intermediarios: </a:t>
-            </a:r>
-            <a:r>
-              <a:t>Eliminación de módulos traductores innecesarios y código duplicado.</a:t>
-            </a:r>
-          </a:p>
-          <a:p>
-            <a:pPr>
-              <a:spcAft>
-                <a:spcPts val="800"/>
-              </a:spcAft>
-              <a:defRPr sz="1400">
-                <a:solidFill>
-                  <a:srgbClr val="283038"/>
-                </a:solidFill>
-                <a:latin typeface="Segoe UI"/>
-              </a:defRPr>
-            </a:pPr>
-            <a:r>
-              <a:rPr b="1">
-                <a:solidFill>
-                  <a:srgbClr val="48A9A6"/>
-                </a:solidFill>
-              </a:rPr>
-              <a:t>• Alta Cohesión: </a:t>
-            </a:r>
-            <a:r>
-              <a:t>Cada entidad es dueña absoluta de sus datos y formato.</a:t>
-            </a:r>
-          </a:p>
-          <a:p>
-            <a:pPr>
-              <a:spcAft>
-                <a:spcPts val="800"/>
-              </a:spcAft>
-              <a:defRPr sz="1400">
-                <a:solidFill>
-                  <a:srgbClr val="283038"/>
-                </a:solidFill>
-                <a:latin typeface="Segoe UI"/>
-              </a:defRPr>
-            </a:pPr>
-            <a:r>
-              <a:rPr b="1">
-                <a:solidFill>
-                  <a:srgbClr val="48A9A6"/>
-                </a:solidFill>
-              </a:rPr>
-              <a:t>• Bajo Acoplamiento: </a:t>
-            </a:r>
-            <a:r>
-              <a:t>Las capas se comunican mediante interfaces estándar de listas.</a:t>
-            </a:r>
-          </a:p>
-          <a:p>
-            <a:pPr>
-              <a:spcAft>
-                <a:spcPts val="800"/>
-              </a:spcAft>
-              <a:defRPr sz="1400">
-                <a:solidFill>
-                  <a:srgbClr val="283038"/>
-                </a:solidFill>
-                <a:latin typeface="Segoe UI"/>
-              </a:defRPr>
-            </a:pPr>
-            <a:r>
-              <a:rPr b="1">
-                <a:solidFill>
-                  <a:srgbClr val="48A9A6"/>
-                </a:solidFill>
-              </a:rPr>
-              <a:t>• Legibilidad: </a:t>
-            </a:r>
-            <a:r>
-              <a:t>Código limpio, profesional y altamente mantenible.</a:t>
-            </a:r>
-          </a:p>
-        </p:txBody>
-      </p:sp>
-    </p:spTree>
-  </p:cSld>
-  <p:clrMapOvr>
-    <a:masterClrMapping/>
-  </p:clrMapOvr>
-</p:sld>
-</file>
-
-<file path=ppt/slides/slide8.xml><?xml version="1.0" encoding="utf-8"?>
-<p:sld xmlns:a="http://schemas.openxmlformats.org/drawingml/2006/main" xmlns:r="http://schemas.openxmlformats.org/officeDocument/2006/relationships" xmlns:p="http://schemas.openxmlformats.org/presentationml/2006/main">
-  <p:cSld>
-    <p:spTree>
-      <p:nvGrpSpPr>
-        <p:cNvPr id="1" name=""/>
-        <p:cNvGrpSpPr/>
-        <p:nvPr/>
-      </p:nvGrpSpPr>
-      <p:grpSpPr>
-        <a:xfrm>
-          <a:off x="0" y="0"/>
-          <a:ext cx="0" cy="0"/>
-          <a:chOff x="0" y="0"/>
-          <a:chExt cx="0" cy="0"/>
-        </a:xfrm>
-      </p:grpSpPr>
-      <p:sp>
-        <p:nvSpPr>
-          <p:cNvPr id="2" name="Rectangle 1"/>
-          <p:cNvSpPr/>
-          <p:nvPr/>
-        </p:nvSpPr>
-        <p:spPr>
-          <a:xfrm>
-            <a:off x="0" y="0"/>
-            <a:ext cx="12191695" cy="6858000"/>
-          </a:xfrm>
-          <a:prstGeom prst="rect">
-            <a:avLst/>
-          </a:prstGeom>
-          <a:solidFill>
-            <a:srgbClr val="FAFBFC"/>
-          </a:solidFill>
-          <a:ln>
-            <a:noFill/>
-          </a:ln>
-        </p:spPr>
-        <p:style>
-          <a:lnRef idx="1">
-            <a:schemeClr val="accent1"/>
-          </a:lnRef>
-          <a:fillRef idx="3">
-            <a:schemeClr val="accent1"/>
-          </a:fillRef>
-          <a:effectRef idx="2">
-            <a:schemeClr val="accent1"/>
-          </a:effectRef>
-          <a:fontRef idx="minor">
-            <a:schemeClr val="lt1"/>
-          </a:fontRef>
-        </p:style>
-        <p:txBody>
-          <a:bodyPr rtlCol="0" anchor="ctr"/>
-          <a:lstStyle/>
-          <a:p>
-            <a:pPr algn="ctr"/>
-            <a:endParaRPr/>
-          </a:p>
-        </p:txBody>
-      </p:sp>
-      <p:sp>
-        <p:nvSpPr>
-          <p:cNvPr id="3" name="TextBox 2"/>
-          <p:cNvSpPr txBox="1"/>
-          <p:nvPr/>
-        </p:nvSpPr>
-        <p:spPr>
-          <a:xfrm>
-            <a:off x="731520" y="320040"/>
-            <a:ext cx="10698480" cy="1005840"/>
-          </a:xfrm>
-          <a:prstGeom prst="rect">
-            <a:avLst/>
-          </a:prstGeom>
-          <a:noFill/>
-        </p:spPr>
-        <p:txBody>
-          <a:bodyPr wrap="square">
-            <a:spAutoFit/>
-          </a:bodyPr>
-          <a:lstStyle/>
-          <a:p>
-            <a:pPr>
-              <a:defRPr sz="2800" b="1">
-                <a:solidFill>
-                  <a:srgbClr val="1E3A4C"/>
-                </a:solidFill>
-                <a:latin typeface="Segoe UI"/>
-              </a:defRPr>
-            </a:pPr>
-            <a:r>
-              <a:t>Conclusiones del Proyecto</a:t>
-            </a:r>
-          </a:p>
-          <a:p>
-            <a:pPr>
-              <a:spcBef>
-                <a:spcPts val="400"/>
-              </a:spcBef>
-              <a:defRPr sz="1500">
-                <a:solidFill>
-                  <a:srgbClr val="6E7882"/>
-                </a:solidFill>
-                <a:latin typeface="Segoe UI"/>
-              </a:defRPr>
-            </a:pPr>
-            <a:r>
-              <a:t>Logros académicos y síntesis técnica de PyPharma Manager</a:t>
-            </a:r>
-          </a:p>
-        </p:txBody>
-      </p:sp>
-      <p:sp>
-        <p:nvSpPr>
-          <p:cNvPr id="4" name="Rectangle 3"/>
-          <p:cNvSpPr/>
-          <p:nvPr/>
-        </p:nvSpPr>
-        <p:spPr>
-          <a:xfrm>
-            <a:off x="731520" y="1325880"/>
-            <a:ext cx="1371600" cy="54864"/>
-          </a:xfrm>
-          <a:prstGeom prst="rect">
-            <a:avLst/>
-          </a:prstGeom>
-          <a:solidFill>
-            <a:srgbClr val="48A9A6"/>
-          </a:solidFill>
-          <a:ln>
-            <a:noFill/>
-          </a:ln>
-        </p:spPr>
-        <p:style>
-          <a:lnRef idx="1">
-            <a:schemeClr val="accent1"/>
-          </a:lnRef>
-          <a:fillRef idx="3">
-            <a:schemeClr val="accent1"/>
-          </a:fillRef>
-          <a:effectRef idx="2">
-            <a:schemeClr val="accent1"/>
-          </a:effectRef>
-          <a:fontRef idx="minor">
-            <a:schemeClr val="lt1"/>
-          </a:fontRef>
-        </p:style>
-        <p:txBody>
-          <a:bodyPr rtlCol="0" anchor="ctr"/>
-          <a:lstStyle/>
-          <a:p>
-            <a:pPr algn="ctr"/>
-            <a:endParaRPr/>
-          </a:p>
-        </p:txBody>
-      </p:sp>
-      <p:sp>
-        <p:nvSpPr>
-          <p:cNvPr id="5" name="Rounded Rectangle 4"/>
-          <p:cNvSpPr/>
-          <p:nvPr/>
-        </p:nvSpPr>
-        <p:spPr>
-          <a:xfrm>
-            <a:off x="731520" y="1645920"/>
-            <a:ext cx="5120640" cy="4572000"/>
-          </a:xfrm>
-          <a:prstGeom prst="roundRect">
-            <a:avLst/>
-          </a:prstGeom>
-          <a:solidFill>
-            <a:srgbClr val="FFFFFF"/>
-          </a:solidFill>
-          <a:ln w="19050">
-            <a:solidFill>
-              <a:srgbClr val="DCE4EB"/>
-            </a:solidFill>
-          </a:ln>
-        </p:spPr>
-        <p:style>
-          <a:lnRef idx="1">
-            <a:schemeClr val="accent1"/>
-          </a:lnRef>
-          <a:fillRef idx="3">
-            <a:schemeClr val="accent1"/>
-          </a:fillRef>
-          <a:effectRef idx="2">
-            <a:schemeClr val="accent1"/>
-          </a:effectRef>
-          <a:fontRef idx="minor">
-            <a:schemeClr val="lt1"/>
-          </a:fontRef>
-        </p:style>
-        <p:txBody>
-          <a:bodyPr rtlCol="0" anchor="ctr"/>
-          <a:lstStyle/>
-          <a:p>
-            <a:pPr algn="ctr"/>
-            <a:endParaRPr/>
-          </a:p>
-        </p:txBody>
-      </p:sp>
-      <p:sp>
-        <p:nvSpPr>
-          <p:cNvPr id="6" name="TextBox 5"/>
-          <p:cNvSpPr txBox="1"/>
-          <p:nvPr/>
-        </p:nvSpPr>
-        <p:spPr>
-          <a:xfrm>
-            <a:off x="960120" y="1828800"/>
-            <a:ext cx="4663440" cy="4206240"/>
-          </a:xfrm>
-          <a:prstGeom prst="rect">
-            <a:avLst/>
-          </a:prstGeom>
-          <a:noFill/>
-        </p:spPr>
-        <p:txBody>
-          <a:bodyPr wrap="square">
-            <a:spAutoFit/>
-          </a:bodyPr>
-          <a:lstStyle/>
-          <a:p>
-            <a:pPr>
-              <a:spcAft>
-                <a:spcPts val="1200"/>
-              </a:spcAft>
-              <a:defRPr sz="1900" b="1">
-                <a:solidFill>
-                  <a:srgbClr val="1E3A4C"/>
-                </a:solidFill>
-                <a:latin typeface="Segoe UI"/>
-              </a:defRPr>
-            </a:pPr>
-            <a:r>
-              <a:t>Logros Académicos</a:t>
-            </a:r>
-          </a:p>
-          <a:p>
-            <a:pPr>
-              <a:spcAft>
-                <a:spcPts val="800"/>
-              </a:spcAft>
-              <a:defRPr sz="1400">
-                <a:solidFill>
-                  <a:srgbClr val="283038"/>
-                </a:solidFill>
-                <a:latin typeface="Segoe UI"/>
-              </a:defRPr>
-            </a:pPr>
-            <a:r>
-              <a:rPr b="1">
-                <a:solidFill>
-                  <a:srgbClr val="48A9A6"/>
-                </a:solidFill>
-              </a:rPr>
-              <a:t>• Estructura de Datos: </a:t>
-            </a:r>
-            <a:r>
-              <a:t>Aplicación práctica y eficiente de listas, diccionarios y objetos.</a:t>
-            </a:r>
-          </a:p>
-          <a:p>
-            <a:pPr>
-              <a:spcAft>
-                <a:spcPts val="800"/>
-              </a:spcAft>
-              <a:defRPr sz="1400">
-                <a:solidFill>
-                  <a:srgbClr val="283038"/>
-                </a:solidFill>
-                <a:latin typeface="Segoe UI"/>
-              </a:defRPr>
-            </a:pPr>
-            <a:r>
-              <a:rPr b="1">
-                <a:solidFill>
-                  <a:srgbClr val="48A9A6"/>
-                </a:solidFill>
-              </a:rPr>
-              <a:t>• Ingeniería en Software: </a:t>
-            </a:r>
-            <a:r>
-              <a:t>Desarrollo aplicando modularidad y buenas prácticas de codificación.</a:t>
-            </a:r>
-          </a:p>
-          <a:p>
-            <a:pPr>
-              <a:spcAft>
-                <a:spcPts val="800"/>
-              </a:spcAft>
-              <a:defRPr sz="1400">
-                <a:solidFill>
-                  <a:srgbClr val="283038"/>
-                </a:solidFill>
-                <a:latin typeface="Segoe UI"/>
-              </a:defRPr>
-            </a:pPr>
-            <a:r>
-              <a:rPr b="1">
-                <a:solidFill>
-                  <a:srgbClr val="48A9A6"/>
-                </a:solidFill>
-              </a:rPr>
-              <a:t>• Robustez del Sistema: </a:t>
-            </a:r>
-            <a:r>
-              <a:t>Prevención total de fallos de ejecución ante entradas del usuario.</a:t>
-            </a:r>
-          </a:p>
-          <a:p>
-            <a:pPr>
-              <a:spcAft>
-                <a:spcPts val="800"/>
-              </a:spcAft>
-              <a:defRPr sz="1400">
-                <a:solidFill>
-                  <a:srgbClr val="283038"/>
-                </a:solidFill>
-                <a:latin typeface="Segoe UI"/>
-              </a:defRPr>
-            </a:pPr>
-            <a:r>
-              <a:rPr b="1">
-                <a:solidFill>
-                  <a:srgbClr val="48A9A6"/>
-                </a:solidFill>
-              </a:rPr>
-              <a:t>• Trabajo en Equipo: </a:t>
-            </a:r>
-            <a:r>
-              <a:t>Colaboración exitosa y articulación del Grupo 7.</a:t>
-            </a:r>
-          </a:p>
-        </p:txBody>
-      </p:sp>
-      <p:sp>
-        <p:nvSpPr>
-          <p:cNvPr id="7" name="Rounded Rectangle 6"/>
-          <p:cNvSpPr/>
-          <p:nvPr/>
-        </p:nvSpPr>
-        <p:spPr>
-          <a:xfrm>
-            <a:off x="6309360" y="1645920"/>
-            <a:ext cx="5120640" cy="4572000"/>
-          </a:xfrm>
-          <a:prstGeom prst="roundRect">
-            <a:avLst/>
-          </a:prstGeom>
-          <a:solidFill>
-            <a:srgbClr val="FFFFFF"/>
-          </a:solidFill>
-          <a:ln w="19050">
-            <a:solidFill>
-              <a:srgbClr val="DCE4EB"/>
-            </a:solidFill>
-          </a:ln>
-        </p:spPr>
-        <p:style>
-          <a:lnRef idx="1">
-            <a:schemeClr val="accent1"/>
-          </a:lnRef>
-          <a:fillRef idx="3">
-            <a:schemeClr val="accent1"/>
-          </a:fillRef>
-          <a:effectRef idx="2">
-            <a:schemeClr val="accent1"/>
-          </a:effectRef>
-          <a:fontRef idx="minor">
-            <a:schemeClr val="lt1"/>
-          </a:fontRef>
-        </p:style>
-        <p:txBody>
-          <a:bodyPr rtlCol="0" anchor="ctr"/>
-          <a:lstStyle/>
-          <a:p>
-            <a:pPr algn="ctr"/>
-            <a:endParaRPr/>
-          </a:p>
-        </p:txBody>
-      </p:sp>
-      <p:sp>
-        <p:nvSpPr>
-          <p:cNvPr id="8" name="TextBox 7"/>
-          <p:cNvSpPr txBox="1"/>
-          <p:nvPr/>
-        </p:nvSpPr>
-        <p:spPr>
-          <a:xfrm>
-            <a:off x="6537960" y="1828800"/>
-            <a:ext cx="4663440" cy="3544560"/>
-          </a:xfrm>
-          <a:prstGeom prst="rect">
-            <a:avLst/>
-          </a:prstGeom>
-          <a:noFill/>
-        </p:spPr>
-        <p:txBody>
-          <a:bodyPr wrap="square">
-            <a:spAutoFit/>
-          </a:bodyPr>
-          <a:lstStyle/>
-          <a:p>
-            <a:pPr>
-              <a:spcAft>
-                <a:spcPts val="1200"/>
-              </a:spcAft>
-              <a:defRPr sz="1900" b="1">
-                <a:solidFill>
-                  <a:srgbClr val="1E3A4C"/>
-                </a:solidFill>
-                <a:latin typeface="Segoe UI"/>
-              </a:defRPr>
-            </a:pPr>
-            <a:r>
-              <a:rPr dirty="0" err="1"/>
-              <a:t>PyPharma</a:t>
-            </a:r>
-            <a:r>
-              <a:rPr dirty="0"/>
-              <a:t> Manager - Grupo 7</a:t>
-            </a:r>
-          </a:p>
-          <a:p>
-            <a:pPr>
-              <a:spcAft>
-                <a:spcPts val="800"/>
-              </a:spcAft>
-              <a:defRPr sz="1400">
-                <a:solidFill>
-                  <a:srgbClr val="283038"/>
-                </a:solidFill>
-                <a:latin typeface="Segoe UI"/>
-              </a:defRPr>
-            </a:pPr>
-            <a:r>
-              <a:rPr b="1" dirty="0">
-                <a:solidFill>
-                  <a:srgbClr val="48A9A6"/>
-                </a:solidFill>
-              </a:rPr>
-              <a:t>• Steven </a:t>
-            </a:r>
-            <a:r>
-              <a:rPr b="1" dirty="0" err="1">
-                <a:solidFill>
-                  <a:srgbClr val="48A9A6"/>
-                </a:solidFill>
-              </a:rPr>
-              <a:t>Montalván</a:t>
-            </a:r>
-            <a:r>
-              <a:rPr b="1" dirty="0">
-                <a:solidFill>
-                  <a:srgbClr val="48A9A6"/>
-                </a:solidFill>
-              </a:rPr>
-              <a:t>: </a:t>
-            </a:r>
-            <a:r>
-              <a:rPr dirty="0"/>
-              <a:t>Desarrollo de </a:t>
-            </a:r>
-            <a:r>
-              <a:rPr dirty="0" err="1"/>
-              <a:t>Modelos</a:t>
-            </a:r>
-            <a:r>
-              <a:rPr dirty="0"/>
-              <a:t> y </a:t>
-            </a:r>
-            <a:r>
-              <a:rPr dirty="0" err="1"/>
-              <a:t>Lógica</a:t>
-            </a:r>
-            <a:r>
-              <a:rPr dirty="0"/>
-              <a:t> de </a:t>
-            </a:r>
-            <a:r>
-              <a:rPr dirty="0" err="1"/>
-              <a:t>Pedidos</a:t>
-            </a:r>
-            <a:r>
-              <a:rPr dirty="0"/>
-              <a:t>.</a:t>
-            </a:r>
-          </a:p>
-          <a:p>
-            <a:pPr>
-              <a:spcAft>
-                <a:spcPts val="800"/>
-              </a:spcAft>
-              <a:defRPr sz="1400">
-                <a:solidFill>
-                  <a:srgbClr val="283038"/>
-                </a:solidFill>
-                <a:latin typeface="Segoe UI"/>
-              </a:defRPr>
-            </a:pPr>
-            <a:r>
-              <a:rPr b="1" dirty="0">
-                <a:solidFill>
-                  <a:srgbClr val="48A9A6"/>
-                </a:solidFill>
-              </a:rPr>
-              <a:t>• Jonathan Bravo: </a:t>
-            </a:r>
-            <a:r>
-              <a:rPr dirty="0" err="1"/>
-              <a:t>Módulo</a:t>
-            </a:r>
-            <a:r>
-              <a:rPr dirty="0"/>
-              <a:t> de </a:t>
-            </a:r>
-            <a:r>
-              <a:rPr dirty="0" err="1"/>
-              <a:t>Persistencia</a:t>
-            </a:r>
-            <a:r>
-              <a:rPr dirty="0"/>
-              <a:t> y </a:t>
-            </a:r>
-            <a:r>
-              <a:rPr dirty="0" err="1"/>
-              <a:t>Gestión</a:t>
-            </a:r>
-            <a:r>
-              <a:rPr dirty="0"/>
-              <a:t> de </a:t>
-            </a:r>
-            <a:r>
-              <a:rPr dirty="0" err="1"/>
-              <a:t>Archivos</a:t>
-            </a:r>
-            <a:r>
-              <a:rPr dirty="0"/>
-              <a:t>.</a:t>
-            </a:r>
-          </a:p>
-          <a:p>
-            <a:pPr>
-              <a:spcAft>
-                <a:spcPts val="800"/>
-              </a:spcAft>
-              <a:defRPr sz="1400">
-                <a:solidFill>
-                  <a:srgbClr val="283038"/>
-                </a:solidFill>
-                <a:latin typeface="Segoe UI"/>
-              </a:defRPr>
-            </a:pPr>
-            <a:r>
-              <a:rPr b="1" dirty="0">
-                <a:solidFill>
-                  <a:srgbClr val="48A9A6"/>
-                </a:solidFill>
-              </a:rPr>
-              <a:t>• Sebastián Nevárez: </a:t>
-            </a:r>
-            <a:r>
-              <a:rPr dirty="0" err="1"/>
-              <a:t>Interfaz</a:t>
-            </a:r>
-            <a:r>
-              <a:rPr dirty="0"/>
-              <a:t> </a:t>
-            </a:r>
-            <a:r>
-              <a:rPr dirty="0" err="1"/>
-              <a:t>por</a:t>
-            </a:r>
-            <a:r>
-              <a:rPr dirty="0"/>
-              <a:t> Consola y Punto de Entrada.</a:t>
-            </a:r>
-          </a:p>
-          <a:p>
-            <a:pPr>
-              <a:spcAft>
-                <a:spcPts val="800"/>
-              </a:spcAft>
-              <a:defRPr sz="1400">
-                <a:solidFill>
-                  <a:srgbClr val="283038"/>
-                </a:solidFill>
-                <a:latin typeface="Segoe UI"/>
-              </a:defRPr>
-            </a:pPr>
-            <a:r>
-              <a:rPr b="1" dirty="0">
-                <a:solidFill>
-                  <a:srgbClr val="48A9A6"/>
-                </a:solidFill>
-              </a:rPr>
-              <a:t>• Elías Balladares: </a:t>
-            </a:r>
-            <a:r>
-              <a:rPr dirty="0" err="1"/>
-              <a:t>Validaciones</a:t>
-            </a:r>
-            <a:r>
-              <a:rPr dirty="0"/>
-              <a:t>, </a:t>
-            </a:r>
-            <a:r>
-              <a:rPr dirty="0" err="1"/>
-              <a:t>Búsquedas</a:t>
-            </a:r>
-            <a:r>
-              <a:rPr dirty="0"/>
-              <a:t> y </a:t>
-            </a:r>
-            <a:r>
-              <a:rPr dirty="0" err="1"/>
-              <a:t>Pruebas</a:t>
-            </a:r>
-            <a:r>
-              <a:rPr dirty="0"/>
-              <a:t> </a:t>
-            </a:r>
-            <a:r>
-              <a:rPr dirty="0" err="1"/>
-              <a:t>Integrales</a:t>
-            </a:r>
-            <a:r>
-              <a:rPr dirty="0"/>
-              <a:t>.</a:t>
-            </a:r>
-            <a:endParaRPr lang="es-419" dirty="0"/>
-          </a:p>
-          <a:p>
-            <a:pPr>
-              <a:spcAft>
-                <a:spcPts val="800"/>
-              </a:spcAft>
-              <a:defRPr sz="1400">
-                <a:solidFill>
-                  <a:srgbClr val="283038"/>
-                </a:solidFill>
-                <a:latin typeface="Segoe UI"/>
-              </a:defRPr>
-            </a:pPr>
-            <a:endParaRPr dirty="0"/>
-          </a:p>
-          <a:p>
-            <a:pPr algn="ctr">
-              <a:spcAft>
-                <a:spcPts val="800"/>
-              </a:spcAft>
-              <a:defRPr sz="1400">
-                <a:solidFill>
-                  <a:srgbClr val="283038"/>
-                </a:solidFill>
-                <a:latin typeface="Segoe UI"/>
-              </a:defRPr>
-            </a:pPr>
-            <a:r>
-              <a:rPr sz="3600" b="1" dirty="0">
-                <a:solidFill>
-                  <a:srgbClr val="48A9A6"/>
-                </a:solidFill>
-              </a:rPr>
-              <a:t>¡</a:t>
-            </a:r>
-            <a:r>
-              <a:rPr sz="3600" b="1" dirty="0" err="1">
-                <a:solidFill>
-                  <a:srgbClr val="48A9A6"/>
-                </a:solidFill>
-              </a:rPr>
-              <a:t>Muchas</a:t>
-            </a:r>
-            <a:r>
-              <a:rPr sz="3600" b="1" dirty="0">
-                <a:solidFill>
-                  <a:srgbClr val="48A9A6"/>
-                </a:solidFill>
-              </a:rPr>
-              <a:t> Gracias!</a:t>
-            </a:r>
-            <a:endParaRPr sz="3600" dirty="0"/>
-          </a:p>
-        </p:txBody>
-      </p:sp>
+        </p:spPr>
+      </p:pic>
     </p:spTree>
   </p:cSld>
   <p:clrMapOvr>

--- a/Presentacion.pptx
+++ b/Presentacion.pptx
@@ -7,14 +7,14 @@
   <p:sldIdLst>
     <p:sldId id="256" r:id="rId2"/>
     <p:sldId id="257" r:id="rId3"/>
-    <p:sldId id="264" r:id="rId14"/>
-    <p:sldId id="258" r:id="rId4"/>
-    <p:sldId id="261" r:id="rId7"/>
-    <p:sldId id="262" r:id="rId8"/>
-    <p:sldId id="260" r:id="rId6"/>
-    <p:sldId id="259" r:id="rId5"/>
-    <p:sldId id="265" r:id="rId15"/>
-    <p:sldId id="263" r:id="rId9"/>
+    <p:sldId id="264" r:id="rId4"/>
+    <p:sldId id="258" r:id="rId5"/>
+    <p:sldId id="261" r:id="rId6"/>
+    <p:sldId id="262" r:id="rId7"/>
+    <p:sldId id="260" r:id="rId8"/>
+    <p:sldId id="259" r:id="rId9"/>
+    <p:sldId id="265" r:id="rId10"/>
+    <p:sldId id="263" r:id="rId11"/>
   </p:sldIdLst>
   <p:sldSz cx="12192000" cy="6858000"/>
   <p:notesSz cx="6858000" cy="9144000"/>
@@ -3491,7 +3491,7 @@
 </file>
 
 <file path=ppt/slides/slide10.xml><?xml version="1.0" encoding="utf-8"?>
-<p:sld xmlns:a="http://schemas.openxmlformats.org/drawingml/2006/main" xmlns:p="http://schemas.openxmlformats.org/presentationml/2006/main" xmlns:r="http://schemas.openxmlformats.org/officeDocument/2006/relationships">
+<p:sld xmlns:a="http://schemas.openxmlformats.org/drawingml/2006/main" xmlns:r="http://schemas.openxmlformats.org/officeDocument/2006/relationships" xmlns:p="http://schemas.openxmlformats.org/presentationml/2006/main">
   <p:cSld>
     <p:spTree>
       <p:nvGrpSpPr>
@@ -3499,7 +3499,14 @@
         <p:cNvGrpSpPr/>
         <p:nvPr/>
       </p:nvGrpSpPr>
-      <p:grpSpPr/>
+      <p:grpSpPr>
+        <a:xfrm>
+          <a:off x="0" y="0"/>
+          <a:ext cx="0" cy="0"/>
+          <a:chOff x="0" y="0"/>
+          <a:chExt cx="0" cy="0"/>
+        </a:xfrm>
+      </p:grpSpPr>
       <p:sp>
         <p:nvSpPr>
           <p:cNvPr id="2" name="Rectangle 1"/>
@@ -3540,6 +3547,7 @@
           <a:lstStyle/>
           <a:p>
             <a:pPr algn="ctr"/>
+            <a:endParaRPr lang="es-EC" noProof="0" dirty="0"/>
           </a:p>
         </p:txBody>
       </p:sp>
@@ -3574,11 +3582,15 @@
               </a:defRPr>
             </a:pPr>
             <a:r>
-              <a:t>[3. LA SUPERFICIE] Interfaz Web HTML5 de Apoyo</a:t>
-            </a:r>
-          </a:p>
-          <a:p>
-            <a:pPr>
+              <a:rPr lang="es-EC" noProof="0" dirty="0"/>
+              <a:t>Conclusiones del Proyecto</a:t>
+            </a:r>
+          </a:p>
+          <a:p>
+            <a:pPr>
+              <a:spcBef>
+                <a:spcPts val="400"/>
+              </a:spcBef>
               <a:defRPr sz="1500">
                 <a:solidFill>
                   <a:srgbClr val="6E7882"/>
@@ -3587,7 +3599,8 @@
               </a:defRPr>
             </a:pPr>
             <a:r>
-              <a:t>Portafolio visual moderno y documentación como soporte para la exposición</a:t>
+              <a:rPr lang="es-EC" noProof="0" dirty="0"/>
+              <a:t>Logros académicos y síntesis técnica de PyPharma Manager</a:t>
             </a:r>
           </a:p>
         </p:txBody>
@@ -3632,6 +3645,7 @@
           <a:lstStyle/>
           <a:p>
             <a:pPr algn="ctr"/>
+            <a:endParaRPr lang="es-EC" noProof="0" dirty="0"/>
           </a:p>
         </p:txBody>
       </p:sp>
@@ -3677,6 +3691,7 @@
           <a:lstStyle/>
           <a:p>
             <a:pPr algn="ctr"/>
+            <a:endParaRPr lang="es-EC" noProof="0" dirty="0"/>
           </a:p>
         </p:txBody>
       </p:sp>
@@ -3703,6 +3718,9 @@
           <a:lstStyle/>
           <a:p>
             <a:pPr>
+              <a:spcAft>
+                <a:spcPts val="1200"/>
+              </a:spcAft>
               <a:defRPr sz="1900" b="1">
                 <a:solidFill>
                   <a:srgbClr val="1E3A4C"/>
@@ -3711,12 +3729,16 @@
               </a:defRPr>
             </a:pPr>
             <a:r>
-              <a:t>Diseño y Desarrollo Web</a:t>
-            </a:r>
-          </a:p>
-          <a:p>
-            <a:pPr>
-              <a:defRPr sz="1400" b="0">
+              <a:rPr lang="es-EC" noProof="0" dirty="0"/>
+              <a:t>Logros Académicos</a:t>
+            </a:r>
+          </a:p>
+          <a:p>
+            <a:pPr>
+              <a:spcAft>
+                <a:spcPts val="800"/>
+              </a:spcAft>
+              <a:defRPr sz="1400">
                 <a:solidFill>
                   <a:srgbClr val="283038"/>
                 </a:solidFill>
@@ -3724,12 +3746,24 @@
               </a:defRPr>
             </a:pPr>
             <a:r>
-              <a:t>• Cumplimiento Académico: Desarrollo de página web ('index.html' y 'presentacion.html') según requisitos de la asignatura.</a:t>
-            </a:r>
-          </a:p>
-          <a:p>
-            <a:pPr>
-              <a:defRPr sz="1400" b="0">
+              <a:rPr lang="es-EC" b="1" noProof="0" dirty="0">
+                <a:solidFill>
+                  <a:srgbClr val="48A9A6"/>
+                </a:solidFill>
+              </a:rPr>
+              <a:t>• Estructura de Datos: </a:t>
+            </a:r>
+            <a:r>
+              <a:rPr lang="es-EC" noProof="0" dirty="0"/>
+              <a:t>Aplicación práctica y eficiente de listas, diccionarios y objetos.</a:t>
+            </a:r>
+          </a:p>
+          <a:p>
+            <a:pPr>
+              <a:spcAft>
+                <a:spcPts val="800"/>
+              </a:spcAft>
+              <a:defRPr sz="1400">
                 <a:solidFill>
                   <a:srgbClr val="283038"/>
                 </a:solidFill>
@@ -3737,12 +3771,24 @@
               </a:defRPr>
             </a:pPr>
             <a:r>
-              <a:t>• Estética Moderna: Estilos CSS avanzados con gradientes, tipografía Google Fonts y diseño limpio y responsivo.</a:t>
-            </a:r>
-          </a:p>
-          <a:p>
-            <a:pPr>
-              <a:defRPr sz="1400" b="0">
+              <a:rPr lang="es-EC" b="1" noProof="0" dirty="0">
+                <a:solidFill>
+                  <a:srgbClr val="48A9A6"/>
+                </a:solidFill>
+              </a:rPr>
+              <a:t>• Ingeniería en Software: </a:t>
+            </a:r>
+            <a:r>
+              <a:rPr lang="es-EC" noProof="0" dirty="0"/>
+              <a:t>Desarrollo aplicando modularidad y buenas prácticas de codificación.</a:t>
+            </a:r>
+          </a:p>
+          <a:p>
+            <a:pPr>
+              <a:spcAft>
+                <a:spcPts val="800"/>
+              </a:spcAft>
+              <a:defRPr sz="1400">
                 <a:solidFill>
                   <a:srgbClr val="283038"/>
                 </a:solidFill>
@@ -3750,7 +3796,41 @@
               </a:defRPr>
             </a:pPr>
             <a:r>
-              <a:t>• Rol de Apoyo: Actúa como soporte visual y documental mientras el sistema principal corre de forma nativa en Python.</a:t>
+              <a:rPr lang="es-EC" b="1" noProof="0" dirty="0">
+                <a:solidFill>
+                  <a:srgbClr val="48A9A6"/>
+                </a:solidFill>
+              </a:rPr>
+              <a:t>• Robustez del Sistema: </a:t>
+            </a:r>
+            <a:r>
+              <a:rPr lang="es-EC" noProof="0" dirty="0"/>
+              <a:t>Prevención total de fallos de ejecución ante entradas del usuario.</a:t>
+            </a:r>
+          </a:p>
+          <a:p>
+            <a:pPr>
+              <a:spcAft>
+                <a:spcPts val="800"/>
+              </a:spcAft>
+              <a:defRPr sz="1400">
+                <a:solidFill>
+                  <a:srgbClr val="283038"/>
+                </a:solidFill>
+                <a:latin typeface="Segoe UI"/>
+              </a:defRPr>
+            </a:pPr>
+            <a:r>
+              <a:rPr lang="es-EC" b="1" noProof="0" dirty="0">
+                <a:solidFill>
+                  <a:srgbClr val="48A9A6"/>
+                </a:solidFill>
+              </a:rPr>
+              <a:t>• Trabajo en Equipo: </a:t>
+            </a:r>
+            <a:r>
+              <a:rPr lang="es-EC" noProof="0" dirty="0"/>
+              <a:t>Colaboración exitosa y articulación del Grupo 7.</a:t>
             </a:r>
           </a:p>
         </p:txBody>
@@ -3797,6 +3877,7 @@
           <a:lstStyle/>
           <a:p>
             <a:pPr algn="ctr"/>
+            <a:endParaRPr lang="es-EC" noProof="0" dirty="0"/>
           </a:p>
         </p:txBody>
       </p:sp>
@@ -3809,7 +3890,7 @@
         <p:spPr>
           <a:xfrm>
             <a:off x="6537960" y="1828800"/>
-            <a:ext cx="4663440" cy="4206240"/>
+            <a:ext cx="4663440" cy="3862596"/>
           </a:xfrm>
           <a:prstGeom prst="rect">
             <a:avLst/>
@@ -3823,6 +3904,9 @@
           <a:lstStyle/>
           <a:p>
             <a:pPr>
+              <a:spcAft>
+                <a:spcPts val="1200"/>
+              </a:spcAft>
               <a:defRPr sz="1900" b="1">
                 <a:solidFill>
                   <a:srgbClr val="1E3A4C"/>
@@ -3831,12 +3915,16 @@
               </a:defRPr>
             </a:pPr>
             <a:r>
-              <a:t>Contenido del Portal HTML5</a:t>
-            </a:r>
-          </a:p>
-          <a:p>
-            <a:pPr>
-              <a:defRPr sz="1400" b="0">
+              <a:rPr lang="es-EC" noProof="0" dirty="0"/>
+              <a:t>PyPharma Manager - Grupo 7</a:t>
+            </a:r>
+          </a:p>
+          <a:p>
+            <a:pPr>
+              <a:spcAft>
+                <a:spcPts val="800"/>
+              </a:spcAft>
+              <a:defRPr sz="1400">
                 <a:solidFill>
                   <a:srgbClr val="283038"/>
                 </a:solidFill>
@@ -3844,12 +3932,24 @@
               </a:defRPr>
             </a:pPr>
             <a:r>
-              <a:t>• Portada Institucional: Universidad Estatal de Milagro, facultad, asignatura, docente e integrantes del Grupo 7.</a:t>
-            </a:r>
-          </a:p>
-          <a:p>
-            <a:pPr>
-              <a:defRPr sz="1400" b="0">
+              <a:rPr lang="es-EC" b="1" noProof="0" dirty="0">
+                <a:solidFill>
+                  <a:srgbClr val="48A9A6"/>
+                </a:solidFill>
+              </a:rPr>
+              <a:t>• Steven Montalván: </a:t>
+            </a:r>
+            <a:r>
+              <a:rPr lang="es-EC" noProof="0" dirty="0"/>
+              <a:t>Desarrollo de Modelos y Lógica de Pedidos.</a:t>
+            </a:r>
+          </a:p>
+          <a:p>
+            <a:pPr>
+              <a:spcAft>
+                <a:spcPts val="800"/>
+              </a:spcAft>
+              <a:defRPr sz="1400">
                 <a:solidFill>
                   <a:srgbClr val="283038"/>
                 </a:solidFill>
@@ -3857,12 +3957,24 @@
               </a:defRPr>
             </a:pPr>
             <a:r>
-              <a:t>• Documentación Técnica: Objetivo del sistema, descripción del problema y funcionalidades clave orientadas a objetos.</a:t>
-            </a:r>
-          </a:p>
-          <a:p>
-            <a:pPr>
-              <a:defRPr sz="1400" b="0">
+              <a:rPr lang="es-EC" b="1" noProof="0" dirty="0">
+                <a:solidFill>
+                  <a:srgbClr val="48A9A6"/>
+                </a:solidFill>
+              </a:rPr>
+              <a:t>• Jonathan Bravo: </a:t>
+            </a:r>
+            <a:r>
+              <a:rPr lang="es-EC" noProof="0" dirty="0"/>
+              <a:t>Módulo de Persistencia y Gestión de Archivos.</a:t>
+            </a:r>
+          </a:p>
+          <a:p>
+            <a:pPr>
+              <a:spcAft>
+                <a:spcPts val="800"/>
+              </a:spcAft>
+              <a:defRPr sz="1400">
                 <a:solidFill>
                   <a:srgbClr val="283038"/>
                 </a:solidFill>
@@ -3870,11 +3982,185 @@
               </a:defRPr>
             </a:pPr>
             <a:r>
-              <a:t>• Evidencia Visual: Capturas de pantalla del sistema en Python, tecnologías utilizadas y conclusiones generales.</a:t>
-            </a:r>
-          </a:p>
-        </p:txBody>
-      </p:sp>
+              <a:rPr lang="es-EC" b="1" noProof="0" dirty="0">
+                <a:solidFill>
+                  <a:srgbClr val="48A9A6"/>
+                </a:solidFill>
+              </a:rPr>
+              <a:t>• Sebastián Nevárez: </a:t>
+            </a:r>
+            <a:r>
+              <a:rPr lang="es-EC" noProof="0" dirty="0"/>
+              <a:t>Interfaz por Consola y Punto de Entrada.</a:t>
+            </a:r>
+          </a:p>
+          <a:p>
+            <a:pPr>
+              <a:spcAft>
+                <a:spcPts val="800"/>
+              </a:spcAft>
+              <a:defRPr sz="1400">
+                <a:solidFill>
+                  <a:srgbClr val="283038"/>
+                </a:solidFill>
+                <a:latin typeface="Segoe UI"/>
+              </a:defRPr>
+            </a:pPr>
+            <a:r>
+              <a:rPr lang="es-EC" b="1" noProof="0" dirty="0">
+                <a:solidFill>
+                  <a:srgbClr val="48A9A6"/>
+                </a:solidFill>
+              </a:rPr>
+              <a:t>• Elías Balladares: </a:t>
+            </a:r>
+            <a:r>
+              <a:rPr lang="es-EC" noProof="0" dirty="0"/>
+              <a:t>Validaciones, Búsquedas y Pruebas Integrales.</a:t>
+            </a:r>
+          </a:p>
+          <a:p>
+            <a:pPr>
+              <a:spcAft>
+                <a:spcPts val="800"/>
+              </a:spcAft>
+              <a:defRPr sz="1400">
+                <a:solidFill>
+                  <a:srgbClr val="283038"/>
+                </a:solidFill>
+                <a:latin typeface="Segoe UI"/>
+              </a:defRPr>
+            </a:pPr>
+            <a:endParaRPr lang="es-EC" noProof="0" dirty="0"/>
+          </a:p>
+          <a:p>
+            <a:pPr>
+              <a:spcAft>
+                <a:spcPts val="800"/>
+              </a:spcAft>
+              <a:defRPr sz="1400">
+                <a:solidFill>
+                  <a:srgbClr val="283038"/>
+                </a:solidFill>
+                <a:latin typeface="Segoe UI"/>
+              </a:defRPr>
+            </a:pPr>
+            <a:endParaRPr lang="es-EC" noProof="0" dirty="0"/>
+          </a:p>
+          <a:p>
+            <a:pPr algn="ctr">
+              <a:spcAft>
+                <a:spcPts val="800"/>
+              </a:spcAft>
+              <a:defRPr sz="1400">
+                <a:solidFill>
+                  <a:srgbClr val="283038"/>
+                </a:solidFill>
+                <a:latin typeface="Segoe UI"/>
+              </a:defRPr>
+            </a:pPr>
+            <a:r>
+              <a:rPr lang="es-EC" sz="3600" b="1" noProof="0" dirty="0">
+                <a:solidFill>
+                  <a:srgbClr val="48A9A6"/>
+                </a:solidFill>
+              </a:rPr>
+              <a:t>¡Muchas Gracias!</a:t>
+            </a:r>
+            <a:endParaRPr lang="es-EC" sz="3600" noProof="0" dirty="0"/>
+          </a:p>
+        </p:txBody>
+      </p:sp>
+      <p:pic>
+        <p:nvPicPr>
+          <p:cNvPr id="12" name="Picture 11">
+            <a:extLst>
+              <a:ext uri="{FF2B5EF4-FFF2-40B4-BE49-F238E27FC236}">
+                <a16:creationId xmlns:a16="http://schemas.microsoft.com/office/drawing/2014/main" id="{F3573A79-5A0A-A03C-A141-3161F4DF0D42}"/>
+              </a:ext>
+            </a:extLst>
+          </p:cNvPr>
+          <p:cNvPicPr>
+            <a:picLocks noChangeAspect="1"/>
+          </p:cNvPicPr>
+          <p:nvPr/>
+        </p:nvPicPr>
+        <p:blipFill>
+          <a:blip r:embed="rId2"/>
+          <a:stretch>
+            <a:fillRect/>
+          </a:stretch>
+        </p:blipFill>
+        <p:spPr>
+          <a:xfrm>
+            <a:off x="3230087" y="4883294"/>
+            <a:ext cx="1571844" cy="828791"/>
+          </a:xfrm>
+          <a:prstGeom prst="rect">
+            <a:avLst/>
+          </a:prstGeom>
+        </p:spPr>
+      </p:pic>
+      <p:pic>
+        <p:nvPicPr>
+          <p:cNvPr id="9" name="Picture 8" descr="Visual Studio Code - Wikipedia">
+            <a:extLst>
+              <a:ext uri="{FF2B5EF4-FFF2-40B4-BE49-F238E27FC236}">
+                <a16:creationId xmlns:a16="http://schemas.microsoft.com/office/drawing/2014/main" id="{A31DFA2B-11C2-D1A1-2594-7D17B35902A9}"/>
+              </a:ext>
+            </a:extLst>
+          </p:cNvPr>
+          <p:cNvPicPr>
+            <a:picLocks noChangeAspect="1"/>
+          </p:cNvPicPr>
+          <p:nvPr/>
+        </p:nvPicPr>
+        <p:blipFill>
+          <a:blip r:embed="rId3"/>
+          <a:stretch>
+            <a:fillRect/>
+          </a:stretch>
+        </p:blipFill>
+        <p:spPr>
+          <a:xfrm flipV="1">
+            <a:off x="2454876" y="4990602"/>
+            <a:ext cx="581384" cy="581384"/>
+          </a:xfrm>
+          <a:prstGeom prst="rect">
+            <a:avLst/>
+          </a:prstGeom>
+        </p:spPr>
+      </p:pic>
+      <p:pic>
+        <p:nvPicPr>
+          <p:cNvPr id="10" name="Picture 9" descr="Python (programming language) - Wikipedia">
+            <a:extLst>
+              <a:ext uri="{FF2B5EF4-FFF2-40B4-BE49-F238E27FC236}">
+                <a16:creationId xmlns:a16="http://schemas.microsoft.com/office/drawing/2014/main" id="{B104E267-F4F4-405D-5A57-0D73D4DCF178}"/>
+              </a:ext>
+            </a:extLst>
+          </p:cNvPr>
+          <p:cNvPicPr>
+            <a:picLocks noChangeAspect="1"/>
+          </p:cNvPicPr>
+          <p:nvPr/>
+        </p:nvPicPr>
+        <p:blipFill>
+          <a:blip r:embed="rId4"/>
+          <a:stretch>
+            <a:fillRect/>
+          </a:stretch>
+        </p:blipFill>
+        <p:spPr>
+          <a:xfrm>
+            <a:off x="1675371" y="4986308"/>
+            <a:ext cx="585678" cy="585678"/>
+          </a:xfrm>
+          <a:prstGeom prst="rect">
+            <a:avLst/>
+          </a:prstGeom>
+        </p:spPr>
+      </p:pic>
     </p:spTree>
   </p:cSld>
   <p:clrMapOvr>
@@ -3884,7 +4170,7 @@
 </file>
 
 <file path=ppt/slides/slide2.xml><?xml version="1.0" encoding="utf-8"?>
-<p:sld xmlns:a="http://schemas.openxmlformats.org/drawingml/2006/main" xmlns:p="http://schemas.openxmlformats.org/presentationml/2006/main" xmlns:r="http://schemas.openxmlformats.org/officeDocument/2006/relationships">
+<p:sld xmlns:a="http://schemas.openxmlformats.org/drawingml/2006/main" xmlns:r="http://schemas.openxmlformats.org/officeDocument/2006/relationships" xmlns:p="http://schemas.openxmlformats.org/presentationml/2006/main">
   <p:cSld>
     <p:spTree>
       <p:nvGrpSpPr>
@@ -3892,7 +4178,14 @@
         <p:cNvGrpSpPr/>
         <p:nvPr/>
       </p:nvGrpSpPr>
-      <p:grpSpPr/>
+      <p:grpSpPr>
+        <a:xfrm>
+          <a:off x="0" y="0"/>
+          <a:ext cx="0" cy="0"/>
+          <a:chOff x="0" y="0"/>
+          <a:chExt cx="0" cy="0"/>
+        </a:xfrm>
+      </p:grpSpPr>
       <p:sp>
         <p:nvSpPr>
           <p:cNvPr id="2" name="Rectangle 1"/>
@@ -3933,6 +4226,7 @@
           <a:lstStyle/>
           <a:p>
             <a:pPr algn="ctr"/>
+            <a:endParaRPr lang="es-EC" noProof="0" dirty="0"/>
           </a:p>
         </p:txBody>
       </p:sp>
@@ -3967,11 +4261,15 @@
               </a:defRPr>
             </a:pPr>
             <a:r>
-              <a:t>Jerarquía del Sistema: De la Raíz a la Superficie</a:t>
-            </a:r>
-          </a:p>
-          <a:p>
-            <a:pPr>
+              <a:rPr lang="es-EC" noProof="0" dirty="0"/>
+              <a:t>¿Qué es PyPharma Manager?</a:t>
+            </a:r>
+          </a:p>
+          <a:p>
+            <a:pPr>
+              <a:spcBef>
+                <a:spcPts val="400"/>
+              </a:spcBef>
               <a:defRPr sz="1500">
                 <a:solidFill>
                   <a:srgbClr val="6E7882"/>
@@ -3980,7 +4278,8 @@
               </a:defRPr>
             </a:pPr>
             <a:r>
-              <a:t>Estructura en capas y flujo bottom-up para la presentación del proyecto</a:t>
+              <a:rPr lang="es-EC" noProof="0" dirty="0"/>
+              <a:t>Solución integral para la administración y control farmacéutico</a:t>
             </a:r>
           </a:p>
         </p:txBody>
@@ -4025,6 +4324,7 @@
           <a:lstStyle/>
           <a:p>
             <a:pPr algn="ctr"/>
+            <a:endParaRPr lang="es-EC" noProof="0" dirty="0"/>
           </a:p>
         </p:txBody>
       </p:sp>
@@ -4036,8 +4336,8 @@
         </p:nvSpPr>
         <p:spPr>
           <a:xfrm>
-            <a:off x="731520" y="1600000"/>
-            <a:ext cx="10728960" cy="1380000"/>
+            <a:off x="731520" y="1645920"/>
+            <a:ext cx="5120640" cy="4572000"/>
           </a:xfrm>
           <a:prstGeom prst="roundRect">
             <a:avLst/>
@@ -4045,9 +4345,9 @@
           <a:solidFill>
             <a:srgbClr val="FFFFFF"/>
           </a:solidFill>
-          <a:ln w="25400">
+          <a:ln w="19050">
             <a:solidFill>
-              <a:srgbClr val="48A9A6"/>
+              <a:srgbClr val="DCE4EB"/>
             </a:solidFill>
           </a:ln>
         </p:spPr>
@@ -4066,11 +4366,41 @@
           </a:fontRef>
         </p:style>
         <p:txBody>
-          <a:bodyPr rtlCol="0" anchor="ctr" wrap="square" lIns="190500" tIns="152400" rIns="190500" bIns="152400"/>
-          <a:lstStyle/>
-          <a:p>
-            <a:pPr algn="ctr">
-              <a:defRPr sz="1700" b="1">
+          <a:bodyPr rtlCol="0" anchor="ctr"/>
+          <a:lstStyle/>
+          <a:p>
+            <a:pPr algn="ctr"/>
+            <a:endParaRPr lang="es-EC" noProof="0" dirty="0"/>
+          </a:p>
+        </p:txBody>
+      </p:sp>
+      <p:sp>
+        <p:nvSpPr>
+          <p:cNvPr id="6" name="TextBox 5"/>
+          <p:cNvSpPr txBox="1"/>
+          <p:nvPr/>
+        </p:nvSpPr>
+        <p:spPr>
+          <a:xfrm>
+            <a:off x="960120" y="1828800"/>
+            <a:ext cx="4663440" cy="2569934"/>
+          </a:xfrm>
+          <a:prstGeom prst="rect">
+            <a:avLst/>
+          </a:prstGeom>
+          <a:noFill/>
+        </p:spPr>
+        <p:txBody>
+          <a:bodyPr wrap="square">
+            <a:spAutoFit/>
+          </a:bodyPr>
+          <a:lstStyle/>
+          <a:p>
+            <a:pPr>
+              <a:spcAft>
+                <a:spcPts val="1200"/>
+              </a:spcAft>
+              <a:defRPr sz="1900" b="1">
                 <a:solidFill>
                   <a:srgbClr val="1E3A4C"/>
                 </a:solidFill>
@@ -4078,47 +4408,122 @@
               </a:defRPr>
             </a:pPr>
             <a:r>
-              <a:t>🔵  3. LA SUPERFICIE: Interfaz Visual y Consola (Capa de Presentación / UI)</a:t>
-            </a:r>
-          </a:p>
-          <a:p>
-            <a:pPr>
-              <a:defRPr sz="1300">
-                <a:solidFill>
-                  <a:srgbClr val="333333"/>
-                </a:solidFill>
-                <a:latin typeface="Segoe UI"/>
-              </a:defRPr>
-            </a:pPr>
-            <a:r>
-              <a:t>• Interfaz Operativa: Menús interactivos por consola ('menus.py' y 'main.py') con validaciones activas y limpieza de pantalla.</a:t>
-            </a:r>
-          </a:p>
-          <a:p>
-            <a:pPr>
-              <a:defRPr sz="1300">
-                <a:solidFill>
-                  <a:srgbClr val="333333"/>
-                </a:solidFill>
-                <a:latin typeface="Segoe UI"/>
-              </a:defRPr>
-            </a:pPr>
-            <a:r>
-              <a:t>• Soporte Web HTML5: Página web de apoyo ('index.html' y 'presentacion.html') que documenta visualmente el proyecto.</a:t>
-            </a:r>
-          </a:p>
-        </p:txBody>
-      </p:sp>
-      <p:sp>
-        <p:nvSpPr>
-          <p:cNvPr id="6" name="Rounded Rectangle 5"/>
+              <a:rPr lang="es-EC" noProof="0" dirty="0"/>
+              <a:t>Propuesta de Valor</a:t>
+            </a:r>
+          </a:p>
+          <a:p>
+            <a:pPr>
+              <a:spcAft>
+                <a:spcPts val="800"/>
+              </a:spcAft>
+              <a:defRPr sz="1400">
+                <a:solidFill>
+                  <a:srgbClr val="283038"/>
+                </a:solidFill>
+                <a:latin typeface="Segoe UI"/>
+              </a:defRPr>
+            </a:pPr>
+            <a:r>
+              <a:rPr lang="es-EC" b="1" noProof="0" dirty="0">
+                <a:solidFill>
+                  <a:srgbClr val="48A9A6"/>
+                </a:solidFill>
+              </a:rPr>
+              <a:t>• Control de Inventario: </a:t>
+            </a:r>
+            <a:r>
+              <a:rPr lang="es-EC" noProof="0" dirty="0"/>
+              <a:t>Administración eficiente del catálogo de medicamentos en tiempo real.</a:t>
+            </a:r>
+          </a:p>
+          <a:p>
+            <a:pPr>
+              <a:spcAft>
+                <a:spcPts val="800"/>
+              </a:spcAft>
+              <a:defRPr sz="1400">
+                <a:solidFill>
+                  <a:srgbClr val="283038"/>
+                </a:solidFill>
+                <a:latin typeface="Segoe UI"/>
+              </a:defRPr>
+            </a:pPr>
+            <a:r>
+              <a:rPr lang="es-EC" b="1" noProof="0" dirty="0">
+                <a:solidFill>
+                  <a:srgbClr val="48A9A6"/>
+                </a:solidFill>
+              </a:rPr>
+              <a:t>• Gestión de Ventas: </a:t>
+            </a:r>
+            <a:r>
+              <a:rPr lang="es-EC" noProof="0" dirty="0"/>
+              <a:t>Registro rápido de pedidos de clientes con cálculo automático de totales.</a:t>
+            </a:r>
+          </a:p>
+          <a:p>
+            <a:pPr>
+              <a:spcAft>
+                <a:spcPts val="800"/>
+              </a:spcAft>
+              <a:defRPr sz="1400">
+                <a:solidFill>
+                  <a:srgbClr val="283038"/>
+                </a:solidFill>
+                <a:latin typeface="Segoe UI"/>
+              </a:defRPr>
+            </a:pPr>
+            <a:r>
+              <a:rPr lang="es-EC" b="1" noProof="0" dirty="0">
+                <a:solidFill>
+                  <a:srgbClr val="48A9A6"/>
+                </a:solidFill>
+              </a:rPr>
+              <a:t>• Persistencia Confiable: </a:t>
+            </a:r>
+            <a:r>
+              <a:rPr lang="es-EC" noProof="0" dirty="0"/>
+              <a:t>Almacenamiento seguro y continuo en archivos de texto planos (TXT).</a:t>
+            </a:r>
+          </a:p>
+          <a:p>
+            <a:pPr>
+              <a:spcAft>
+                <a:spcPts val="800"/>
+              </a:spcAft>
+              <a:defRPr sz="1400">
+                <a:solidFill>
+                  <a:srgbClr val="283038"/>
+                </a:solidFill>
+                <a:latin typeface="Segoe UI"/>
+              </a:defRPr>
+            </a:pPr>
+            <a:r>
+              <a:rPr lang="es-EC" b="1" noProof="0" dirty="0">
+                <a:solidFill>
+                  <a:srgbClr val="48A9A6"/>
+                </a:solidFill>
+              </a:rPr>
+              <a:t>• Precisión Operativa: </a:t>
+            </a:r>
+            <a:r>
+              <a:rPr lang="es-EC" noProof="0" dirty="0"/>
+              <a:t>Previene descuadres de stock y errores de cálculo en caja.</a:t>
+            </a:r>
+          </a:p>
+        </p:txBody>
+      </p:sp>
+      <p:sp>
+        <p:nvSpPr>
+          <p:cNvPr id="7" name="Rounded Rectangle 6"/>
           <p:cNvSpPr/>
           <p:nvPr/>
         </p:nvSpPr>
         <p:spPr>
           <a:xfrm>
-            <a:off x="731520" y="3200000"/>
-            <a:ext cx="10728960" cy="1380000"/>
+            <a:off x="6309360" y="1645920"/>
+            <a:ext cx="5120640" cy="4572000"/>
           </a:xfrm>
           <a:prstGeom prst="roundRect">
             <a:avLst/>
@@ -4126,9 +4531,9 @@
           <a:solidFill>
             <a:srgbClr val="FFFFFF"/>
           </a:solidFill>
-          <a:ln w="25400">
+          <a:ln w="19050">
             <a:solidFill>
-              <a:srgbClr val="E09F3E"/>
+              <a:srgbClr val="DCE4EB"/>
             </a:solidFill>
           </a:ln>
         </p:spPr>
@@ -4147,127 +4552,11 @@
           </a:fontRef>
         </p:style>
         <p:txBody>
-          <a:bodyPr rtlCol="0" anchor="ctr" wrap="square" lIns="190500" tIns="152400" rIns="190500" bIns="152400"/>
-          <a:lstStyle/>
-          <a:p>
-            <a:pPr algn="ctr">
-              <a:defRPr sz="1700" b="1">
-                <a:solidFill>
-                  <a:srgbClr val="1E3A4C"/>
-                </a:solidFill>
-                <a:latin typeface="Segoe UI"/>
-              </a:defRPr>
-            </a:pPr>
-            <a:r>
-              <a:t>🟡  2. EL TRONCO: Lógica de Negocio y Estructuras de Datos (Capa de Dominio POO)</a:t>
-            </a:r>
-          </a:p>
-          <a:p>
-            <a:pPr>
-              <a:defRPr sz="1300">
-                <a:solidFill>
-                  <a:srgbClr val="333333"/>
-                </a:solidFill>
-                <a:latin typeface="Segoe UI"/>
-              </a:defRPr>
-            </a:pPr>
-            <a:r>
-              <a:t>• Modelos en Memoria RAM: Clases 'Medicamento' (stock, descuentos) y 'Pedido' (carrito de compras, total, historial).</a:t>
-            </a:r>
-          </a:p>
-          <a:p>
-            <a:pPr>
-              <a:defRPr sz="1300">
-                <a:solidFill>
-                  <a:srgbClr val="333333"/>
-                </a:solidFill>
-                <a:latin typeface="Segoe UI"/>
-              </a:defRPr>
-            </a:pPr>
-            <a:r>
-              <a:t>• Modularidad y Seguridad: Búsquedas ultrarrápidas en listas de objetos y manejo de excepciones ('utilidades.py').</a:t>
-            </a:r>
-          </a:p>
-        </p:txBody>
-      </p:sp>
-      <p:sp>
-        <p:nvSpPr>
-          <p:cNvPr id="7" name="Rounded Rectangle 6"/>
-          <p:cNvSpPr/>
-          <p:nvPr/>
-        </p:nvSpPr>
-        <p:spPr>
-          <a:xfrm>
-            <a:off x="731520" y="4800000"/>
-            <a:ext cx="10728960" cy="1380000"/>
-          </a:xfrm>
-          <a:prstGeom prst="roundRect">
-            <a:avLst/>
-          </a:prstGeom>
-          <a:solidFill>
-            <a:srgbClr val="FFFFFF"/>
-          </a:solidFill>
-          <a:ln w="25400">
-            <a:solidFill>
-              <a:srgbClr val="2A9D8F"/>
-            </a:solidFill>
-          </a:ln>
-        </p:spPr>
-        <p:style>
-          <a:lnRef idx="1">
-            <a:schemeClr val="accent1"/>
-          </a:lnRef>
-          <a:fillRef idx="3">
-            <a:schemeClr val="accent1"/>
-          </a:fillRef>
-          <a:effectRef idx="2">
-            <a:schemeClr val="accent1"/>
-          </a:effectRef>
-          <a:fontRef idx="minor">
-            <a:schemeClr val="lt1"/>
-          </a:fontRef>
-        </p:style>
-        <p:txBody>
-          <a:bodyPr rtlCol="0" anchor="ctr" wrap="square" lIns="190500" tIns="152400" rIns="190500" bIns="152400"/>
-          <a:lstStyle/>
-          <a:p>
-            <a:pPr algn="ctr">
-              <a:defRPr sz="1700" b="1">
-                <a:solidFill>
-                  <a:srgbClr val="1E3A4C"/>
-                </a:solidFill>
-                <a:latin typeface="Segoe UI"/>
-              </a:defRPr>
-            </a:pPr>
-            <a:r>
-              <a:t>🟢  1. LA RAÍZ: Persistencia y Almacenamiento Seguros (Capa de Datos / Disco)</a:t>
-            </a:r>
-          </a:p>
-          <a:p>
-            <a:pPr>
-              <a:defRPr sz="1300">
-                <a:solidFill>
-                  <a:srgbClr val="333333"/>
-                </a:solidFill>
-                <a:latin typeface="Segoe UI"/>
-              </a:defRPr>
-            </a:pPr>
-            <a:r>
-              <a:t>• Archivos Planos TXT: 'inventario_medicinas.txt' y 'registro_pedidos.txt' que preservan la información físicamente.</a:t>
-            </a:r>
-          </a:p>
-          <a:p>
-            <a:pPr>
-              <a:defRPr sz="1300">
-                <a:solidFill>
-                  <a:srgbClr val="333333"/>
-                </a:solidFill>
-                <a:latin typeface="Segoe UI"/>
-              </a:defRPr>
-            </a:pPr>
-            <a:r>
-              <a:t>• Módulo 'gestion_archivos.py': Lectura/escritura segura con 'with open', limpieza de líneas y conversión automática de tipos.</a:t>
-            </a:r>
+          <a:bodyPr rtlCol="0" anchor="ctr"/>
+          <a:lstStyle/>
+          <a:p>
+            <a:pPr algn="ctr"/>
+            <a:endParaRPr lang="es-EC" noProof="0" dirty="0"/>
           </a:p>
         </p:txBody>
       </p:sp>
@@ -4279,8 +4568,8 @@
         </p:nvSpPr>
         <p:spPr>
           <a:xfrm>
-            <a:off x="731520" y="4580000"/>
-            <a:ext cx="10728960" cy="220000"/>
+            <a:off x="6537960" y="1828800"/>
+            <a:ext cx="4663440" cy="4206240"/>
           </a:xfrm>
           <a:prstGeom prst="rect">
             <a:avLst/>
@@ -4288,57 +4577,133 @@
           <a:noFill/>
         </p:spPr>
         <p:txBody>
-          <a:bodyPr wrap="none">
+          <a:bodyPr wrap="square">
             <a:spAutoFit/>
           </a:bodyPr>
           <a:lstStyle/>
           <a:p>
-            <a:pPr algn="ctr">
-              <a:defRPr sz="1100" b="1">
-                <a:solidFill>
-                  <a:srgbClr val="556B2F"/>
-                </a:solidFill>
-                <a:latin typeface="Segoe UI"/>
-              </a:defRPr>
-            </a:pPr>
-            <a:r>
-              <a:t>▲   Carga al iniciar (desde_lista)   |   Guardado automático (actualizar_archivo)   ▲</a:t>
-            </a:r>
-          </a:p>
-        </p:txBody>
-      </p:sp>
-      <p:sp>
-        <p:nvSpPr>
-          <p:cNvPr id="9" name="TextBox 8"/>
-          <p:cNvSpPr txBox="1"/>
-          <p:nvPr/>
-        </p:nvSpPr>
-        <p:spPr>
-          <a:xfrm>
-            <a:off x="731520" y="2980000"/>
-            <a:ext cx="10728960" cy="220000"/>
-          </a:xfrm>
-          <a:prstGeom prst="rect">
-            <a:avLst/>
-          </a:prstGeom>
-          <a:noFill/>
-        </p:spPr>
-        <p:txBody>
-          <a:bodyPr wrap="none">
-            <a:spAutoFit/>
-          </a:bodyPr>
-          <a:lstStyle/>
-          <a:p>
-            <a:pPr algn="ctr">
-              <a:defRPr sz="1100" b="1">
-                <a:solidFill>
-                  <a:srgbClr val="556B2F"/>
-                </a:solidFill>
-                <a:latin typeface="Segoe UI"/>
-              </a:defRPr>
-            </a:pPr>
-            <a:r>
-              <a:t>▲   La interfaz invoca métodos en RAM y muestra respuestas en tiempo real   ▲</a:t>
+            <a:pPr>
+              <a:spcAft>
+                <a:spcPts val="1200"/>
+              </a:spcAft>
+              <a:defRPr sz="1900" b="1">
+                <a:solidFill>
+                  <a:srgbClr val="1E3A4C"/>
+                </a:solidFill>
+                <a:latin typeface="Segoe UI"/>
+              </a:defRPr>
+            </a:pPr>
+            <a:r>
+              <a:rPr lang="es-EC" noProof="0" dirty="0"/>
+              <a:t>Características Principales</a:t>
+            </a:r>
+          </a:p>
+          <a:p>
+            <a:pPr>
+              <a:spcAft>
+                <a:spcPts val="800"/>
+              </a:spcAft>
+              <a:defRPr sz="1400">
+                <a:solidFill>
+                  <a:srgbClr val="283038"/>
+                </a:solidFill>
+                <a:latin typeface="Segoe UI"/>
+              </a:defRPr>
+            </a:pPr>
+            <a:r>
+              <a:rPr lang="es-EC" b="1" noProof="0" dirty="0">
+                <a:solidFill>
+                  <a:srgbClr val="48A9A6"/>
+                </a:solidFill>
+              </a:rPr>
+              <a:t>• Interfaz por Consola: </a:t>
+            </a:r>
+            <a:r>
+              <a:rPr lang="es-EC" noProof="0" dirty="0"/>
+              <a:t>Menús interactivos rápidos, fluidos y de excelente legibilidad.</a:t>
+            </a:r>
+          </a:p>
+          <a:p>
+            <a:pPr>
+              <a:spcAft>
+                <a:spcPts val="800"/>
+              </a:spcAft>
+              <a:defRPr sz="1400">
+                <a:solidFill>
+                  <a:srgbClr val="283038"/>
+                </a:solidFill>
+                <a:latin typeface="Segoe UI"/>
+              </a:defRPr>
+            </a:pPr>
+            <a:r>
+              <a:rPr lang="es-EC" b="1" noProof="0" dirty="0">
+                <a:solidFill>
+                  <a:srgbClr val="48A9A6"/>
+                </a:solidFill>
+              </a:rPr>
+              <a:t>• Validación Activa: </a:t>
+            </a:r>
+            <a:r>
+              <a:rPr lang="es-EC" noProof="0" dirty="0"/>
+              <a:t>Protección contra errores de tipeo y manejo de excepciones (try/</a:t>
+            </a:r>
+            <a:r>
+              <a:rPr lang="es-EC" noProof="0" dirty="0" err="1"/>
+              <a:t>except</a:t>
+            </a:r>
+            <a:r>
+              <a:rPr lang="es-EC" noProof="0" dirty="0"/>
+              <a:t>).</a:t>
+            </a:r>
+          </a:p>
+          <a:p>
+            <a:pPr>
+              <a:spcAft>
+                <a:spcPts val="800"/>
+              </a:spcAft>
+              <a:defRPr sz="1400">
+                <a:solidFill>
+                  <a:srgbClr val="283038"/>
+                </a:solidFill>
+                <a:latin typeface="Segoe UI"/>
+              </a:defRPr>
+            </a:pPr>
+            <a:r>
+              <a:rPr lang="es-EC" b="1" noProof="0" dirty="0">
+                <a:solidFill>
+                  <a:srgbClr val="48A9A6"/>
+                </a:solidFill>
+              </a:rPr>
+              <a:t>• Orientado a Objetos: </a:t>
+            </a:r>
+            <a:r>
+              <a:rPr lang="es-EC" noProof="0" dirty="0"/>
+              <a:t>Modelado robusto con clases especializadas y alta cohesión.</a:t>
+            </a:r>
+          </a:p>
+          <a:p>
+            <a:pPr>
+              <a:spcAft>
+                <a:spcPts val="800"/>
+              </a:spcAft>
+              <a:defRPr sz="1400">
+                <a:solidFill>
+                  <a:srgbClr val="283038"/>
+                </a:solidFill>
+                <a:latin typeface="Segoe UI"/>
+              </a:defRPr>
+            </a:pPr>
+            <a:r>
+              <a:rPr lang="es-EC" b="1" noProof="0" dirty="0">
+                <a:solidFill>
+                  <a:srgbClr val="48A9A6"/>
+                </a:solidFill>
+              </a:rPr>
+              <a:t>• Ligero y Nativo: </a:t>
+            </a:r>
+            <a:r>
+              <a:rPr lang="es-EC" noProof="0" dirty="0"/>
+              <a:t>Desarrollado en Python puro, sin necesidad de bases de datos externas.</a:t>
             </a:r>
           </a:p>
         </p:txBody>
@@ -4408,7 +4773,7 @@
           <a:lstStyle/>
           <a:p>
             <a:pPr algn="ctr"/>
-            <a:endParaRPr lang="es-EC" noProof="0" dirty="0"/>
+            <a:endParaRPr/>
           </a:p>
         </p:txBody>
       </p:sp>
@@ -4443,15 +4808,11 @@
               </a:defRPr>
             </a:pPr>
             <a:r>
-              <a:rPr lang="es-EC" noProof="0" dirty="0"/>
-              <a:t>¿Qué es PyPharma Manager?</a:t>
-            </a:r>
-          </a:p>
-          <a:p>
-            <a:pPr>
-              <a:spcBef>
-                <a:spcPts val="400"/>
-              </a:spcBef>
+              <a:t>Jerarquía del Sistema: De la Raíz a la Superficie</a:t>
+            </a:r>
+          </a:p>
+          <a:p>
+            <a:pPr>
               <a:defRPr sz="1500">
                 <a:solidFill>
                   <a:srgbClr val="6E7882"/>
@@ -4460,8 +4821,7 @@
               </a:defRPr>
             </a:pPr>
             <a:r>
-              <a:rPr lang="es-EC" noProof="0" dirty="0"/>
-              <a:t>Solución integral para la administración y control farmacéutico</a:t>
+              <a:t>Estructura en capas y flujo bottom-up para la presentación del proyecto</a:t>
             </a:r>
           </a:p>
         </p:txBody>
@@ -4506,7 +4866,7 @@
           <a:lstStyle/>
           <a:p>
             <a:pPr algn="ctr"/>
-            <a:endParaRPr lang="es-EC" noProof="0" dirty="0"/>
+            <a:endParaRPr/>
           </a:p>
         </p:txBody>
       </p:sp>
@@ -4518,8 +4878,8 @@
         </p:nvSpPr>
         <p:spPr>
           <a:xfrm>
-            <a:off x="731520" y="1645920"/>
-            <a:ext cx="5120640" cy="4572000"/>
+            <a:off x="731520" y="1600000"/>
+            <a:ext cx="10728960" cy="1380000"/>
           </a:xfrm>
           <a:prstGeom prst="roundRect">
             <a:avLst/>
@@ -4527,9 +4887,9 @@
           <a:solidFill>
             <a:srgbClr val="FFFFFF"/>
           </a:solidFill>
-          <a:ln w="19050">
+          <a:ln w="25400">
             <a:solidFill>
-              <a:srgbClr val="DCE4EB"/>
+              <a:srgbClr val="48A9A6"/>
             </a:solidFill>
           </a:ln>
         </p:spPr>
@@ -4548,41 +4908,11 @@
           </a:fontRef>
         </p:style>
         <p:txBody>
-          <a:bodyPr rtlCol="0" anchor="ctr"/>
-          <a:lstStyle/>
-          <a:p>
-            <a:pPr algn="ctr"/>
-            <a:endParaRPr lang="es-EC" noProof="0" dirty="0"/>
-          </a:p>
-        </p:txBody>
-      </p:sp>
-      <p:sp>
-        <p:nvSpPr>
-          <p:cNvPr id="6" name="TextBox 5"/>
-          <p:cNvSpPr txBox="1"/>
-          <p:nvPr/>
-        </p:nvSpPr>
-        <p:spPr>
-          <a:xfrm>
-            <a:off x="960120" y="1828800"/>
-            <a:ext cx="4663440" cy="2569934"/>
-          </a:xfrm>
-          <a:prstGeom prst="rect">
-            <a:avLst/>
-          </a:prstGeom>
-          <a:noFill/>
-        </p:spPr>
-        <p:txBody>
-          <a:bodyPr wrap="square">
-            <a:spAutoFit/>
-          </a:bodyPr>
-          <a:lstStyle/>
-          <a:p>
-            <a:pPr>
-              <a:spcAft>
-                <a:spcPts val="1200"/>
-              </a:spcAft>
-              <a:defRPr sz="1900" b="1">
+          <a:bodyPr wrap="square" lIns="190500" tIns="152400" rIns="190500" bIns="152400" rtlCol="0" anchor="ctr"/>
+          <a:lstStyle/>
+          <a:p>
+            <a:pPr algn="ctr">
+              <a:defRPr sz="1700" b="1">
                 <a:solidFill>
                   <a:srgbClr val="1E3A4C"/>
                 </a:solidFill>
@@ -4590,122 +4920,47 @@
               </a:defRPr>
             </a:pPr>
             <a:r>
-              <a:rPr lang="es-EC" noProof="0" dirty="0"/>
-              <a:t>Propuesta de Valor</a:t>
-            </a:r>
-          </a:p>
-          <a:p>
-            <a:pPr>
-              <a:spcAft>
-                <a:spcPts val="800"/>
-              </a:spcAft>
-              <a:defRPr sz="1400">
-                <a:solidFill>
-                  <a:srgbClr val="283038"/>
-                </a:solidFill>
-                <a:latin typeface="Segoe UI"/>
-              </a:defRPr>
-            </a:pPr>
-            <a:r>
-              <a:rPr lang="es-EC" b="1" noProof="0" dirty="0">
-                <a:solidFill>
-                  <a:srgbClr val="48A9A6"/>
-                </a:solidFill>
-              </a:rPr>
-              <a:t>• Control de Inventario: </a:t>
-            </a:r>
-            <a:r>
-              <a:rPr lang="es-EC" noProof="0" dirty="0"/>
-              <a:t>Administración eficiente del catálogo de medicamentos en tiempo real.</a:t>
-            </a:r>
-          </a:p>
-          <a:p>
-            <a:pPr>
-              <a:spcAft>
-                <a:spcPts val="800"/>
-              </a:spcAft>
-              <a:defRPr sz="1400">
-                <a:solidFill>
-                  <a:srgbClr val="283038"/>
-                </a:solidFill>
-                <a:latin typeface="Segoe UI"/>
-              </a:defRPr>
-            </a:pPr>
-            <a:r>
-              <a:rPr lang="es-EC" b="1" noProof="0" dirty="0">
-                <a:solidFill>
-                  <a:srgbClr val="48A9A6"/>
-                </a:solidFill>
-              </a:rPr>
-              <a:t>• Gestión de Ventas: </a:t>
-            </a:r>
-            <a:r>
-              <a:rPr lang="es-EC" noProof="0" dirty="0"/>
-              <a:t>Registro rápido de pedidos de clientes con cálculo automático de totales.</a:t>
-            </a:r>
-          </a:p>
-          <a:p>
-            <a:pPr>
-              <a:spcAft>
-                <a:spcPts val="800"/>
-              </a:spcAft>
-              <a:defRPr sz="1400">
-                <a:solidFill>
-                  <a:srgbClr val="283038"/>
-                </a:solidFill>
-                <a:latin typeface="Segoe UI"/>
-              </a:defRPr>
-            </a:pPr>
-            <a:r>
-              <a:rPr lang="es-EC" b="1" noProof="0" dirty="0">
-                <a:solidFill>
-                  <a:srgbClr val="48A9A6"/>
-                </a:solidFill>
-              </a:rPr>
-              <a:t>• Persistencia Confiable: </a:t>
-            </a:r>
-            <a:r>
-              <a:rPr lang="es-EC" noProof="0" dirty="0"/>
-              <a:t>Almacenamiento seguro y continuo en archivos de texto planos (TXT).</a:t>
-            </a:r>
-          </a:p>
-          <a:p>
-            <a:pPr>
-              <a:spcAft>
-                <a:spcPts val="800"/>
-              </a:spcAft>
-              <a:defRPr sz="1400">
-                <a:solidFill>
-                  <a:srgbClr val="283038"/>
-                </a:solidFill>
-                <a:latin typeface="Segoe UI"/>
-              </a:defRPr>
-            </a:pPr>
-            <a:r>
-              <a:rPr lang="es-EC" b="1" noProof="0" dirty="0">
-                <a:solidFill>
-                  <a:srgbClr val="48A9A6"/>
-                </a:solidFill>
-              </a:rPr>
-              <a:t>• Precisión Operativa: </a:t>
-            </a:r>
-            <a:r>
-              <a:rPr lang="es-EC" noProof="0" dirty="0"/>
-              <a:t>Previene descuadres de stock y errores de cálculo en caja.</a:t>
-            </a:r>
-          </a:p>
-        </p:txBody>
-      </p:sp>
-      <p:sp>
-        <p:nvSpPr>
-          <p:cNvPr id="7" name="Rounded Rectangle 6"/>
+              <a:t>🔵  3. LA SUPERFICIE: Interfaz Visual y Consola (Capa de Presentación / UI)</a:t>
+            </a:r>
+          </a:p>
+          <a:p>
+            <a:pPr>
+              <a:defRPr sz="1300">
+                <a:solidFill>
+                  <a:srgbClr val="333333"/>
+                </a:solidFill>
+                <a:latin typeface="Segoe UI"/>
+              </a:defRPr>
+            </a:pPr>
+            <a:r>
+              <a:t>• Interfaz Operativa: Menús interactivos por consola ('menus.py' y 'main.py') con validaciones activas y limpieza de pantalla.</a:t>
+            </a:r>
+          </a:p>
+          <a:p>
+            <a:pPr>
+              <a:defRPr sz="1300">
+                <a:solidFill>
+                  <a:srgbClr val="333333"/>
+                </a:solidFill>
+                <a:latin typeface="Segoe UI"/>
+              </a:defRPr>
+            </a:pPr>
+            <a:r>
+              <a:t>• Soporte Web HTML5: Página web de apoyo ('index.html' y 'presentacion.html') que documenta visualmente el proyecto.</a:t>
+            </a:r>
+          </a:p>
+        </p:txBody>
+      </p:sp>
+      <p:sp>
+        <p:nvSpPr>
+          <p:cNvPr id="6" name="Rounded Rectangle 5"/>
           <p:cNvSpPr/>
           <p:nvPr/>
         </p:nvSpPr>
         <p:spPr>
           <a:xfrm>
-            <a:off x="6309360" y="1645920"/>
-            <a:ext cx="5120640" cy="4572000"/>
+            <a:off x="731520" y="3200000"/>
+            <a:ext cx="10728960" cy="1380000"/>
           </a:xfrm>
           <a:prstGeom prst="roundRect">
             <a:avLst/>
@@ -4713,9 +4968,9 @@
           <a:solidFill>
             <a:srgbClr val="FFFFFF"/>
           </a:solidFill>
-          <a:ln w="19050">
+          <a:ln w="25400">
             <a:solidFill>
-              <a:srgbClr val="DCE4EB"/>
+              <a:srgbClr val="E09F3E"/>
             </a:solidFill>
           </a:ln>
         </p:spPr>
@@ -4734,11 +4989,127 @@
           </a:fontRef>
         </p:style>
         <p:txBody>
-          <a:bodyPr rtlCol="0" anchor="ctr"/>
-          <a:lstStyle/>
-          <a:p>
-            <a:pPr algn="ctr"/>
-            <a:endParaRPr lang="es-EC" noProof="0" dirty="0"/>
+          <a:bodyPr wrap="square" lIns="190500" tIns="152400" rIns="190500" bIns="152400" rtlCol="0" anchor="ctr"/>
+          <a:lstStyle/>
+          <a:p>
+            <a:pPr algn="ctr">
+              <a:defRPr sz="1700" b="1">
+                <a:solidFill>
+                  <a:srgbClr val="1E3A4C"/>
+                </a:solidFill>
+                <a:latin typeface="Segoe UI"/>
+              </a:defRPr>
+            </a:pPr>
+            <a:r>
+              <a:t>🟡  2. EL TRONCO: Lógica de Negocio y Estructuras de Datos (Capa de Dominio POO)</a:t>
+            </a:r>
+          </a:p>
+          <a:p>
+            <a:pPr>
+              <a:defRPr sz="1300">
+                <a:solidFill>
+                  <a:srgbClr val="333333"/>
+                </a:solidFill>
+                <a:latin typeface="Segoe UI"/>
+              </a:defRPr>
+            </a:pPr>
+            <a:r>
+              <a:t>• Modelos en Memoria RAM: Clases 'Medicamento' (stock, descuentos) y 'Pedido' (carrito de compras, total, historial).</a:t>
+            </a:r>
+          </a:p>
+          <a:p>
+            <a:pPr>
+              <a:defRPr sz="1300">
+                <a:solidFill>
+                  <a:srgbClr val="333333"/>
+                </a:solidFill>
+                <a:latin typeface="Segoe UI"/>
+              </a:defRPr>
+            </a:pPr>
+            <a:r>
+              <a:t>• Modularidad y Seguridad: Búsquedas ultrarrápidas en listas de objetos y manejo de excepciones ('utilidades.py').</a:t>
+            </a:r>
+          </a:p>
+        </p:txBody>
+      </p:sp>
+      <p:sp>
+        <p:nvSpPr>
+          <p:cNvPr id="7" name="Rounded Rectangle 6"/>
+          <p:cNvSpPr/>
+          <p:nvPr/>
+        </p:nvSpPr>
+        <p:spPr>
+          <a:xfrm>
+            <a:off x="731520" y="4800000"/>
+            <a:ext cx="10728960" cy="1380000"/>
+          </a:xfrm>
+          <a:prstGeom prst="roundRect">
+            <a:avLst/>
+          </a:prstGeom>
+          <a:solidFill>
+            <a:srgbClr val="FFFFFF"/>
+          </a:solidFill>
+          <a:ln w="25400">
+            <a:solidFill>
+              <a:srgbClr val="2A9D8F"/>
+            </a:solidFill>
+          </a:ln>
+        </p:spPr>
+        <p:style>
+          <a:lnRef idx="1">
+            <a:schemeClr val="accent1"/>
+          </a:lnRef>
+          <a:fillRef idx="3">
+            <a:schemeClr val="accent1"/>
+          </a:fillRef>
+          <a:effectRef idx="2">
+            <a:schemeClr val="accent1"/>
+          </a:effectRef>
+          <a:fontRef idx="minor">
+            <a:schemeClr val="lt1"/>
+          </a:fontRef>
+        </p:style>
+        <p:txBody>
+          <a:bodyPr wrap="square" lIns="190500" tIns="152400" rIns="190500" bIns="152400" rtlCol="0" anchor="ctr"/>
+          <a:lstStyle/>
+          <a:p>
+            <a:pPr algn="ctr">
+              <a:defRPr sz="1700" b="1">
+                <a:solidFill>
+                  <a:srgbClr val="1E3A4C"/>
+                </a:solidFill>
+                <a:latin typeface="Segoe UI"/>
+              </a:defRPr>
+            </a:pPr>
+            <a:r>
+              <a:t>🟢  1. LA RAÍZ: Persistencia y Almacenamiento Seguros (Capa de Datos / Disco)</a:t>
+            </a:r>
+          </a:p>
+          <a:p>
+            <a:pPr>
+              <a:defRPr sz="1300">
+                <a:solidFill>
+                  <a:srgbClr val="333333"/>
+                </a:solidFill>
+                <a:latin typeface="Segoe UI"/>
+              </a:defRPr>
+            </a:pPr>
+            <a:r>
+              <a:t>• Archivos Planos TXT: 'inventario_medicinas.txt' y 'registro_pedidos.txt' que preservan la información físicamente.</a:t>
+            </a:r>
+          </a:p>
+          <a:p>
+            <a:pPr>
+              <a:defRPr sz="1300">
+                <a:solidFill>
+                  <a:srgbClr val="333333"/>
+                </a:solidFill>
+                <a:latin typeface="Segoe UI"/>
+              </a:defRPr>
+            </a:pPr>
+            <a:r>
+              <a:t>• Módulo 'gestion_archivos.py': Lectura/escritura segura con 'with open', limpieza de líneas y conversión automática de tipos.</a:t>
+            </a:r>
           </a:p>
         </p:txBody>
       </p:sp>
@@ -4750,8 +5121,8 @@
         </p:nvSpPr>
         <p:spPr>
           <a:xfrm>
-            <a:off x="6537960" y="1828800"/>
-            <a:ext cx="4663440" cy="4206240"/>
+            <a:off x="731520" y="4580000"/>
+            <a:ext cx="10728960" cy="220000"/>
           </a:xfrm>
           <a:prstGeom prst="rect">
             <a:avLst/>
@@ -4759,133 +5130,57 @@
           <a:noFill/>
         </p:spPr>
         <p:txBody>
-          <a:bodyPr wrap="square">
+          <a:bodyPr wrap="none">
             <a:spAutoFit/>
           </a:bodyPr>
           <a:lstStyle/>
           <a:p>
-            <a:pPr>
-              <a:spcAft>
-                <a:spcPts val="1200"/>
-              </a:spcAft>
-              <a:defRPr sz="1900" b="1">
-                <a:solidFill>
-                  <a:srgbClr val="1E3A4C"/>
-                </a:solidFill>
-                <a:latin typeface="Segoe UI"/>
-              </a:defRPr>
-            </a:pPr>
-            <a:r>
-              <a:rPr lang="es-EC" noProof="0" dirty="0"/>
-              <a:t>Características Principales</a:t>
-            </a:r>
-          </a:p>
-          <a:p>
-            <a:pPr>
-              <a:spcAft>
-                <a:spcPts val="800"/>
-              </a:spcAft>
-              <a:defRPr sz="1400">
-                <a:solidFill>
-                  <a:srgbClr val="283038"/>
-                </a:solidFill>
-                <a:latin typeface="Segoe UI"/>
-              </a:defRPr>
-            </a:pPr>
-            <a:r>
-              <a:rPr lang="es-EC" b="1" noProof="0" dirty="0">
-                <a:solidFill>
-                  <a:srgbClr val="48A9A6"/>
-                </a:solidFill>
-              </a:rPr>
-              <a:t>• Interfaz por Consola: </a:t>
-            </a:r>
-            <a:r>
-              <a:rPr lang="es-EC" noProof="0" dirty="0"/>
-              <a:t>Menús interactivos rápidos, fluidos y de excelente legibilidad.</a:t>
-            </a:r>
-          </a:p>
-          <a:p>
-            <a:pPr>
-              <a:spcAft>
-                <a:spcPts val="800"/>
-              </a:spcAft>
-              <a:defRPr sz="1400">
-                <a:solidFill>
-                  <a:srgbClr val="283038"/>
-                </a:solidFill>
-                <a:latin typeface="Segoe UI"/>
-              </a:defRPr>
-            </a:pPr>
-            <a:r>
-              <a:rPr lang="es-EC" b="1" noProof="0" dirty="0">
-                <a:solidFill>
-                  <a:srgbClr val="48A9A6"/>
-                </a:solidFill>
-              </a:rPr>
-              <a:t>• Validación Activa: </a:t>
-            </a:r>
-            <a:r>
-              <a:rPr lang="es-EC" noProof="0" dirty="0"/>
-              <a:t>Protección contra errores de tipeo y manejo de excepciones (try/</a:t>
-            </a:r>
-            <a:r>
-              <a:rPr lang="es-EC" noProof="0" dirty="0" err="1"/>
-              <a:t>except</a:t>
-            </a:r>
-            <a:r>
-              <a:rPr lang="es-EC" noProof="0" dirty="0"/>
-              <a:t>).</a:t>
-            </a:r>
-          </a:p>
-          <a:p>
-            <a:pPr>
-              <a:spcAft>
-                <a:spcPts val="800"/>
-              </a:spcAft>
-              <a:defRPr sz="1400">
-                <a:solidFill>
-                  <a:srgbClr val="283038"/>
-                </a:solidFill>
-                <a:latin typeface="Segoe UI"/>
-              </a:defRPr>
-            </a:pPr>
-            <a:r>
-              <a:rPr lang="es-EC" b="1" noProof="0" dirty="0">
-                <a:solidFill>
-                  <a:srgbClr val="48A9A6"/>
-                </a:solidFill>
-              </a:rPr>
-              <a:t>• Orientado a Objetos: </a:t>
-            </a:r>
-            <a:r>
-              <a:rPr lang="es-EC" noProof="0" dirty="0"/>
-              <a:t>Modelado robusto con clases especializadas y alta cohesión.</a:t>
-            </a:r>
-          </a:p>
-          <a:p>
-            <a:pPr>
-              <a:spcAft>
-                <a:spcPts val="800"/>
-              </a:spcAft>
-              <a:defRPr sz="1400">
-                <a:solidFill>
-                  <a:srgbClr val="283038"/>
-                </a:solidFill>
-                <a:latin typeface="Segoe UI"/>
-              </a:defRPr>
-            </a:pPr>
-            <a:r>
-              <a:rPr lang="es-EC" b="1" noProof="0" dirty="0">
-                <a:solidFill>
-                  <a:srgbClr val="48A9A6"/>
-                </a:solidFill>
-              </a:rPr>
-              <a:t>• Ligero y Nativo: </a:t>
-            </a:r>
-            <a:r>
-              <a:rPr lang="es-EC" noProof="0" dirty="0"/>
-              <a:t>Desarrollado en Python puro, sin necesidad de bases de datos externas.</a:t>
+            <a:pPr algn="ctr">
+              <a:defRPr sz="1100" b="1">
+                <a:solidFill>
+                  <a:srgbClr val="556B2F"/>
+                </a:solidFill>
+                <a:latin typeface="Segoe UI"/>
+              </a:defRPr>
+            </a:pPr>
+            <a:r>
+              <a:t>▲   Carga al iniciar (desde_lista)   |   Guardado automático (actualizar_archivo)   ▲</a:t>
+            </a:r>
+          </a:p>
+        </p:txBody>
+      </p:sp>
+      <p:sp>
+        <p:nvSpPr>
+          <p:cNvPr id="9" name="TextBox 8"/>
+          <p:cNvSpPr txBox="1"/>
+          <p:nvPr/>
+        </p:nvSpPr>
+        <p:spPr>
+          <a:xfrm>
+            <a:off x="731520" y="2980000"/>
+            <a:ext cx="10728960" cy="220000"/>
+          </a:xfrm>
+          <a:prstGeom prst="rect">
+            <a:avLst/>
+          </a:prstGeom>
+          <a:noFill/>
+        </p:spPr>
+        <p:txBody>
+          <a:bodyPr wrap="none">
+            <a:spAutoFit/>
+          </a:bodyPr>
+          <a:lstStyle/>
+          <a:p>
+            <a:pPr algn="ctr">
+              <a:defRPr sz="1100" b="1">
+                <a:solidFill>
+                  <a:srgbClr val="556B2F"/>
+                </a:solidFill>
+                <a:latin typeface="Segoe UI"/>
+              </a:defRPr>
+            </a:pPr>
+            <a:r>
+              <a:t>▲   La interfaz invoca métodos en RAM y muestra respuestas en tiempo real   ▲</a:t>
             </a:r>
           </a:p>
         </p:txBody>
@@ -4923,7 +5218,7 @@
         </p:nvSpPr>
         <p:spPr>
           <a:xfrm>
-            <a:off x="12700" y="0"/>
+            <a:off x="0" y="0"/>
             <a:ext cx="12191695" cy="6858000"/>
           </a:xfrm>
           <a:prstGeom prst="rect">
@@ -4990,7 +5285,7 @@
               </a:defRPr>
             </a:pPr>
             <a:r>
-              <a:t>[1. LA RAÍZ] Persistencia y Almacenamiento (Capa de Datos)</a:t>
+              <a:t>Arquitectura Modular del Proyecto (3 Capas)</a:t>
             </a:r>
           </a:p>
           <a:p>
@@ -5006,7 +5301,7 @@
               </a:defRPr>
             </a:pPr>
             <a:r>
-              <a:t>Almacenamiento continuo en archivos planos TXT sin pérdida de información</a:t>
+              <a:t>Vista estructural del código y separación de responsabilidades</a:t>
             </a:r>
           </a:p>
         </p:txBody>
@@ -5064,7 +5359,7 @@
         <p:spPr>
           <a:xfrm>
             <a:off x="731520" y="1645920"/>
-            <a:ext cx="5120640" cy="4572000"/>
+            <a:ext cx="5303520" cy="4572000"/>
           </a:xfrm>
           <a:prstGeom prst="roundRect">
             <a:avLst/>
@@ -5110,7 +5405,7 @@
         <p:spPr>
           <a:xfrm>
             <a:off x="960120" y="1828800"/>
-            <a:ext cx="4663440" cy="4206240"/>
+            <a:ext cx="4846320" cy="4206240"/>
           </a:xfrm>
           <a:prstGeom prst="rect">
             <a:avLst/>
@@ -5135,7 +5430,8 @@
               </a:defRPr>
             </a:pPr>
             <a:r>
-              <a:t>Manejo de Archivos (TXT/CSV)</a:t>
+              <a:rPr lang="es-EC" noProof="0" dirty="0"/>
+              <a:t>Diseño Modular en 3 Capas</a:t>
             </a:r>
           </a:p>
           <a:p>
@@ -5143,7 +5439,7 @@
               <a:spcAft>
                 <a:spcPts val="800"/>
               </a:spcAft>
-              <a:defRPr sz="1400" b="0">
+              <a:defRPr sz="1400">
                 <a:solidFill>
                   <a:srgbClr val="283038"/>
                 </a:solidFill>
@@ -5151,7 +5447,16 @@
               </a:defRPr>
             </a:pPr>
             <a:r>
-              <a:t>• Manejadores de Contexto: Uso seguro de 'with open(...)' que garantiza el cierre de archivos sin bloqueos.</a:t>
+              <a:rPr lang="es-EC" b="1" noProof="0" dirty="0">
+                <a:solidFill>
+                  <a:srgbClr val="48A9A6"/>
+                </a:solidFill>
+              </a:rPr>
+              <a:t>• Capa de Entrada (main.py): </a:t>
+            </a:r>
+            <a:r>
+              <a:rPr lang="es-EC" noProof="0" dirty="0"/>
+              <a:t>Punto de inicio conciso que conecta módulos y arranca el bucle principal.</a:t>
             </a:r>
           </a:p>
           <a:p>
@@ -5159,7 +5464,7 @@
               <a:spcAft>
                 <a:spcPts val="800"/>
               </a:spcAft>
-              <a:defRPr sz="1400" b="0">
+              <a:defRPr sz="1400">
                 <a:solidFill>
                   <a:srgbClr val="283038"/>
                 </a:solidFill>
@@ -5167,7 +5472,16 @@
               </a:defRPr>
             </a:pPr>
             <a:r>
-              <a:t>• Conversión Automática: Función 'evaluar_y_convertir()' en gestion_archivos.py que tipifica int, float y str al iniciar.</a:t>
+              <a:rPr lang="es-EC" b="1" noProof="0" dirty="0">
+                <a:solidFill>
+                  <a:srgbClr val="48A9A6"/>
+                </a:solidFill>
+              </a:rPr>
+              <a:t>• Capa de Modelo (clases/): </a:t>
+            </a:r>
+            <a:r>
+              <a:rPr lang="es-EC" noProof="0" dirty="0"/>
+              <a:t>Entidades 'Medicamento' y 'Pedido' con lógica autónoma.</a:t>
             </a:r>
           </a:p>
           <a:p>
@@ -5175,7 +5489,7 @@
               <a:spcAft>
                 <a:spcPts val="800"/>
               </a:spcAft>
-              <a:defRPr sz="1400" b="0">
+              <a:defRPr sz="1400">
                 <a:solidFill>
                   <a:srgbClr val="283038"/>
                 </a:solidFill>
@@ -5183,7 +5497,32 @@
               </a:defRPr>
             </a:pPr>
             <a:r>
-              <a:t>• Codificación UTF-8: Soporte nativo para tildes y caracteres especiales en español.</a:t>
+              <a:rPr lang="es-EC" b="1" noProof="0" dirty="0">
+                <a:solidFill>
+                  <a:srgbClr val="48A9A6"/>
+                </a:solidFill>
+              </a:rPr>
+              <a:t>• Capa de Servicios (</a:t>
+            </a:r>
+            <a:r>
+              <a:rPr lang="es-EC" b="1" noProof="0" dirty="0" err="1">
+                <a:solidFill>
+                  <a:srgbClr val="48A9A6"/>
+                </a:solidFill>
+              </a:rPr>
+              <a:t>modulos</a:t>
+            </a:r>
+            <a:r>
+              <a:rPr lang="es-EC" b="1" noProof="0" dirty="0">
+                <a:solidFill>
+                  <a:srgbClr val="48A9A6"/>
+                </a:solidFill>
+              </a:rPr>
+              <a:t>/): </a:t>
+            </a:r>
+            <a:r>
+              <a:rPr lang="es-EC" noProof="0" dirty="0"/>
+              <a:t>Manejo de archivos TXT, menús de usuario y utilidades.</a:t>
             </a:r>
           </a:p>
           <a:p>
@@ -5191,7 +5530,7 @@
               <a:spcAft>
                 <a:spcPts val="800"/>
               </a:spcAft>
-              <a:defRPr sz="1400" b="0">
+              <a:defRPr sz="1400">
                 <a:solidFill>
                   <a:srgbClr val="283038"/>
                 </a:solidFill>
@@ -5199,7 +5538,16 @@
               </a:defRPr>
             </a:pPr>
             <a:r>
-              <a:t>• Sobrescritura Segura: Actualización instantánea y sincronizada tras cada registro, venta o modificación.</a:t>
+              <a:rPr lang="es-EC" b="1" noProof="0" dirty="0">
+                <a:solidFill>
+                  <a:srgbClr val="48A9A6"/>
+                </a:solidFill>
+              </a:rPr>
+              <a:t>• Desacoplamiento: </a:t>
+            </a:r>
+            <a:r>
+              <a:rPr lang="es-EC" noProof="0" dirty="0"/>
+              <a:t>Cada módulo cumple una única responsabilidad clara y bien definida.</a:t>
             </a:r>
           </a:p>
         </p:txBody>
@@ -5282,7 +5630,7 @@
             </a:pPr>
             <a:r>
               <a:rPr lang="es-EC" noProof="0" dirty="0"/>
-              <a:t>📄 Estructura de Archivos TXT</a:t>
+              <a:t>📄 Vista de Archivos del Proyecto</a:t>
             </a:r>
           </a:p>
         </p:txBody>
@@ -5296,7 +5644,7 @@
         <p:spPr>
           <a:xfrm>
             <a:off x="6492240" y="2194560"/>
-            <a:ext cx="4754880" cy="3931920"/>
+            <a:ext cx="4754880" cy="2872581"/>
           </a:xfrm>
           <a:prstGeom prst="rect">
             <a:avLst/>
@@ -5321,8 +5669,12 @@
               </a:defRPr>
             </a:pPr>
             <a:r>
+              <a:rPr lang="es-EC" noProof="0" dirty="0" err="1"/>
+              <a:t>PyPharma_Manager</a:t>
+            </a:r>
+            <a:r>
               <a:rPr lang="es-EC" noProof="0" dirty="0"/>
-              <a:t>=== datos/inventario_medicinas.txt ===</a:t>
+              <a:t>/</a:t>
             </a:r>
           </a:p>
           <a:p>
@@ -5339,7 +5691,7 @@
             </a:pPr>
             <a:r>
               <a:rPr lang="es-EC" noProof="0" dirty="0"/>
-              <a:t>15,Paracetamol,0.3</a:t>
+              <a:t>├── 📂 clases/</a:t>
             </a:r>
           </a:p>
           <a:p>
@@ -5356,7 +5708,7 @@
             </a:pPr>
             <a:r>
               <a:rPr lang="es-EC" noProof="0" dirty="0"/>
-              <a:t>24,Ibuprofeno,0.85</a:t>
+              <a:t>│   ├── 📄 medicamento.py   # Modelo Fármaco</a:t>
             </a:r>
           </a:p>
           <a:p>
@@ -5373,7 +5725,7 @@
             </a:pPr>
             <a:r>
               <a:rPr lang="es-EC" noProof="0" dirty="0"/>
-              <a:t>34,Amoxicilina,0.45</a:t>
+              <a:t>│   └── 📄 pedido.py        # Modelo Venta/Orden</a:t>
             </a:r>
           </a:p>
           <a:p>
@@ -5390,7 +5742,15 @@
             </a:pPr>
             <a:r>
               <a:rPr lang="es-EC" noProof="0" dirty="0"/>
-              <a:t>10,Omeprazol,0.8</a:t>
+              <a:t>├── 📂 </a:t>
+            </a:r>
+            <a:r>
+              <a:rPr lang="es-EC" noProof="0" dirty="0" err="1"/>
+              <a:t>modulos</a:t>
+            </a:r>
+            <a:r>
+              <a:rPr lang="es-EC" noProof="0" dirty="0"/>
+              <a:t>/</a:t>
             </a:r>
           </a:p>
           <a:p>
@@ -5407,7 +5767,7 @@
             </a:pPr>
             <a:r>
               <a:rPr lang="es-EC" noProof="0" dirty="0"/>
-              <a:t>50,Vitamina C,1.5</a:t>
+              <a:t>│   ├── 📄 gestion_archivos.py # Persistencia TXT</a:t>
             </a:r>
           </a:p>
           <a:p>
@@ -5422,6 +5782,14 @@
                 <a:latin typeface="Consolas"/>
               </a:defRPr>
             </a:pPr>
+            <a:r>
+              <a:rPr lang="es-EC" noProof="0" dirty="0"/>
+              <a:t>│   ├── 📄 utilidades.py       # Validaciones try/</a:t>
+            </a:r>
+            <a:r>
+              <a:rPr lang="es-EC" noProof="0" dirty="0" err="1"/>
+              <a:t>exc</a:t>
+            </a:r>
             <a:endParaRPr lang="es-EC" noProof="0" dirty="0"/>
           </a:p>
           <a:p>
@@ -5438,7 +5806,7 @@
             </a:pPr>
             <a:r>
               <a:rPr lang="es-EC" noProof="0" dirty="0"/>
-              <a:t>=== datos/registro_pedidos.txt ===</a:t>
+              <a:t>│   └── 📄 menus.py            # Interfaz de Usuario</a:t>
             </a:r>
           </a:p>
           <a:p>
@@ -5455,7 +5823,7 @@
             </a:pPr>
             <a:r>
               <a:rPr lang="es-EC" noProof="0" dirty="0"/>
-              <a:t>Steven,2,Cefalexina,0.2</a:t>
+              <a:t>├── 📂 datos/</a:t>
             </a:r>
           </a:p>
           <a:p>
@@ -5472,7 +5840,7 @@
             </a:pPr>
             <a:r>
               <a:rPr lang="es-EC" noProof="0" dirty="0"/>
-              <a:t>Jonathan,2,Loratadina,0.25</a:t>
+              <a:t>│   ├── 📄 inventario_medicinas.txt</a:t>
             </a:r>
           </a:p>
           <a:p>
@@ -5489,7 +5857,7 @@
             </a:pPr>
             <a:r>
               <a:rPr lang="es-EC" noProof="0" dirty="0"/>
-              <a:t>Elias,3,Paracetamol,0.3</a:t>
+              <a:t>│   └── 📄 registro_pedidos.txt</a:t>
             </a:r>
           </a:p>
           <a:p>
@@ -5506,53 +5874,19 @@
             </a:pPr>
             <a:r>
               <a:rPr lang="es-EC" noProof="0" dirty="0"/>
-              <a:t>Sebastian,1,Vitamina C,1.5</a:t>
-            </a:r>
-          </a:p>
-        </p:txBody>
-      </p:sp>
-      <p:cxnSp>
-        <p:nvCxnSpPr>
-          <p:cNvPr id="11" name="Straight Connector 10">
-            <a:extLst>
-              <a:ext uri="{FF2B5EF4-FFF2-40B4-BE49-F238E27FC236}">
-                <a16:creationId xmlns:a16="http://schemas.microsoft.com/office/drawing/2014/main" id="{5727ACBB-D31B-598E-937C-A55D20E39BCE}"/>
-              </a:ext>
-            </a:extLst>
-          </p:cNvPr>
-          <p:cNvCxnSpPr/>
-          <p:nvPr/>
-        </p:nvCxnSpPr>
-        <p:spPr>
-          <a:xfrm>
-            <a:off x="6492240" y="3732551"/>
-            <a:ext cx="4754880" cy="0"/>
-          </a:xfrm>
-          <a:prstGeom prst="line">
-            <a:avLst/>
-          </a:prstGeom>
-          <a:ln>
-            <a:solidFill>
-              <a:srgbClr val="00B0F0"/>
-            </a:solidFill>
-            <a:prstDash val="dash"/>
-          </a:ln>
-        </p:spPr>
-        <p:style>
-          <a:lnRef idx="2">
-            <a:schemeClr val="accent1"/>
-          </a:lnRef>
-          <a:fillRef idx="0">
-            <a:schemeClr val="accent1"/>
-          </a:fillRef>
-          <a:effectRef idx="1">
-            <a:schemeClr val="accent1"/>
-          </a:effectRef>
-          <a:fontRef idx="minor">
-            <a:schemeClr val="tx1"/>
-          </a:fontRef>
-        </p:style>
-      </p:cxnSp>
+              <a:t>└── 🚀 main.py              # </a:t>
+            </a:r>
+            <a:r>
+              <a:rPr lang="es-EC" noProof="0" dirty="0" err="1"/>
+              <a:t>Entry</a:t>
+            </a:r>
+            <a:r>
+              <a:rPr lang="es-EC" noProof="0" dirty="0"/>
+              <a:t> Point del Sistema</a:t>
+            </a:r>
+          </a:p>
+        </p:txBody>
+      </p:sp>
     </p:spTree>
   </p:cSld>
   <p:clrMapOvr>
@@ -5586,7 +5920,7 @@
         </p:nvSpPr>
         <p:spPr>
           <a:xfrm>
-            <a:off x="0" y="0"/>
+            <a:off x="12700" y="0"/>
             <a:ext cx="12191695" cy="6858000"/>
           </a:xfrm>
           <a:prstGeom prst="rect">
@@ -5653,7 +5987,7 @@
               </a:defRPr>
             </a:pPr>
             <a:r>
-              <a:t>Arquitectura Modular del Proyecto (3 Capas)</a:t>
+              <a:t>[1. LA RAÍZ] Persistencia y Almacenamiento (Capa de Datos)</a:t>
             </a:r>
           </a:p>
           <a:p>
@@ -5669,7 +6003,7 @@
               </a:defRPr>
             </a:pPr>
             <a:r>
-              <a:t>Vista estructural del código y separación de responsabilidades</a:t>
+              <a:t>Almacenamiento continuo en archivos planos TXT sin pérdida de información</a:t>
             </a:r>
           </a:p>
         </p:txBody>
@@ -5727,7 +6061,7 @@
         <p:spPr>
           <a:xfrm>
             <a:off x="731520" y="1645920"/>
-            <a:ext cx="5303520" cy="4572000"/>
+            <a:ext cx="5120640" cy="4572000"/>
           </a:xfrm>
           <a:prstGeom prst="roundRect">
             <a:avLst/>
@@ -5773,7 +6107,7 @@
         <p:spPr>
           <a:xfrm>
             <a:off x="960120" y="1828800"/>
-            <a:ext cx="4846320" cy="4206240"/>
+            <a:ext cx="4663440" cy="4206240"/>
           </a:xfrm>
           <a:prstGeom prst="rect">
             <a:avLst/>
@@ -5798,8 +6132,7 @@
               </a:defRPr>
             </a:pPr>
             <a:r>
-              <a:rPr lang="es-EC" noProof="0" dirty="0"/>
-              <a:t>Diseño Modular en 3 Capas</a:t>
+              <a:t>Manejo de Archivos (TXT/CSV)</a:t>
             </a:r>
           </a:p>
           <a:p>
@@ -5807,7 +6140,7 @@
               <a:spcAft>
                 <a:spcPts val="800"/>
               </a:spcAft>
-              <a:defRPr sz="1400">
+              <a:defRPr sz="1400" b="0">
                 <a:solidFill>
                   <a:srgbClr val="283038"/>
                 </a:solidFill>
@@ -5815,16 +6148,7 @@
               </a:defRPr>
             </a:pPr>
             <a:r>
-              <a:rPr lang="es-EC" b="1" noProof="0" dirty="0">
-                <a:solidFill>
-                  <a:srgbClr val="48A9A6"/>
-                </a:solidFill>
-              </a:rPr>
-              <a:t>• Capa de Entrada (main.py): </a:t>
-            </a:r>
-            <a:r>
-              <a:rPr lang="es-EC" noProof="0" dirty="0"/>
-              <a:t>Punto de inicio conciso que conecta módulos y arranca el bucle principal.</a:t>
+              <a:t>• Manejadores de Contexto: Uso seguro de 'with open(...)' que garantiza el cierre de archivos sin bloqueos.</a:t>
             </a:r>
           </a:p>
           <a:p>
@@ -5832,7 +6156,7 @@
               <a:spcAft>
                 <a:spcPts val="800"/>
               </a:spcAft>
-              <a:defRPr sz="1400">
+              <a:defRPr sz="1400" b="0">
                 <a:solidFill>
                   <a:srgbClr val="283038"/>
                 </a:solidFill>
@@ -5840,16 +6164,7 @@
               </a:defRPr>
             </a:pPr>
             <a:r>
-              <a:rPr lang="es-EC" b="1" noProof="0" dirty="0">
-                <a:solidFill>
-                  <a:srgbClr val="48A9A6"/>
-                </a:solidFill>
-              </a:rPr>
-              <a:t>• Capa de Modelo (clases/): </a:t>
-            </a:r>
-            <a:r>
-              <a:rPr lang="es-EC" noProof="0" dirty="0"/>
-              <a:t>Entidades 'Medicamento' y 'Pedido' con lógica autónoma.</a:t>
+              <a:t>• Conversión Automática: Función 'evaluar_y_convertir()' en gestion_archivos.py que tipifica int, float y str al iniciar.</a:t>
             </a:r>
           </a:p>
           <a:p>
@@ -5857,7 +6172,7 @@
               <a:spcAft>
                 <a:spcPts val="800"/>
               </a:spcAft>
-              <a:defRPr sz="1400">
+              <a:defRPr sz="1400" b="0">
                 <a:solidFill>
                   <a:srgbClr val="283038"/>
                 </a:solidFill>
@@ -5865,32 +6180,7 @@
               </a:defRPr>
             </a:pPr>
             <a:r>
-              <a:rPr lang="es-EC" b="1" noProof="0" dirty="0">
-                <a:solidFill>
-                  <a:srgbClr val="48A9A6"/>
-                </a:solidFill>
-              </a:rPr>
-              <a:t>• Capa de Servicios (</a:t>
-            </a:r>
-            <a:r>
-              <a:rPr lang="es-EC" b="1" noProof="0" dirty="0" err="1">
-                <a:solidFill>
-                  <a:srgbClr val="48A9A6"/>
-                </a:solidFill>
-              </a:rPr>
-              <a:t>modulos</a:t>
-            </a:r>
-            <a:r>
-              <a:rPr lang="es-EC" b="1" noProof="0" dirty="0">
-                <a:solidFill>
-                  <a:srgbClr val="48A9A6"/>
-                </a:solidFill>
-              </a:rPr>
-              <a:t>/): </a:t>
-            </a:r>
-            <a:r>
-              <a:rPr lang="es-EC" noProof="0" dirty="0"/>
-              <a:t>Manejo de archivos TXT, menús de usuario y utilidades.</a:t>
+              <a:t>• Codificación UTF-8: Soporte nativo para tildes y caracteres especiales en español.</a:t>
             </a:r>
           </a:p>
           <a:p>
@@ -5898,7 +6188,7 @@
               <a:spcAft>
                 <a:spcPts val="800"/>
               </a:spcAft>
-              <a:defRPr sz="1400">
+              <a:defRPr sz="1400" b="0">
                 <a:solidFill>
                   <a:srgbClr val="283038"/>
                 </a:solidFill>
@@ -5906,16 +6196,7 @@
               </a:defRPr>
             </a:pPr>
             <a:r>
-              <a:rPr lang="es-EC" b="1" noProof="0" dirty="0">
-                <a:solidFill>
-                  <a:srgbClr val="48A9A6"/>
-                </a:solidFill>
-              </a:rPr>
-              <a:t>• Desacoplamiento: </a:t>
-            </a:r>
-            <a:r>
-              <a:rPr lang="es-EC" noProof="0" dirty="0"/>
-              <a:t>Cada módulo cumple una única responsabilidad clara y bien definida.</a:t>
+              <a:t>• Sobrescritura Segura: Actualización instantánea y sincronizada tras cada registro, venta o modificación.</a:t>
             </a:r>
           </a:p>
         </p:txBody>
@@ -5998,7 +6279,7 @@
             </a:pPr>
             <a:r>
               <a:rPr lang="es-EC" noProof="0" dirty="0"/>
-              <a:t>📄 Vista de Archivos del Proyecto</a:t>
+              <a:t>📄 Estructura de Archivos TXT</a:t>
             </a:r>
           </a:p>
         </p:txBody>
@@ -6012,7 +6293,7 @@
         <p:spPr>
           <a:xfrm>
             <a:off x="6492240" y="2194560"/>
-            <a:ext cx="4754880" cy="2872581"/>
+            <a:ext cx="4754880" cy="3931920"/>
           </a:xfrm>
           <a:prstGeom prst="rect">
             <a:avLst/>
@@ -6037,12 +6318,8 @@
               </a:defRPr>
             </a:pPr>
             <a:r>
-              <a:rPr lang="es-EC" noProof="0" dirty="0" err="1"/>
-              <a:t>PyPharma_Manager</a:t>
-            </a:r>
-            <a:r>
               <a:rPr lang="es-EC" noProof="0" dirty="0"/>
-              <a:t>/</a:t>
+              <a:t>=== datos/inventario_medicinas.txt ===</a:t>
             </a:r>
           </a:p>
           <a:p>
@@ -6059,7 +6336,7 @@
             </a:pPr>
             <a:r>
               <a:rPr lang="es-EC" noProof="0" dirty="0"/>
-              <a:t>├── 📂 clases/</a:t>
+              <a:t>15,Paracetamol,0.3</a:t>
             </a:r>
           </a:p>
           <a:p>
@@ -6076,7 +6353,7 @@
             </a:pPr>
             <a:r>
               <a:rPr lang="es-EC" noProof="0" dirty="0"/>
-              <a:t>│   ├── 📄 medicamento.py   # Modelo Fármaco</a:t>
+              <a:t>24,Ibuprofeno,0.85</a:t>
             </a:r>
           </a:p>
           <a:p>
@@ -6093,7 +6370,7 @@
             </a:pPr>
             <a:r>
               <a:rPr lang="es-EC" noProof="0" dirty="0"/>
-              <a:t>│   └── 📄 pedido.py        # Modelo Venta/Orden</a:t>
+              <a:t>34,Amoxicilina,0.45</a:t>
             </a:r>
           </a:p>
           <a:p>
@@ -6110,15 +6387,24 @@
             </a:pPr>
             <a:r>
               <a:rPr lang="es-EC" noProof="0" dirty="0"/>
-              <a:t>├── 📂 </a:t>
-            </a:r>
-            <a:r>
-              <a:rPr lang="es-EC" noProof="0" dirty="0" err="1"/>
-              <a:t>modulos</a:t>
-            </a:r>
+              <a:t>10,Omeprazol,0.8</a:t>
+            </a:r>
+          </a:p>
+          <a:p>
+            <a:pPr>
+              <a:spcAft>
+                <a:spcPts val="400"/>
+              </a:spcAft>
+              <a:defRPr sz="1200">
+                <a:solidFill>
+                  <a:srgbClr val="283038"/>
+                </a:solidFill>
+                <a:latin typeface="Consolas"/>
+              </a:defRPr>
+            </a:pPr>
             <a:r>
               <a:rPr lang="es-EC" noProof="0" dirty="0"/>
-              <a:t>/</a:t>
+              <a:t>50,Vitamina C,1.5</a:t>
             </a:r>
           </a:p>
           <a:p>
@@ -6133,9 +6419,23 @@
                 <a:latin typeface="Consolas"/>
               </a:defRPr>
             </a:pPr>
+            <a:endParaRPr lang="es-EC" noProof="0" dirty="0"/>
+          </a:p>
+          <a:p>
+            <a:pPr>
+              <a:spcAft>
+                <a:spcPts val="400"/>
+              </a:spcAft>
+              <a:defRPr sz="1200">
+                <a:solidFill>
+                  <a:srgbClr val="283038"/>
+                </a:solidFill>
+                <a:latin typeface="Consolas"/>
+              </a:defRPr>
+            </a:pPr>
             <a:r>
               <a:rPr lang="es-EC" noProof="0" dirty="0"/>
-              <a:t>│   ├── 📄 gestion_archivos.py # Persistencia TXT</a:t>
+              <a:t>=== datos/registro_pedidos.txt ===</a:t>
             </a:r>
           </a:p>
           <a:p>
@@ -6152,13 +6452,8 @@
             </a:pPr>
             <a:r>
               <a:rPr lang="es-EC" noProof="0" dirty="0"/>
-              <a:t>│   ├── 📄 utilidades.py       # Validaciones try/</a:t>
-            </a:r>
-            <a:r>
-              <a:rPr lang="es-EC" noProof="0" dirty="0" err="1"/>
-              <a:t>exc</a:t>
-            </a:r>
-            <a:endParaRPr lang="es-EC" noProof="0" dirty="0"/>
+              <a:t>Steven,2,Cefalexina,0.2</a:t>
+            </a:r>
           </a:p>
           <a:p>
             <a:pPr>
@@ -6174,7 +6469,7 @@
             </a:pPr>
             <a:r>
               <a:rPr lang="es-EC" noProof="0" dirty="0"/>
-              <a:t>│   └── 📄 menus.py            # Interfaz de Usuario</a:t>
+              <a:t>Jonathan,2,Loratadina,0.25</a:t>
             </a:r>
           </a:p>
           <a:p>
@@ -6191,7 +6486,7 @@
             </a:pPr>
             <a:r>
               <a:rPr lang="es-EC" noProof="0" dirty="0"/>
-              <a:t>├── 📂 datos/</a:t>
+              <a:t>Elias,3,Paracetamol,0.3</a:t>
             </a:r>
           </a:p>
           <a:p>
@@ -6208,53 +6503,53 @@
             </a:pPr>
             <a:r>
               <a:rPr lang="es-EC" noProof="0" dirty="0"/>
-              <a:t>│   ├── 📄 inventario_medicinas.txt</a:t>
-            </a:r>
-          </a:p>
-          <a:p>
-            <a:pPr>
-              <a:spcAft>
-                <a:spcPts val="400"/>
-              </a:spcAft>
-              <a:defRPr sz="1200">
-                <a:solidFill>
-                  <a:srgbClr val="283038"/>
-                </a:solidFill>
-                <a:latin typeface="Consolas"/>
-              </a:defRPr>
-            </a:pPr>
-            <a:r>
-              <a:rPr lang="es-EC" noProof="0" dirty="0"/>
-              <a:t>│   └── 📄 registro_pedidos.txt</a:t>
-            </a:r>
-          </a:p>
-          <a:p>
-            <a:pPr>
-              <a:spcAft>
-                <a:spcPts val="400"/>
-              </a:spcAft>
-              <a:defRPr sz="1200">
-                <a:solidFill>
-                  <a:srgbClr val="283038"/>
-                </a:solidFill>
-                <a:latin typeface="Consolas"/>
-              </a:defRPr>
-            </a:pPr>
-            <a:r>
-              <a:rPr lang="es-EC" noProof="0" dirty="0"/>
-              <a:t>└── 🚀 main.py              # </a:t>
-            </a:r>
-            <a:r>
-              <a:rPr lang="es-EC" noProof="0" dirty="0" err="1"/>
-              <a:t>Entry</a:t>
-            </a:r>
-            <a:r>
-              <a:rPr lang="es-EC" noProof="0" dirty="0"/>
-              <a:t> Point del Sistema</a:t>
-            </a:r>
-          </a:p>
-        </p:txBody>
-      </p:sp>
+              <a:t>Sebastian,1,Vitamina C,1.5</a:t>
+            </a:r>
+          </a:p>
+        </p:txBody>
+      </p:sp>
+      <p:cxnSp>
+        <p:nvCxnSpPr>
+          <p:cNvPr id="11" name="Straight Connector 10">
+            <a:extLst>
+              <a:ext uri="{FF2B5EF4-FFF2-40B4-BE49-F238E27FC236}">
+                <a16:creationId xmlns:a16="http://schemas.microsoft.com/office/drawing/2014/main" id="{5727ACBB-D31B-598E-937C-A55D20E39BCE}"/>
+              </a:ext>
+            </a:extLst>
+          </p:cNvPr>
+          <p:cNvCxnSpPr/>
+          <p:nvPr/>
+        </p:nvCxnSpPr>
+        <p:spPr>
+          <a:xfrm>
+            <a:off x="6492240" y="3732551"/>
+            <a:ext cx="4754880" cy="0"/>
+          </a:xfrm>
+          <a:prstGeom prst="line">
+            <a:avLst/>
+          </a:prstGeom>
+          <a:ln>
+            <a:solidFill>
+              <a:srgbClr val="00B0F0"/>
+            </a:solidFill>
+            <a:prstDash val="dash"/>
+          </a:ln>
+        </p:spPr>
+        <p:style>
+          <a:lnRef idx="2">
+            <a:schemeClr val="accent1"/>
+          </a:lnRef>
+          <a:fillRef idx="0">
+            <a:schemeClr val="accent1"/>
+          </a:fillRef>
+          <a:effectRef idx="1">
+            <a:schemeClr val="accent1"/>
+          </a:effectRef>
+          <a:fontRef idx="minor">
+            <a:schemeClr val="tx1"/>
+          </a:fontRef>
+        </p:style>
+      </p:cxnSp>
     </p:spTree>
   </p:cSld>
   <p:clrMapOvr>
@@ -7063,6 +7358,7 @@
                 <a:latin typeface="Segoe UI"/>
               </a:defRPr>
             </a:pPr>
+            <a:endParaRPr/>
           </a:p>
         </p:txBody>
       </p:sp>
@@ -7209,6 +7505,7 @@
                 <a:latin typeface="Segoe UI"/>
               </a:defRPr>
             </a:pPr>
+            <a:endParaRPr/>
           </a:p>
         </p:txBody>
       </p:sp>
@@ -8270,7 +8567,7 @@
           <a:lstStyle/>
           <a:p>
             <a:pPr algn="ctr"/>
-            <a:endParaRPr lang="es-EC" noProof="0" dirty="0"/>
+            <a:endParaRPr/>
           </a:p>
         </p:txBody>
       </p:sp>
@@ -8305,15 +8602,11 @@
               </a:defRPr>
             </a:pPr>
             <a:r>
-              <a:rPr lang="es-EC" noProof="0" dirty="0"/>
-              <a:t>Conclusiones del Proyecto</a:t>
-            </a:r>
-          </a:p>
-          <a:p>
-            <a:pPr>
-              <a:spcBef>
-                <a:spcPts val="400"/>
-              </a:spcBef>
+              <a:t>[3. LA SUPERFICIE] Interfaz Web HTML5 de Apoyo</a:t>
+            </a:r>
+          </a:p>
+          <a:p>
+            <a:pPr>
               <a:defRPr sz="1500">
                 <a:solidFill>
                   <a:srgbClr val="6E7882"/>
@@ -8322,8 +8615,7 @@
               </a:defRPr>
             </a:pPr>
             <a:r>
-              <a:rPr lang="es-EC" noProof="0" dirty="0"/>
-              <a:t>Logros académicos y síntesis técnica de PyPharma Manager</a:t>
+              <a:t>Portafolio visual moderno y documentación como soporte para la exposición</a:t>
             </a:r>
           </a:p>
         </p:txBody>
@@ -8368,7 +8660,7 @@
           <a:lstStyle/>
           <a:p>
             <a:pPr algn="ctr"/>
-            <a:endParaRPr lang="es-EC" noProof="0" dirty="0"/>
+            <a:endParaRPr/>
           </a:p>
         </p:txBody>
       </p:sp>
@@ -8414,7 +8706,7 @@
           <a:lstStyle/>
           <a:p>
             <a:pPr algn="ctr"/>
-            <a:endParaRPr lang="es-EC" noProof="0" dirty="0"/>
+            <a:endParaRPr/>
           </a:p>
         </p:txBody>
       </p:sp>
@@ -8441,9 +8733,6 @@
           <a:lstStyle/>
           <a:p>
             <a:pPr>
-              <a:spcAft>
-                <a:spcPts val="1200"/>
-              </a:spcAft>
               <a:defRPr sz="1900" b="1">
                 <a:solidFill>
                   <a:srgbClr val="1E3A4C"/>
@@ -8452,16 +8741,12 @@
               </a:defRPr>
             </a:pPr>
             <a:r>
-              <a:rPr lang="es-EC" noProof="0" dirty="0"/>
-              <a:t>Logros Académicos</a:t>
-            </a:r>
-          </a:p>
-          <a:p>
-            <a:pPr>
-              <a:spcAft>
-                <a:spcPts val="800"/>
-              </a:spcAft>
-              <a:defRPr sz="1400">
+              <a:t>Diseño y Desarrollo Web</a:t>
+            </a:r>
+          </a:p>
+          <a:p>
+            <a:pPr>
+              <a:defRPr sz="1400" b="0">
                 <a:solidFill>
                   <a:srgbClr val="283038"/>
                 </a:solidFill>
@@ -8469,24 +8754,12 @@
               </a:defRPr>
             </a:pPr>
             <a:r>
-              <a:rPr lang="es-EC" b="1" noProof="0" dirty="0">
-                <a:solidFill>
-                  <a:srgbClr val="48A9A6"/>
-                </a:solidFill>
-              </a:rPr>
-              <a:t>• Estructura de Datos: </a:t>
-            </a:r>
-            <a:r>
-              <a:rPr lang="es-EC" noProof="0" dirty="0"/>
-              <a:t>Aplicación práctica y eficiente de listas, diccionarios y objetos.</a:t>
-            </a:r>
-          </a:p>
-          <a:p>
-            <a:pPr>
-              <a:spcAft>
-                <a:spcPts val="800"/>
-              </a:spcAft>
-              <a:defRPr sz="1400">
+              <a:t>• Cumplimiento Académico: Desarrollo de página web ('index.html' y 'presentacion.html') según requisitos de la asignatura.</a:t>
+            </a:r>
+          </a:p>
+          <a:p>
+            <a:pPr>
+              <a:defRPr sz="1400" b="0">
                 <a:solidFill>
                   <a:srgbClr val="283038"/>
                 </a:solidFill>
@@ -8494,24 +8767,12 @@
               </a:defRPr>
             </a:pPr>
             <a:r>
-              <a:rPr lang="es-EC" b="1" noProof="0" dirty="0">
-                <a:solidFill>
-                  <a:srgbClr val="48A9A6"/>
-                </a:solidFill>
-              </a:rPr>
-              <a:t>• Ingeniería en Software: </a:t>
-            </a:r>
-            <a:r>
-              <a:rPr lang="es-EC" noProof="0" dirty="0"/>
-              <a:t>Desarrollo aplicando modularidad y buenas prácticas de codificación.</a:t>
-            </a:r>
-          </a:p>
-          <a:p>
-            <a:pPr>
-              <a:spcAft>
-                <a:spcPts val="800"/>
-              </a:spcAft>
-              <a:defRPr sz="1400">
+              <a:t>• Estética Moderna: Estilos CSS avanzados con gradientes, tipografía Google Fonts y diseño limpio y responsivo.</a:t>
+            </a:r>
+          </a:p>
+          <a:p>
+            <a:pPr>
+              <a:defRPr sz="1400" b="0">
                 <a:solidFill>
                   <a:srgbClr val="283038"/>
                 </a:solidFill>
@@ -8519,41 +8780,7 @@
               </a:defRPr>
             </a:pPr>
             <a:r>
-              <a:rPr lang="es-EC" b="1" noProof="0" dirty="0">
-                <a:solidFill>
-                  <a:srgbClr val="48A9A6"/>
-                </a:solidFill>
-              </a:rPr>
-              <a:t>• Robustez del Sistema: </a:t>
-            </a:r>
-            <a:r>
-              <a:rPr lang="es-EC" noProof="0" dirty="0"/>
-              <a:t>Prevención total de fallos de ejecución ante entradas del usuario.</a:t>
-            </a:r>
-          </a:p>
-          <a:p>
-            <a:pPr>
-              <a:spcAft>
-                <a:spcPts val="800"/>
-              </a:spcAft>
-              <a:defRPr sz="1400">
-                <a:solidFill>
-                  <a:srgbClr val="283038"/>
-                </a:solidFill>
-                <a:latin typeface="Segoe UI"/>
-              </a:defRPr>
-            </a:pPr>
-            <a:r>
-              <a:rPr lang="es-EC" b="1" noProof="0" dirty="0">
-                <a:solidFill>
-                  <a:srgbClr val="48A9A6"/>
-                </a:solidFill>
-              </a:rPr>
-              <a:t>• Trabajo en Equipo: </a:t>
-            </a:r>
-            <a:r>
-              <a:rPr lang="es-EC" noProof="0" dirty="0"/>
-              <a:t>Colaboración exitosa y articulación del Grupo 7.</a:t>
+              <a:t>• Rol de Apoyo: Actúa como soporte visual y documental mientras el sistema principal corre de forma nativa en Python.</a:t>
             </a:r>
           </a:p>
         </p:txBody>
@@ -8600,7 +8827,7 @@
           <a:lstStyle/>
           <a:p>
             <a:pPr algn="ctr"/>
-            <a:endParaRPr lang="es-EC" noProof="0" dirty="0"/>
+            <a:endParaRPr/>
           </a:p>
         </p:txBody>
       </p:sp>
@@ -8613,7 +8840,7 @@
         <p:spPr>
           <a:xfrm>
             <a:off x="6537960" y="1828800"/>
-            <a:ext cx="4663440" cy="3862596"/>
+            <a:ext cx="4663440" cy="4206240"/>
           </a:xfrm>
           <a:prstGeom prst="rect">
             <a:avLst/>
@@ -8627,9 +8854,6 @@
           <a:lstStyle/>
           <a:p>
             <a:pPr>
-              <a:spcAft>
-                <a:spcPts val="1200"/>
-              </a:spcAft>
               <a:defRPr sz="1900" b="1">
                 <a:solidFill>
                   <a:srgbClr val="1E3A4C"/>
@@ -8638,16 +8862,12 @@
               </a:defRPr>
             </a:pPr>
             <a:r>
-              <a:rPr lang="es-EC" noProof="0" dirty="0"/>
-              <a:t>PyPharma Manager - Grupo 7</a:t>
-            </a:r>
-          </a:p>
-          <a:p>
-            <a:pPr>
-              <a:spcAft>
-                <a:spcPts val="800"/>
-              </a:spcAft>
-              <a:defRPr sz="1400">
+              <a:t>Contenido del Portal HTML5</a:t>
+            </a:r>
+          </a:p>
+          <a:p>
+            <a:pPr>
+              <a:defRPr sz="1400" b="0">
                 <a:solidFill>
                   <a:srgbClr val="283038"/>
                 </a:solidFill>
@@ -8655,24 +8875,12 @@
               </a:defRPr>
             </a:pPr>
             <a:r>
-              <a:rPr lang="es-EC" b="1" noProof="0" dirty="0">
-                <a:solidFill>
-                  <a:srgbClr val="48A9A6"/>
-                </a:solidFill>
-              </a:rPr>
-              <a:t>• Steven Montalván: </a:t>
-            </a:r>
-            <a:r>
-              <a:rPr lang="es-EC" noProof="0" dirty="0"/>
-              <a:t>Desarrollo de Modelos y Lógica de Pedidos.</a:t>
-            </a:r>
-          </a:p>
-          <a:p>
-            <a:pPr>
-              <a:spcAft>
-                <a:spcPts val="800"/>
-              </a:spcAft>
-              <a:defRPr sz="1400">
+              <a:t>• Portada Institucional: Universidad Estatal de Milagro, facultad, asignatura, docente e integrantes del Grupo 7.</a:t>
+            </a:r>
+          </a:p>
+          <a:p>
+            <a:pPr>
+              <a:defRPr sz="1400" b="0">
                 <a:solidFill>
                   <a:srgbClr val="283038"/>
                 </a:solidFill>
@@ -8680,24 +8888,12 @@
               </a:defRPr>
             </a:pPr>
             <a:r>
-              <a:rPr lang="es-EC" b="1" noProof="0" dirty="0">
-                <a:solidFill>
-                  <a:srgbClr val="48A9A6"/>
-                </a:solidFill>
-              </a:rPr>
-              <a:t>• Jonathan Bravo: </a:t>
-            </a:r>
-            <a:r>
-              <a:rPr lang="es-EC" noProof="0" dirty="0"/>
-              <a:t>Módulo de Persistencia y Gestión de Archivos.</a:t>
-            </a:r>
-          </a:p>
-          <a:p>
-            <a:pPr>
-              <a:spcAft>
-                <a:spcPts val="800"/>
-              </a:spcAft>
-              <a:defRPr sz="1400">
+              <a:t>• Documentación Técnica: Objetivo del sistema, descripción del problema y funcionalidades clave orientadas a objetos.</a:t>
+            </a:r>
+          </a:p>
+          <a:p>
+            <a:pPr>
+              <a:defRPr sz="1400" b="0">
                 <a:solidFill>
                   <a:srgbClr val="283038"/>
                 </a:solidFill>
@@ -8705,161 +8901,11 @@
               </a:defRPr>
             </a:pPr>
             <a:r>
-              <a:rPr lang="es-EC" b="1" noProof="0" dirty="0">
-                <a:solidFill>
-                  <a:srgbClr val="48A9A6"/>
-                </a:solidFill>
-              </a:rPr>
-              <a:t>• Sebastián Nevárez: </a:t>
-            </a:r>
-            <a:r>
-              <a:rPr lang="es-EC" noProof="0" dirty="0"/>
-              <a:t>Interfaz por Consola y Punto de Entrada.</a:t>
-            </a:r>
-          </a:p>
-          <a:p>
-            <a:pPr>
-              <a:spcAft>
-                <a:spcPts val="800"/>
-              </a:spcAft>
-              <a:defRPr sz="1400">
-                <a:solidFill>
-                  <a:srgbClr val="283038"/>
-                </a:solidFill>
-                <a:latin typeface="Segoe UI"/>
-              </a:defRPr>
-            </a:pPr>
-            <a:r>
-              <a:rPr lang="es-EC" b="1" noProof="0" dirty="0">
-                <a:solidFill>
-                  <a:srgbClr val="48A9A6"/>
-                </a:solidFill>
-              </a:rPr>
-              <a:t>• Elías Balladares: </a:t>
-            </a:r>
-            <a:r>
-              <a:rPr lang="es-EC" noProof="0" dirty="0"/>
-              <a:t>Validaciones, Búsquedas y Pruebas Integrales.</a:t>
-            </a:r>
-          </a:p>
-          <a:p>
-            <a:pPr>
-              <a:spcAft>
-                <a:spcPts val="800"/>
-              </a:spcAft>
-              <a:defRPr sz="1400">
-                <a:solidFill>
-                  <a:srgbClr val="283038"/>
-                </a:solidFill>
-                <a:latin typeface="Segoe UI"/>
-              </a:defRPr>
-            </a:pPr>
-            <a:endParaRPr lang="es-EC" noProof="0" dirty="0"/>
-          </a:p>
-          <a:p>
-            <a:pPr>
-              <a:spcAft>
-                <a:spcPts val="800"/>
-              </a:spcAft>
-              <a:defRPr sz="1400">
-                <a:solidFill>
-                  <a:srgbClr val="283038"/>
-                </a:solidFill>
-                <a:latin typeface="Segoe UI"/>
-              </a:defRPr>
-            </a:pPr>
-            <a:endParaRPr lang="es-EC" noProof="0" dirty="0"/>
-          </a:p>
-          <a:p>
-            <a:pPr algn="ctr">
-              <a:spcAft>
-                <a:spcPts val="800"/>
-              </a:spcAft>
-              <a:defRPr sz="1400">
-                <a:solidFill>
-                  <a:srgbClr val="283038"/>
-                </a:solidFill>
-                <a:latin typeface="Segoe UI"/>
-              </a:defRPr>
-            </a:pPr>
-            <a:r>
-              <a:rPr lang="es-EC" sz="3600" b="1" noProof="0" dirty="0">
-                <a:solidFill>
-                  <a:srgbClr val="48A9A6"/>
-                </a:solidFill>
-              </a:rPr>
-              <a:t>¡Muchas Gracias!</a:t>
-            </a:r>
-            <a:endParaRPr lang="es-EC" sz="3600" noProof="0" dirty="0"/>
-          </a:p>
-        </p:txBody>
-      </p:sp>
-      <p:pic>
-        <p:nvPicPr>
-          <p:cNvPr id="9" name="Picture 8" descr="Google Meet: Videoconferencia | UC3M">
-            <a:extLst>
-              <a:ext uri="{FF2B5EF4-FFF2-40B4-BE49-F238E27FC236}">
-                <a16:creationId xmlns:a16="http://schemas.microsoft.com/office/drawing/2014/main" id="{4625E3B5-CDC5-773A-8BB4-CB282613C31D}"/>
-              </a:ext>
-            </a:extLst>
-          </p:cNvPr>
-          <p:cNvPicPr>
-            <a:picLocks noChangeAspect="1"/>
-          </p:cNvPicPr>
-          <p:nvPr/>
-        </p:nvPicPr>
-        <p:blipFill>
-          <a:blip r:embed="rId2"/>
-          <a:stretch>
-            <a:fillRect/>
-          </a:stretch>
-        </p:blipFill>
-        <p:spPr>
-          <a:xfrm>
-            <a:off x="1933306" y="4688052"/>
-            <a:ext cx="1230810" cy="1233272"/>
-          </a:xfrm>
-          <a:prstGeom prst="rect">
-            <a:avLst/>
-          </a:prstGeom>
-        </p:spPr>
-      </p:pic>
-      <p:pic>
-        <p:nvPicPr>
-          <p:cNvPr id="10" name="Graphic 9" descr="GitHub - Wikipedia, la enciclopedia libre">
-            <a:extLst>
-              <a:ext uri="{FF2B5EF4-FFF2-40B4-BE49-F238E27FC236}">
-                <a16:creationId xmlns:a16="http://schemas.microsoft.com/office/drawing/2014/main" id="{61AC600D-5B96-AFC9-637E-0F4BAFFD2153}"/>
-              </a:ext>
-            </a:extLst>
-          </p:cNvPr>
-          <p:cNvPicPr>
-            <a:picLocks noChangeAspect="1"/>
-          </p:cNvPicPr>
-          <p:nvPr/>
-        </p:nvPicPr>
-        <p:blipFill>
-          <a:blip>
-            <a:extLst>
-              <a:ext uri="{96DAC541-7B7A-43D3-8B79-37D633B846F1}">
-                <asvg:svgBlip xmlns:asvg="http://schemas.microsoft.com/office/drawing/2016/SVG/main" r:embed="rId3"/>
-              </a:ext>
-            </a:extLst>
-          </a:blip>
-          <a:stretch>
-            <a:fillRect/>
-          </a:stretch>
-        </p:blipFill>
-        <p:spPr>
-          <a:xfrm>
-            <a:off x="3392716" y="4764347"/>
-            <a:ext cx="1030009" cy="1030009"/>
-          </a:xfrm>
-          <a:prstGeom prst="rect">
-            <a:avLst/>
-          </a:prstGeom>
-        </p:spPr>
-      </p:pic>
+              <a:t>• Evidencia Visual: Capturas de pantalla del sistema en Python, tecnologías utilizadas y conclusiones generales.</a:t>
+            </a:r>
+          </a:p>
+        </p:txBody>
+      </p:sp>
     </p:spTree>
   </p:cSld>
   <p:clrMapOvr>
